--- a/decks/Archera-for-Automatum.pptx
+++ b/decks/Archera-for-Automatum.pptx
@@ -521,7 +521,7 @@
           <a:p>
             <a:r>
               <a:rPr lang="en-US" dirty="0"/>
-              <a:t>Positioning brief: how Automatum — a cloud-marketplace management platform serving 80+ ISVs on AWS, Azure, GCP and Red Hat — can put Archera to work. The lead motion is attach: Archera is free, it installs in minutes, and it produces savings on an AWS bill every one of Automatum's customers already pays. Secondary motions are a self-funding subscription, FTR acceleration, cover for unforecastable AI spend, and rev-share on premiums through CPPO. Prepared as an alliance-advisory artifact.</a:t>
+              <a:t>Positioning brief: how Automatum — a cloud-marketplace management platform serving 80+ ISVs on AWS, Azure, GCP and Red Hat — can put Archera to work. The lead motion is attach: Archera is free, it installs in minutes, and it produces savings on the AWS bills most of Automatum's customers already pay. Secondary motions are a self-funding subscription, FTR acceleration, cover for unforecastable AI spend, and rev-share on premiums through CPPO. Prepared as an alliance-advisory artifact.</a:t>
             </a:r>
             <a:endParaRPr lang="en-US" dirty="0"/>
           </a:p>
@@ -1929,7 +1929,7 @@
           <a:p>
             <a:r>
               <a:rPr lang="en-US" dirty="0"/>
-              <a:t>Do not defend the inputs — invite the audience to replace them. The point of the slide is that even the conservative column, at $10K a month of average AWS spend, produces a seven-figure savings pool for the base and a five-figure revenue line for Automatum. If Automatum can pull actual spend data for even ten accounts, the base case tightens immediately.</a:t>
+              <a:t>Do not defend the inputs — invite the audience to replace them. The point of the slide is that even the conservative column, at $10K a month of average AWS spend, produces a high-six-figure savings pool for the base (seven figures in the base case) and a five-figure revenue line for Automatum. If Automatum can pull actual spend data for even ten accounts, the base case tightens immediately.</a:t>
             </a:r>
             <a:endParaRPr lang="en-US" dirty="0"/>
           </a:p>
@@ -2721,7 +2721,7 @@
                 <a:ea typeface="Calibri" pitchFamily="34" charset="-122"/>
                 <a:cs typeface="Calibri" pitchFamily="34" charset="-120"/>
               </a:rPr>
-              <a:t>Insured commitments attached to the 80+ ISVs Automatum already serves — inserted through the presales motion that already runs, with the premium metered through CPPO on the rails Automatum already reconciles.</a:t>
+              <a:t>Guaranteed Commitments attached to the AWS estates of the 80+ ISVs Automatum already serves — inserted through the presales motion that already runs, with the premium metered through CPPO on the rails Automatum already reconciles.</a:t>
             </a:r>
             <a:endParaRPr lang="en-US" sz="1400" dirty="0"/>
           </a:p>
@@ -2802,7 +2802,7 @@
         <p:spPr>
           <a:xfrm>
             <a:off x="2152498" y="4315968"/>
-            <a:ext cx="1618488" cy="384048"/>
+            <a:ext cx="991210" cy="384048"/>
           </a:xfrm>
           <a:prstGeom prst="roundRect">
             <a:avLst>
@@ -2829,7 +2829,7 @@
         <p:spPr>
           <a:xfrm>
             <a:off x="2152498" y="4315968"/>
-            <a:ext cx="1618488" cy="384048"/>
+            <a:ext cx="991210" cy="384048"/>
           </a:xfrm>
           <a:prstGeom prst="rect">
             <a:avLst/>
@@ -2853,7 +2853,7 @@
                 <a:ea typeface="Calibri" pitchFamily="34" charset="-122"/>
                 <a:cs typeface="Calibri" pitchFamily="34" charset="-120"/>
               </a:rPr>
-              <a:t>80+ ISVs on AWS</a:t>
+              <a:t>80+ ISVs</a:t>
             </a:r>
             <a:endParaRPr lang="en-US" sz="1100" dirty="0"/>
           </a:p>
@@ -2867,7 +2867,7 @@
         </p:nvSpPr>
         <p:spPr>
           <a:xfrm>
-            <a:off x="3917290" y="4315968"/>
+            <a:off x="3290011" y="4315968"/>
             <a:ext cx="1618488" cy="384048"/>
           </a:xfrm>
           <a:prstGeom prst="roundRect">
@@ -2894,7 +2894,7 @@
         </p:nvSpPr>
         <p:spPr>
           <a:xfrm>
-            <a:off x="3917290" y="4315968"/>
+            <a:off x="3290011" y="4315968"/>
             <a:ext cx="1618488" cy="384048"/>
           </a:xfrm>
           <a:prstGeom prst="rect">
@@ -2933,7 +2933,7 @@
         </p:nvSpPr>
         <p:spPr>
           <a:xfrm>
-            <a:off x="5682082" y="4315968"/>
+            <a:off x="5054803" y="4315968"/>
             <a:ext cx="1887322" cy="384048"/>
           </a:xfrm>
           <a:prstGeom prst="roundRect">
@@ -2960,7 +2960,7 @@
         </p:nvSpPr>
         <p:spPr>
           <a:xfrm>
-            <a:off x="5682082" y="4315968"/>
+            <a:off x="5054803" y="4315968"/>
             <a:ext cx="1887322" cy="384048"/>
           </a:xfrm>
           <a:prstGeom prst="rect">
@@ -3405,7 +3405,7 @@
                 <a:ea typeface="Calibri" pitchFamily="34" charset="-122"/>
                 <a:cs typeface="Calibri" pitchFamily="34" charset="-120"/>
               </a:rPr>
-              <a:t>platform cost</a:t>
+              <a:t>upfront cost</a:t>
             </a:r>
             <a:endParaRPr lang="en-US" sz="1100" dirty="0"/>
           </a:p>
@@ -3515,7 +3515,7 @@
                 <a:ea typeface="Calibri" pitchFamily="34" charset="-122"/>
                 <a:cs typeface="Calibri" pitchFamily="34" charset="-120"/>
               </a:rPr>
-              <a:t>THE MOTION  ·  PRESALES</a:t>
+              <a:t>USE CASE 01  ·  PRESALES</a:t>
             </a:r>
             <a:endParaRPr lang="en-US" sz="1000" dirty="0"/>
           </a:p>
@@ -3707,7 +3707,7 @@
                 <a:ea typeface="Calibri" pitchFamily="34" charset="-122"/>
                 <a:cs typeface="Calibri" pitchFamily="34" charset="-120"/>
               </a:rPr>
-              <a:t>The savings analysis is a discovery artifact, not a pitch</a:t>
+              <a:t>A discovery artefact, not a pitch</a:t>
             </a:r>
             <a:endParaRPr lang="en-US" sz="1100" dirty="0"/>
           </a:p>
@@ -3749,7 +3749,7 @@
                 <a:ea typeface="Calibri" pitchFamily="34" charset="-122"/>
                 <a:cs typeface="Calibri" pitchFamily="34" charset="-120"/>
               </a:rPr>
-              <a:t>Ask for read-only billing access in the scoping conversation that already happens. A coverage and effective-savings number comes back inside the week — and earns a seat with the ISV's finance owner, not just product.</a:t>
+              <a:t>Ask for read-only billing access in the scoping conversation that already happens. Coverage and Effective Savings Rate numbers come back inside the week — and earn a seat with the ISV's finance owner, not just product.</a:t>
             </a:r>
             <a:endParaRPr lang="en-US" sz="1050" dirty="0"/>
           </a:p>
@@ -3899,7 +3899,7 @@
                 <a:ea typeface="Calibri" pitchFamily="34" charset="-122"/>
                 <a:cs typeface="Calibri" pitchFamily="34" charset="-120"/>
               </a:rPr>
-              <a:t>The same minimal-privilege connection that runs the savings analysis auto-populates FTR and Well-Architected. No second ask of the customer.</a:t>
+              <a:t>The same minimal-privilege install that runs the savings analysis also feeds the Well-Architected and FTR auto-population — no second ask of the customer (assessment scope to confirm with Archera).</a:t>
             </a:r>
             <a:endParaRPr lang="en-US" sz="1050" dirty="0"/>
           </a:p>
@@ -4199,7 +4199,7 @@
                 <a:ea typeface="Calibri" pitchFamily="34" charset="-122"/>
                 <a:cs typeface="Calibri" pitchFamily="34" charset="-120"/>
               </a:rPr>
-              <a:t>Savings realised on the customer's own bill is a concrete reason for the AWS account team to engage — and it strengthens the co-sell narrative on the listing side too.</a:t>
+              <a:t>A savings number from the customer's own bill gives the AWS account team a concrete reason to engage — and strengthens the co-sell narrative on the listing side too.</a:t>
             </a:r>
             <a:endParaRPr lang="en-US" sz="1050" dirty="0"/>
           </a:p>
@@ -4388,7 +4388,7 @@
                 <a:ea typeface="Calibri" pitchFamily="34" charset="-122"/>
                 <a:cs typeface="Calibri" pitchFamily="34" charset="-120"/>
               </a:rPr>
-              <a:t>Who does what:  </a:t>
+              <a:t>Who does what: </a:t>
             </a:r>
             <a:pPr indent="0" marL="0">
               <a:buNone/>
@@ -4402,7 +4402,7 @@
                 <a:ea typeface="Calibri" pitchFamily="34" charset="-122"/>
                 <a:cs typeface="Calibri" pitchFamily="34" charset="-120"/>
               </a:rPr>
-              <a:t>Automatum presales runs the connect and the analysis. Archera builds and manages the commitments. The ISV signs one private offer.</a:t>
+              <a:t>Automatum runs the connect and the analysis; Archera builds and manages the commitments; the ISV signs one private offer.</a:t>
             </a:r>
             <a:endParaRPr lang="en-US" sz="1150" dirty="0"/>
           </a:p>
@@ -4551,7 +4551,7 @@
                 <a:ea typeface="Calibri" pitchFamily="34" charset="-122"/>
                 <a:cs typeface="Calibri" pitchFamily="34" charset="-120"/>
               </a:rPr>
-              <a:t>THE MOTION  ·  THE INSTALLED BASE</a:t>
+              <a:t>USE CASE 01  ·  THE INSTALLED BASE</a:t>
             </a:r>
             <a:endParaRPr lang="en-US" sz="1000" dirty="0"/>
           </a:p>
@@ -4635,7 +4635,7 @@
                 <a:ea typeface="Calibri" pitchFamily="34" charset="-122"/>
                 <a:cs typeface="Calibri" pitchFamily="34" charset="-120"/>
               </a:rPr>
-              <a:t>Median saving already captured, by annual AWS compute spend — the bands say where to start and what to lead with.</a:t>
+              <a:t>Median saving already captured, by annual AWS compute usage — the bands say where to start and what to lead with.</a:t>
             </a:r>
             <a:endParaRPr lang="en-US" sz="1350" dirty="0"/>
           </a:p>
@@ -4650,11 +4650,11 @@
         <p:spPr>
           <a:xfrm>
             <a:off x="566928" y="2029968"/>
-            <a:ext cx="3576218" cy="2249424"/>
+            <a:ext cx="3576218" cy="2304288"/>
           </a:xfrm>
           <a:prstGeom prst="roundRect">
             <a:avLst>
-              <a:gd name="adj" fmla="val 2846"/>
+              <a:gd name="adj" fmla="val 2778"/>
             </a:avLst>
           </a:prstGeom>
           <a:solidFill>
@@ -4810,7 +4810,7 @@
         </p:nvSpPr>
         <p:spPr>
           <a:xfrm>
-            <a:off x="822960" y="3785616"/>
+            <a:off x="822960" y="3840480"/>
             <a:ext cx="3064154" cy="402336"/>
           </a:xfrm>
           <a:prstGeom prst="rect">
@@ -4853,11 +4853,11 @@
         <p:spPr>
           <a:xfrm>
             <a:off x="4307738" y="2029968"/>
-            <a:ext cx="3576218" cy="2249424"/>
+            <a:ext cx="3576218" cy="2304288"/>
           </a:xfrm>
           <a:prstGeom prst="roundRect">
             <a:avLst>
-              <a:gd name="adj" fmla="val 2846"/>
+              <a:gd name="adj" fmla="val 2778"/>
             </a:avLst>
           </a:prstGeom>
           <a:solidFill>
@@ -4904,7 +4904,7 @@
                 <a:ea typeface="Calibri" pitchFamily="34" charset="-122"/>
                 <a:cs typeface="Calibri" pitchFamily="34" charset="-120"/>
               </a:rPr>
-              <a:t>$500K – $10M</a:t>
+              <a:t>$500K–$10M</a:t>
             </a:r>
             <a:endParaRPr lang="en-US" sz="900" dirty="0"/>
           </a:p>
@@ -5013,7 +5013,7 @@
         </p:nvSpPr>
         <p:spPr>
           <a:xfrm>
-            <a:off x="4563770" y="3785616"/>
+            <a:off x="4563770" y="3840480"/>
             <a:ext cx="3064154" cy="402336"/>
           </a:xfrm>
           <a:prstGeom prst="rect">
@@ -5056,11 +5056,11 @@
         <p:spPr>
           <a:xfrm>
             <a:off x="8048549" y="2029968"/>
-            <a:ext cx="3576218" cy="2249424"/>
+            <a:ext cx="3576218" cy="2304288"/>
           </a:xfrm>
           <a:prstGeom prst="roundRect">
             <a:avLst>
-              <a:gd name="adj" fmla="val 2846"/>
+              <a:gd name="adj" fmla="val 2778"/>
             </a:avLst>
           </a:prstGeom>
           <a:solidFill>
@@ -5216,7 +5216,7 @@
         </p:nvSpPr>
         <p:spPr>
           <a:xfrm>
-            <a:off x="8304581" y="3785616"/>
+            <a:off x="8304581" y="3840480"/>
             <a:ext cx="3064154" cy="402336"/>
           </a:xfrm>
           <a:prstGeom prst="rect">
@@ -5297,12 +5297,12 @@
         </p:nvSpPr>
         <p:spPr>
           <a:xfrm>
-            <a:off x="566928" y="4754880"/>
-            <a:ext cx="3576218" cy="914400"/>
+            <a:off x="566928" y="4718304"/>
+            <a:ext cx="3576218" cy="987552"/>
           </a:xfrm>
           <a:prstGeom prst="roundRect">
             <a:avLst>
-              <a:gd name="adj" fmla="val 7000"/>
+              <a:gd name="adj" fmla="val 6481"/>
             </a:avLst>
           </a:prstGeom>
           <a:solidFill>
@@ -5324,7 +5324,7 @@
         </p:nvSpPr>
         <p:spPr>
           <a:xfrm>
-            <a:off x="804672" y="4864608"/>
+            <a:off x="804672" y="4828032"/>
             <a:ext cx="3100730" cy="256032"/>
           </a:xfrm>
           <a:prstGeom prst="rect">
@@ -5363,8 +5363,8 @@
         </p:nvSpPr>
         <p:spPr>
           <a:xfrm>
-            <a:off x="804672" y="5120640"/>
-            <a:ext cx="3100730" cy="493776"/>
+            <a:off x="804672" y="5084064"/>
+            <a:ext cx="3100730" cy="566928"/>
           </a:xfrm>
           <a:prstGeom prst="rect">
             <a:avLst/>
@@ -5405,12 +5405,12 @@
         </p:nvSpPr>
         <p:spPr>
           <a:xfrm>
-            <a:off x="4307738" y="4754880"/>
-            <a:ext cx="3576218" cy="914400"/>
+            <a:off x="4307738" y="4718304"/>
+            <a:ext cx="3576218" cy="987552"/>
           </a:xfrm>
           <a:prstGeom prst="roundRect">
             <a:avLst>
-              <a:gd name="adj" fmla="val 7000"/>
+              <a:gd name="adj" fmla="val 6481"/>
             </a:avLst>
           </a:prstGeom>
           <a:solidFill>
@@ -5432,7 +5432,7 @@
         </p:nvSpPr>
         <p:spPr>
           <a:xfrm>
-            <a:off x="4545482" y="4864608"/>
+            <a:off x="4545482" y="4828032"/>
             <a:ext cx="3100730" cy="256032"/>
           </a:xfrm>
           <a:prstGeom prst="rect">
@@ -5471,8 +5471,8 @@
         </p:nvSpPr>
         <p:spPr>
           <a:xfrm>
-            <a:off x="4545482" y="5120640"/>
-            <a:ext cx="3100730" cy="493776"/>
+            <a:off x="4545482" y="5084064"/>
+            <a:ext cx="3100730" cy="566928"/>
           </a:xfrm>
           <a:prstGeom prst="rect">
             <a:avLst/>
@@ -5513,12 +5513,12 @@
         </p:nvSpPr>
         <p:spPr>
           <a:xfrm>
-            <a:off x="8048549" y="4754880"/>
-            <a:ext cx="3576218" cy="914400"/>
+            <a:off x="8048549" y="4718304"/>
+            <a:ext cx="3576218" cy="987552"/>
           </a:xfrm>
           <a:prstGeom prst="roundRect">
             <a:avLst>
-              <a:gd name="adj" fmla="val 7000"/>
+              <a:gd name="adj" fmla="val 6481"/>
             </a:avLst>
           </a:prstGeom>
           <a:solidFill>
@@ -5540,7 +5540,7 @@
         </p:nvSpPr>
         <p:spPr>
           <a:xfrm>
-            <a:off x="8286293" y="4864608"/>
+            <a:off x="8286293" y="4828032"/>
             <a:ext cx="3100730" cy="256032"/>
           </a:xfrm>
           <a:prstGeom prst="rect">
@@ -5579,8 +5579,8 @@
         </p:nvSpPr>
         <p:spPr>
           <a:xfrm>
-            <a:off x="8286293" y="5120640"/>
-            <a:ext cx="3100730" cy="493776"/>
+            <a:off x="8286293" y="5084064"/>
+            <a:ext cx="3100730" cy="566928"/>
           </a:xfrm>
           <a:prstGeom prst="rect">
             <a:avLst/>
@@ -5607,7 +5607,7 @@
                 <a:ea typeface="Calibri" pitchFamily="34" charset="-122"/>
                 <a:cs typeface="Calibri" pitchFamily="34" charset="-120"/>
               </a:rPr>
-              <a:t>Lead with forecast variance, not the discount. This spend cannot take a native term at all.</a:t>
+              <a:t>Lead with forecast variance, not the discount — too volatile to commit for a year, let alone three.</a:t>
             </a:r>
             <a:endParaRPr lang="en-US" sz="1050" dirty="0"/>
           </a:p>
@@ -5990,7 +5990,7 @@
                 <a:ea typeface="Calibri" pitchFamily="34" charset="-122"/>
                 <a:cs typeface="Calibri" pitchFamily="34" charset="-120"/>
               </a:rPr>
-              <a:t>Marketplace management, at a fraction of the price of the incumbents.</a:t>
+              <a:t>Marketplace management at a fraction of the incumbents' price.</a:t>
             </a:r>
             <a:endParaRPr lang="en-US" sz="1700" dirty="0"/>
           </a:p>
@@ -6140,7 +6140,7 @@
                 <a:ea typeface="Calibri" pitchFamily="34" charset="-122"/>
                 <a:cs typeface="Calibri" pitchFamily="34" charset="-120"/>
               </a:rPr>
-              <a:t>Marketplace management that returns tens of thousands a year off the AWS bill.</a:t>
+              <a:t>Marketplace management that returns tens of thousands a year.</a:t>
             </a:r>
             <a:endParaRPr lang="en-US" sz="1700" dirty="0"/>
           </a:p>
@@ -6182,7 +6182,7 @@
                 <a:ea typeface="Calibri" pitchFamily="34" charset="-122"/>
                 <a:cs typeface="Calibri" pitchFamily="34" charset="-120"/>
               </a:rPr>
-              <a:t>The same subscription, argued from the customer's own billing data. The question moves from “can we afford this?” to “why haven't we done this already?”</a:t>
+              <a:t>The same subscription, argued from the customer's own billing data. The question moves from “can we afford this?” to “why haven’t we done this already?”</a:t>
             </a:r>
             <a:endParaRPr lang="en-US" sz="1200" dirty="0"/>
           </a:p>
@@ -6251,7 +6251,7 @@
                 <a:ea typeface="Calibri" pitchFamily="34" charset="-122"/>
                 <a:cs typeface="Calibri" pitchFamily="34" charset="-120"/>
               </a:rPr>
-              <a:t>It also changes what churn looks like.  </a:t>
+              <a:t>It also changes what churn looks like. </a:t>
             </a:r>
             <a:pPr indent="0" marL="0">
               <a:lnSpc>
@@ -6268,7 +6268,7 @@
                 <a:ea typeface="Calibri" pitchFamily="34" charset="-122"/>
                 <a:cs typeface="Calibri" pitchFamily="34" charset="-120"/>
               </a:rPr>
-              <a:t>A subscription that visibly returns more than it costs is not a line item anyone hunts for in a cost-cutting review — and the savings only continue while the platform stays connected.</a:t>
+              <a:t>A subscription that visibly returns more than it costs is not a line item anyone hunts for in a cost-cutting review — and the coverage stops renewing the moment the platform disconnects.</a:t>
             </a:r>
             <a:endParaRPr lang="en-US" sz="1300" dirty="0"/>
           </a:p>
@@ -6310,7 +6310,7 @@
                 <a:ea typeface="Calibri" pitchFamily="34" charset="-122"/>
                 <a:cs typeface="Calibri" pitchFamily="34" charset="-120"/>
               </a:rPr>
-              <a:t>Pricing comparison per Automatum's published positioning against legacy marketplace platforms. Savings figures per the worked example on slide 10.</a:t>
+              <a:t>Pricing comparison per Automatum's published positioning against legacy marketplace platforms. Savings figures per the worked example on slide 7.</a:t>
             </a:r>
             <a:endParaRPr lang="en-US" sz="850" dirty="0"/>
           </a:p>
@@ -6543,7 +6543,7 @@
                 <a:ea typeface="Calibri" pitchFamily="34" charset="-122"/>
                 <a:cs typeface="Calibri" pitchFamily="34" charset="-120"/>
               </a:rPr>
-              <a:t>The Foundational Technical Review gates ISV Accelerate and co-sell. Archera auto-populates it from the live environment and writes the results back into the native AWS Well-Architected Tool — at no tooling cost.</a:t>
+              <a:t>The Foundational Technical Review gates ISV Accelerate and co-sell. Archera auto-populates it from the live environment and writes the results back into the native AWS Well-Architected Tool.</a:t>
             </a:r>
             <a:endParaRPr lang="en-US" sz="1350" dirty="0"/>
           </a:p>
@@ -6585,7 +6585,7 @@
         <p:spPr>
           <a:xfrm>
             <a:off x="822960" y="2304288"/>
-            <a:ext cx="3108960" cy="512064"/>
+            <a:ext cx="3108960" cy="274320"/>
           </a:xfrm>
           <a:prstGeom prst="rect">
             <a:avLst/>
@@ -6612,7 +6612,7 @@
                 <a:ea typeface="Calibri" pitchFamily="34" charset="-122"/>
                 <a:cs typeface="Calibri" pitchFamily="34" charset="-120"/>
               </a:rPr>
-              <a:t>Auto-populate from the live environment</a:t>
+              <a:t>Auto-populate the review</a:t>
             </a:r>
             <a:endParaRPr lang="en-US" sz="1300" dirty="0"/>
           </a:p>
@@ -6626,8 +6626,8 @@
         </p:nvSpPr>
         <p:spPr>
           <a:xfrm>
-            <a:off x="822960" y="2852928"/>
-            <a:ext cx="3108960" cy="603504"/>
+            <a:off x="822960" y="2615184"/>
+            <a:ext cx="3108960" cy="804672"/>
           </a:xfrm>
           <a:prstGeom prst="rect">
             <a:avLst/>
@@ -6696,7 +6696,7 @@
         <p:spPr>
           <a:xfrm>
             <a:off x="4608576" y="2304288"/>
-            <a:ext cx="3108960" cy="512064"/>
+            <a:ext cx="3108960" cy="274320"/>
           </a:xfrm>
           <a:prstGeom prst="rect">
             <a:avLst/>
@@ -6737,8 +6737,8 @@
         </p:nvSpPr>
         <p:spPr>
           <a:xfrm>
-            <a:off x="4608576" y="2852928"/>
-            <a:ext cx="3108960" cy="603504"/>
+            <a:off x="4608576" y="2615184"/>
+            <a:ext cx="3108960" cy="804672"/>
           </a:xfrm>
           <a:prstGeom prst="rect">
             <a:avLst/>
@@ -6765,7 +6765,7 @@
                 <a:ea typeface="Calibri" pitchFamily="34" charset="-122"/>
                 <a:cs typeface="Calibri" pitchFamily="34" charset="-120"/>
               </a:rPr>
-              <a:t>WAFR / WAR, industry and technology Lenses, and the Foundational Technical Review itself.</a:t>
+              <a:t>WAFR, industry and technology Lenses, and the FTR itself.</a:t>
             </a:r>
             <a:endParaRPr lang="en-US" sz="1100" dirty="0"/>
           </a:p>
@@ -6807,7 +6807,7 @@
         <p:spPr>
           <a:xfrm>
             <a:off x="822960" y="3858768"/>
-            <a:ext cx="3108960" cy="512064"/>
+            <a:ext cx="3108960" cy="274320"/>
           </a:xfrm>
           <a:prstGeom prst="rect">
             <a:avLst/>
@@ -6848,8 +6848,8 @@
         </p:nvSpPr>
         <p:spPr>
           <a:xfrm>
-            <a:off x="822960" y="4407408"/>
-            <a:ext cx="3108960" cy="603504"/>
+            <a:off x="822960" y="4169664"/>
+            <a:ext cx="3108960" cy="804672"/>
           </a:xfrm>
           <a:prstGeom prst="rect">
             <a:avLst/>
@@ -6918,7 +6918,7 @@
         <p:spPr>
           <a:xfrm>
             <a:off x="4608576" y="3858768"/>
-            <a:ext cx="3108960" cy="512064"/>
+            <a:ext cx="3108960" cy="274320"/>
           </a:xfrm>
           <a:prstGeom prst="rect">
             <a:avLst/>
@@ -6959,8 +6959,8 @@
         </p:nvSpPr>
         <p:spPr>
           <a:xfrm>
-            <a:off x="4608576" y="4407408"/>
-            <a:ext cx="3108960" cy="603504"/>
+            <a:off x="4608576" y="4169664"/>
+            <a:ext cx="3108960" cy="804672"/>
           </a:xfrm>
           <a:prstGeom prst="rect">
             <a:avLst/>
@@ -7248,7 +7248,7 @@
                 <a:ea typeface="Calibri" pitchFamily="34" charset="-122"/>
                 <a:cs typeface="Calibri" pitchFamily="34" charset="-120"/>
               </a:rPr>
-              <a:t>Worth checking:  </a:t>
+              <a:t>Worth checking. </a:t>
             </a:r>
             <a:pPr indent="0" marL="0">
               <a:lnSpc>
@@ -7265,7 +7265,7 @@
                 <a:ea typeface="Calibri" pitchFamily="34" charset="-122"/>
                 <a:cs typeface="Calibri" pitchFamily="34" charset="-120"/>
               </a:rPr>
-              <a:t>how many of Automatum's 80+ ISVs have a current FTR, and how many stalled on it. That number is the size of this use case, and Automatum is one of the few parties who can actually find out.</a:t>
+              <a:t>How many of Automatum's 80+ ISVs have a current FTR, and how many stalled on it. That number is the size of this use case, and Automatum is one of the few parties who can actually find out.</a:t>
             </a:r>
             <a:endParaRPr lang="en-US" sz="1250" dirty="0"/>
           </a:p>
@@ -7274,6 +7274,48 @@
       <p:sp>
         <p:nvSpPr>
           <p:cNvPr id="24" name="Text 22"/>
+          <p:cNvSpPr txBox="1"/>
+          <p:nvPr/>
+        </p:nvSpPr>
+        <p:spPr>
+          <a:xfrm>
+            <a:off x="566928" y="6163056"/>
+            <a:ext cx="11057839" cy="274320"/>
+          </a:xfrm>
+          <a:prstGeom prst="rect">
+            <a:avLst/>
+          </a:prstGeom>
+          <a:noFill/>
+          <a:ln/>
+        </p:spPr>
+        <p:txBody>
+          <a:bodyPr wrap="square" lIns="0" tIns="0" rIns="0" bIns="0" rtlCol="0" anchor="t"/>
+          <a:lstStyle/>
+          <a:p>
+            <a:pPr indent="0" marL="0">
+              <a:lnSpc>
+                <a:spcPts val="1100"/>
+              </a:lnSpc>
+              <a:buNone/>
+            </a:pPr>
+            <a:r>
+              <a:rPr lang="en-US" sz="850" i="1" dirty="0">
+                <a:solidFill>
+                  <a:srgbClr val="5B6486"/>
+                </a:solidFill>
+                <a:latin typeface="Calibri" pitchFamily="34" charset="0"/>
+                <a:ea typeface="Calibri" pitchFamily="34" charset="-122"/>
+                <a:cs typeface="Calibri" pitchFamily="34" charset="-120"/>
+              </a:rPr>
+              <a:t>Assessment capabilities per Archera partner materials — confirm current scope, including the credits and funding claims, with Archera.</a:t>
+            </a:r>
+            <a:endParaRPr lang="en-US" sz="850" dirty="0"/>
+          </a:p>
+        </p:txBody>
+      </p:sp>
+      <p:sp>
+        <p:nvSpPr>
+          <p:cNvPr id="25" name="Text 23"/>
           <p:cNvSpPr txBox="1"/>
           <p:nvPr/>
         </p:nvSpPr>
@@ -7312,7 +7354,7 @@
       </p:sp>
       <p:sp>
         <p:nvSpPr>
-          <p:cNvPr id="25" name="Text 23"/>
+          <p:cNvPr id="26" name="Text 24"/>
           <p:cNvSpPr txBox="1"/>
           <p:nvPr/>
         </p:nvSpPr>
@@ -7513,11 +7555,11 @@
         <p:spPr>
           <a:xfrm>
             <a:off x="566928" y="2212848"/>
-            <a:ext cx="2641016" cy="1920240"/>
+            <a:ext cx="2641016" cy="2011680"/>
           </a:xfrm>
           <a:prstGeom prst="roundRect">
             <a:avLst>
-              <a:gd name="adj" fmla="val 3333"/>
+              <a:gd name="adj" fmla="val 3182"/>
             </a:avLst>
           </a:prstGeom>
           <a:solidFill>
@@ -7582,7 +7624,7 @@
         <p:spPr>
           <a:xfrm>
             <a:off x="822960" y="3090672"/>
-            <a:ext cx="2128952" cy="859536"/>
+            <a:ext cx="2128952" cy="950976"/>
           </a:xfrm>
           <a:prstGeom prst="rect">
             <a:avLst/>
@@ -7609,7 +7651,7 @@
                 <a:ea typeface="Calibri" pitchFamily="34" charset="-122"/>
                 <a:cs typeface="Calibri" pitchFamily="34" charset="-120"/>
               </a:rPr>
-              <a:t>Cover migrating workloads while the team is still deciding what to do with them.</a:t>
+              <a:t>Carry workloads mid-move while the team decides what stays.</a:t>
             </a:r>
             <a:endParaRPr lang="en-US" sz="1100" dirty="0"/>
           </a:p>
@@ -7624,11 +7666,11 @@
         <p:spPr>
           <a:xfrm>
             <a:off x="3372536" y="2212848"/>
-            <a:ext cx="2641016" cy="1920240"/>
+            <a:ext cx="2641016" cy="2011680"/>
           </a:xfrm>
           <a:prstGeom prst="roundRect">
             <a:avLst>
-              <a:gd name="adj" fmla="val 3333"/>
+              <a:gd name="adj" fmla="val 3182"/>
             </a:avLst>
           </a:prstGeom>
           <a:solidFill>
@@ -7693,7 +7735,7 @@
         <p:spPr>
           <a:xfrm>
             <a:off x="3628568" y="3090672"/>
-            <a:ext cx="2128952" cy="859536"/>
+            <a:ext cx="2128952" cy="950976"/>
           </a:xfrm>
           <a:prstGeom prst="rect">
             <a:avLst/>
@@ -7720,7 +7762,7 @@
                 <a:ea typeface="Calibri" pitchFamily="34" charset="-122"/>
                 <a:cs typeface="Calibri" pitchFamily="34" charset="-120"/>
               </a:rPr>
-              <a:t>Shorter terms plus rebate protection mean nobody is tied to old infrastructure by a bad commitment.</a:t>
+              <a:t>Shorter terms plus the release guarantee mean nobody is tied to old infrastructure by a bad commitment.</a:t>
             </a:r>
             <a:endParaRPr lang="en-US" sz="1100" dirty="0"/>
           </a:p>
@@ -7735,11 +7777,11 @@
         <p:spPr>
           <a:xfrm>
             <a:off x="6178144" y="2212848"/>
-            <a:ext cx="2641016" cy="1920240"/>
+            <a:ext cx="2641016" cy="2011680"/>
           </a:xfrm>
           <a:prstGeom prst="roundRect">
             <a:avLst>
-              <a:gd name="adj" fmla="val 3333"/>
+              <a:gd name="adj" fmla="val 3182"/>
             </a:avLst>
           </a:prstGeom>
           <a:solidFill>
@@ -7804,7 +7846,7 @@
         <p:spPr>
           <a:xfrm>
             <a:off x="6434176" y="3090672"/>
-            <a:ext cx="2128952" cy="859536"/>
+            <a:ext cx="2128952" cy="950976"/>
           </a:xfrm>
           <a:prstGeom prst="rect">
             <a:avLst/>
@@ -7831,7 +7873,7 @@
                 <a:ea typeface="Calibri" pitchFamily="34" charset="-122"/>
                 <a:cs typeface="Calibri" pitchFamily="34" charset="-120"/>
               </a:rPr>
-              <a:t>Cover short-term spikes with commitments sized to the event rather than to the year.</a:t>
+              <a:t>Commitments sized to the event rather than to the year.</a:t>
             </a:r>
             <a:endParaRPr lang="en-US" sz="1100" dirty="0"/>
           </a:p>
@@ -7846,11 +7888,11 @@
         <p:spPr>
           <a:xfrm>
             <a:off x="8983751" y="2212848"/>
-            <a:ext cx="2641016" cy="1920240"/>
+            <a:ext cx="2641016" cy="2011680"/>
           </a:xfrm>
           <a:prstGeom prst="roundRect">
             <a:avLst>
-              <a:gd name="adj" fmla="val 3333"/>
+              <a:gd name="adj" fmla="val 3182"/>
             </a:avLst>
           </a:prstGeom>
           <a:solidFill>
@@ -7915,7 +7957,7 @@
         <p:spPr>
           <a:xfrm>
             <a:off x="9239783" y="3090672"/>
-            <a:ext cx="2128952" cy="859536"/>
+            <a:ext cx="2128952" cy="950976"/>
           </a:xfrm>
           <a:prstGeom prst="rect">
             <a:avLst/>
@@ -7942,7 +7984,7 @@
                 <a:ea typeface="Calibri" pitchFamily="34" charset="-122"/>
                 <a:cs typeface="Calibri" pitchFamily="34" charset="-120"/>
               </a:rPr>
-              <a:t>Training and inference capacity at committed rates, sized to the run — without a multi-year bet on a moving baseline.</a:t>
+              <a:t>Training and inference at committed rates, sized to the run — no multi-year bet on a moving baseline.</a:t>
             </a:r>
             <a:endParaRPr lang="en-US" sz="1100" dirty="0"/>
           </a:p>
@@ -8073,7 +8115,7 @@
                 <a:ea typeface="Calibri" pitchFamily="34" charset="-122"/>
                 <a:cs typeface="Calibri" pitchFamily="34" charset="-120"/>
               </a:rPr>
-              <a:t>Waste rose to 29% of cloud infrastructure spend in the most recent Flexera survey — the first increase in five years, attributed to AI workloads making forecasting harder rather than easier.</a:t>
+              <a:t>Waste rose to 29% of cloud infrastructure spend in Flexera's 2026 State of the Cloud survey — the first increase in five years, attributed to AI workloads. Base-composition skew is a working assumption; confirm from account data.</a:t>
             </a:r>
             <a:endParaRPr lang="en-US" sz="850" dirty="0"/>
           </a:p>
@@ -8993,7 +9035,7 @@
                 <a:ea typeface="Calibri" pitchFamily="34" charset="-122"/>
                 <a:cs typeface="Calibri" pitchFamily="34" charset="-120"/>
               </a:rPr>
-              <a:t>Timely angle.  </a:t>
+              <a:t>Timely angle. </a:t>
             </a:r>
             <a:pPr indent="0" marL="0">
               <a:lnSpc>
@@ -9010,7 +9052,7 @@
                 <a:ea typeface="Calibri" pitchFamily="34" charset="-122"/>
                 <a:cs typeface="Calibri" pitchFamily="34" charset="-120"/>
               </a:rPr>
-              <a:t>AWS's 2025 policy ends the sharing of Reserved Instances and Savings Plans across customers. Archera offers a compliant model plus a net-new revenue stream — directly relevant to any consolidated billing or managed accounts Automatum operates.</a:t>
+              <a:t>AWS's 2025 policy ends the sharing of Reserved Instances and Savings Plans across customers. Archera offers a compliant model plus a net-new revenue stream — directly relevant to any consolidated-billing or managed accounts Automatum operates.</a:t>
             </a:r>
             <a:endParaRPr lang="en-US" sz="1250" dirty="0"/>
           </a:p>
@@ -9159,7 +9201,7 @@
                 <a:ea typeface="Calibri" pitchFamily="34" charset="-122"/>
                 <a:cs typeface="Calibri" pitchFamily="34" charset="-120"/>
               </a:rPr>
-              <a:t>THE COMMERCIALS</a:t>
+              <a:t>USE CASE 05  ·  THE RAILS</a:t>
             </a:r>
             <a:endParaRPr lang="en-US" sz="1000" dirty="0"/>
           </a:p>
@@ -10076,7 +10118,7 @@
                 <a:ea typeface="Calibri" pitchFamily="34" charset="-122"/>
                 <a:cs typeface="Calibri" pitchFamily="34" charset="-120"/>
               </a:rPr>
-              <a:t>Billed on the AWS invoice · draws down EDP / MACC</a:t>
+              <a:t>Billed on the AWS invoice · draws down EDP</a:t>
             </a:r>
             <a:endParaRPr lang="en-US" sz="1100" dirty="0"/>
           </a:p>
@@ -10118,7 +10160,7 @@
                 <a:ea typeface="Calibri" pitchFamily="34" charset="-122"/>
                 <a:cs typeface="Calibri" pitchFamily="34" charset="-120"/>
               </a:rPr>
-              <a:t>AWS disburses; Automatum's share arrives through the disbursement channel it already reconciles.</a:t>
+              <a:t>AWS disburses; Automatum's share arrives through its existing disbursement channel.</a:t>
             </a:r>
             <a:endParaRPr lang="en-US" sz="950" dirty="0"/>
           </a:p>
@@ -10400,7 +10442,7 @@
                 <a:ea typeface="Calibri" pitchFamily="34" charset="-122"/>
                 <a:cs typeface="Calibri" pitchFamily="34" charset="-120"/>
               </a:rPr>
-              <a:t>For the ISV, the charge is marketplace spend.  </a:t>
+              <a:t>For the ISV, the charge is marketplace spend. </a:t>
             </a:r>
             <a:pPr indent="0" marL="0">
               <a:buNone/>
@@ -10456,7 +10498,7 @@
                 <a:ea typeface="Calibri" pitchFamily="34" charset="-122"/>
                 <a:cs typeface="Calibri" pitchFamily="34" charset="-120"/>
               </a:rPr>
-              <a:t>Flow shape per Archera's partner positioning; the rev-share rate and terms are not quoted in any source behind this deck — confirm with Archera. A structure to negotiate against, not an offer.</a:t>
+              <a:t>Flow shape per the CPPO private-offer model; the rev-share rate and terms are not quoted in any source behind this deck — confirm with Archera. A structure to negotiate against, not an offer.</a:t>
             </a:r>
             <a:endParaRPr lang="en-US" sz="850" dirty="0"/>
           </a:p>
@@ -10605,7 +10647,7 @@
                 <a:ea typeface="Calibri" pitchFamily="34" charset="-122"/>
                 <a:cs typeface="Calibri" pitchFamily="34" charset="-120"/>
               </a:rPr>
-              <a:t>PART FIVE  ·  THE EVIDENCE</a:t>
+              <a:t>PART FIVE  ·  THE RECKONING</a:t>
             </a:r>
             <a:endParaRPr lang="en-US" sz="1000" dirty="0"/>
           </a:p>
@@ -12134,7 +12176,7 @@
                 <a:ea typeface="Calibri" pitchFamily="34" charset="-122"/>
                 <a:cs typeface="Calibri" pitchFamily="34" charset="-120"/>
               </a:rPr>
-              <a:t>“Teams no longer have to worry about over-committing or being stuck on the wrong instance types. It's simplified our FinOps workflows tremendously.”</a:t>
+              <a:t>“Teams no longer have to worry about over-committing or being stuck on the wrong instance types. It’s simplified our FinOps workflows tremendously.”</a:t>
             </a:r>
             <a:endParaRPr lang="en-US" sz="1400" dirty="0"/>
           </a:p>
@@ -12238,7 +12280,7 @@
                 <a:ea typeface="Calibri" pitchFamily="34" charset="-122"/>
                 <a:cs typeface="Calibri" pitchFamily="34" charset="-120"/>
               </a:rPr>
-              <a:t>Figures from Archera's customer reference pack, which is marked confidential — confirm clearance with Archera before circulating this deck outside Automatum. All savings are net of Archera's premium and achieved through rate optimisation only: no re-architecting and no workload migration. Anonymised by vertical; named enterprise references are available from Archera on request.</a:t>
+              <a:t>Figures from Archera's customer reference pack, which is marked confidential — confirm clearance with Archera before circulating this deck outside Automatum. All savings are net of Archera's premium and achieved through rate optimisation only: no re-architecting and no workload migration. Anonymised by vertical; a named reference exists in Archera's pack, pending clearance. Quote from Archera's published materials — separate from the five anonymised enterprises.</a:t>
             </a:r>
             <a:endParaRPr lang="en-US" sz="850" dirty="0"/>
           </a:p>
@@ -12387,7 +12429,7 @@
                 <a:ea typeface="Calibri" pitchFamily="34" charset="-122"/>
                 <a:cs typeface="Calibri" pitchFamily="34" charset="-120"/>
               </a:rPr>
-              <a:t>PART FIVE  ·  ACTIVATION</a:t>
+              <a:t>PART FIVE  ·  THE RECKONING</a:t>
             </a:r>
             <a:endParaRPr lang="en-US" sz="1000" dirty="0"/>
           </a:p>
@@ -12444,11 +12486,11 @@
         <p:spPr>
           <a:xfrm>
             <a:off x="566928" y="1353312"/>
-            <a:ext cx="2641016" cy="1005840"/>
+            <a:ext cx="2641016" cy="1115568"/>
           </a:xfrm>
           <a:prstGeom prst="roundRect">
             <a:avLst>
-              <a:gd name="adj" fmla="val 6364"/>
+              <a:gd name="adj" fmla="val 5738"/>
             </a:avLst>
           </a:prstGeom>
           <a:solidFill>
@@ -12510,7 +12552,7 @@
         <p:spPr>
           <a:xfrm>
             <a:off x="804672" y="1755648"/>
-            <a:ext cx="2165528" cy="512064"/>
+            <a:ext cx="2165528" cy="640080"/>
           </a:xfrm>
           <a:prstGeom prst="rect">
             <a:avLst/>
@@ -12537,7 +12579,7 @@
                 <a:ea typeface="Calibri" pitchFamily="34" charset="-122"/>
                 <a:cs typeface="Calibri" pitchFamily="34" charset="-120"/>
               </a:rPr>
-              <a:t>Automated FTR and Well-Architected inside the go-live window.</a:t>
+              <a:t>Automated FTR / Well-Architected in the go-live window — scope to confirm.</a:t>
             </a:r>
             <a:endParaRPr lang="en-US" sz="1050" dirty="0"/>
           </a:p>
@@ -12552,11 +12594,11 @@
         <p:spPr>
           <a:xfrm>
             <a:off x="3372536" y="1353312"/>
-            <a:ext cx="2641016" cy="1005840"/>
+            <a:ext cx="2641016" cy="1115568"/>
           </a:xfrm>
           <a:prstGeom prst="roundRect">
             <a:avLst>
-              <a:gd name="adj" fmla="val 6364"/>
+              <a:gd name="adj" fmla="val 5738"/>
             </a:avLst>
           </a:prstGeom>
           <a:solidFill>
@@ -12618,7 +12660,7 @@
         <p:spPr>
           <a:xfrm>
             <a:off x="3610280" y="1755648"/>
-            <a:ext cx="2165528" cy="512064"/>
+            <a:ext cx="2165528" cy="640080"/>
           </a:xfrm>
           <a:prstGeom prst="rect">
             <a:avLst/>
@@ -12660,11 +12702,11 @@
         <p:spPr>
           <a:xfrm>
             <a:off x="6178144" y="1353312"/>
-            <a:ext cx="2641016" cy="1005840"/>
+            <a:ext cx="2641016" cy="1115568"/>
           </a:xfrm>
           <a:prstGeom prst="roundRect">
             <a:avLst>
-              <a:gd name="adj" fmla="val 6364"/>
+              <a:gd name="adj" fmla="val 5738"/>
             </a:avLst>
           </a:prstGeom>
           <a:solidFill>
@@ -12726,7 +12768,7 @@
         <p:spPr>
           <a:xfrm>
             <a:off x="6415888" y="1755648"/>
-            <a:ext cx="2165528" cy="512064"/>
+            <a:ext cx="2165528" cy="640080"/>
           </a:xfrm>
           <a:prstGeom prst="rect">
             <a:avLst/>
@@ -12768,11 +12810,11 @@
         <p:spPr>
           <a:xfrm>
             <a:off x="8983751" y="1353312"/>
-            <a:ext cx="2641016" cy="1005840"/>
+            <a:ext cx="2641016" cy="1115568"/>
           </a:xfrm>
           <a:prstGeom prst="roundRect">
             <a:avLst>
-              <a:gd name="adj" fmla="val 6364"/>
+              <a:gd name="adj" fmla="val 5738"/>
             </a:avLst>
           </a:prstGeom>
           <a:solidFill>
@@ -12834,7 +12876,7 @@
         <p:spPr>
           <a:xfrm>
             <a:off x="9221495" y="1755648"/>
-            <a:ext cx="2165528" cy="512064"/>
+            <a:ext cx="2165528" cy="640080"/>
           </a:xfrm>
           <a:prstGeom prst="rect">
             <a:avLst/>
@@ -12875,7 +12917,7 @@
         </p:nvSpPr>
         <p:spPr>
           <a:xfrm>
-            <a:off x="566928" y="2450592"/>
+            <a:off x="566928" y="2578608"/>
             <a:ext cx="11057839" cy="274320"/>
           </a:xfrm>
           <a:prstGeom prst="rect">
@@ -12914,7 +12956,7 @@
         </p:nvSpPr>
         <p:spPr>
           <a:xfrm>
-            <a:off x="566928" y="2889504"/>
+            <a:off x="566928" y="2999232"/>
             <a:ext cx="3576218" cy="2798064"/>
           </a:xfrm>
           <a:prstGeom prst="roundRect">
@@ -12941,7 +12983,7 @@
         </p:nvSpPr>
         <p:spPr>
           <a:xfrm>
-            <a:off x="841248" y="3090672"/>
+            <a:off x="841248" y="3200400"/>
             <a:ext cx="548640" cy="292608"/>
           </a:xfrm>
           <a:prstGeom prst="rect">
@@ -12980,7 +13022,7 @@
         </p:nvSpPr>
         <p:spPr>
           <a:xfrm>
-            <a:off x="1408176" y="3108960"/>
+            <a:off x="1408176" y="3218688"/>
             <a:ext cx="2478938" cy="201168"/>
           </a:xfrm>
           <a:prstGeom prst="rect">
@@ -13019,7 +13061,7 @@
         </p:nvSpPr>
         <p:spPr>
           <a:xfrm>
-            <a:off x="841248" y="3456432"/>
+            <a:off x="841248" y="3566160"/>
             <a:ext cx="3027578" cy="329184"/>
           </a:xfrm>
           <a:prstGeom prst="rect">
@@ -13058,7 +13100,7 @@
         </p:nvSpPr>
         <p:spPr>
           <a:xfrm>
-            <a:off x="859536" y="4032504"/>
+            <a:off x="859536" y="4142232"/>
             <a:ext cx="128016" cy="128016"/>
           </a:xfrm>
           <a:prstGeom prst="ellipse">
@@ -13083,7 +13125,7 @@
         </p:nvSpPr>
         <p:spPr>
           <a:xfrm>
-            <a:off x="1133856" y="3895344"/>
+            <a:off x="1133856" y="4005072"/>
             <a:ext cx="2716682" cy="530352"/>
           </a:xfrm>
           <a:prstGeom prst="rect">
@@ -13125,7 +13167,7 @@
         </p:nvSpPr>
         <p:spPr>
           <a:xfrm>
-            <a:off x="859536" y="4599432"/>
+            <a:off x="859536" y="4709160"/>
             <a:ext cx="128016" cy="128016"/>
           </a:xfrm>
           <a:prstGeom prst="ellipse">
@@ -13150,7 +13192,7 @@
         </p:nvSpPr>
         <p:spPr>
           <a:xfrm>
-            <a:off x="1133856" y="4462272"/>
+            <a:off x="1133856" y="4572000"/>
             <a:ext cx="2716682" cy="530352"/>
           </a:xfrm>
           <a:prstGeom prst="rect">
@@ -13192,7 +13234,7 @@
         </p:nvSpPr>
         <p:spPr>
           <a:xfrm>
-            <a:off x="859536" y="5166360"/>
+            <a:off x="859536" y="5276088"/>
             <a:ext cx="128016" cy="128016"/>
           </a:xfrm>
           <a:prstGeom prst="ellipse">
@@ -13217,7 +13259,7 @@
         </p:nvSpPr>
         <p:spPr>
           <a:xfrm>
-            <a:off x="1133856" y="5029200"/>
+            <a:off x="1133856" y="5138928"/>
             <a:ext cx="2716682" cy="530352"/>
           </a:xfrm>
           <a:prstGeom prst="rect">
@@ -13259,7 +13301,7 @@
         </p:nvSpPr>
         <p:spPr>
           <a:xfrm>
-            <a:off x="4307738" y="2889504"/>
+            <a:off x="4307738" y="2999232"/>
             <a:ext cx="3576218" cy="2798064"/>
           </a:xfrm>
           <a:prstGeom prst="roundRect">
@@ -13286,7 +13328,7 @@
         </p:nvSpPr>
         <p:spPr>
           <a:xfrm>
-            <a:off x="4582058" y="3090672"/>
+            <a:off x="4582058" y="3200400"/>
             <a:ext cx="548640" cy="292608"/>
           </a:xfrm>
           <a:prstGeom prst="rect">
@@ -13325,7 +13367,7 @@
         </p:nvSpPr>
         <p:spPr>
           <a:xfrm>
-            <a:off x="5148986" y="3108960"/>
+            <a:off x="5148986" y="3218688"/>
             <a:ext cx="2478938" cy="201168"/>
           </a:xfrm>
           <a:prstGeom prst="rect">
@@ -13364,7 +13406,7 @@
         </p:nvSpPr>
         <p:spPr>
           <a:xfrm>
-            <a:off x="4582058" y="3456432"/>
+            <a:off x="4582058" y="3566160"/>
             <a:ext cx="3027578" cy="329184"/>
           </a:xfrm>
           <a:prstGeom prst="rect">
@@ -13403,7 +13445,7 @@
         </p:nvSpPr>
         <p:spPr>
           <a:xfrm>
-            <a:off x="4600346" y="4032504"/>
+            <a:off x="4600346" y="4142232"/>
             <a:ext cx="128016" cy="128016"/>
           </a:xfrm>
           <a:prstGeom prst="ellipse">
@@ -13428,7 +13470,7 @@
         </p:nvSpPr>
         <p:spPr>
           <a:xfrm>
-            <a:off x="4874666" y="3895344"/>
+            <a:off x="4874666" y="4005072"/>
             <a:ext cx="2716682" cy="530352"/>
           </a:xfrm>
           <a:prstGeom prst="rect">
@@ -13470,7 +13512,7 @@
         </p:nvSpPr>
         <p:spPr>
           <a:xfrm>
-            <a:off x="4600346" y="4599432"/>
+            <a:off x="4600346" y="4709160"/>
             <a:ext cx="128016" cy="128016"/>
           </a:xfrm>
           <a:prstGeom prst="ellipse">
@@ -13495,7 +13537,7 @@
         </p:nvSpPr>
         <p:spPr>
           <a:xfrm>
-            <a:off x="4874666" y="4462272"/>
+            <a:off x="4874666" y="4572000"/>
             <a:ext cx="2716682" cy="530352"/>
           </a:xfrm>
           <a:prstGeom prst="rect">
@@ -13537,7 +13579,7 @@
         </p:nvSpPr>
         <p:spPr>
           <a:xfrm>
-            <a:off x="4600346" y="5166360"/>
+            <a:off x="4600346" y="5276088"/>
             <a:ext cx="128016" cy="128016"/>
           </a:xfrm>
           <a:prstGeom prst="ellipse">
@@ -13562,7 +13604,7 @@
         </p:nvSpPr>
         <p:spPr>
           <a:xfrm>
-            <a:off x="4874666" y="5029200"/>
+            <a:off x="4874666" y="5138928"/>
             <a:ext cx="2716682" cy="530352"/>
           </a:xfrm>
           <a:prstGeom prst="rect">
@@ -13604,7 +13646,7 @@
         </p:nvSpPr>
         <p:spPr>
           <a:xfrm>
-            <a:off x="8048549" y="2889504"/>
+            <a:off x="8048549" y="2999232"/>
             <a:ext cx="3576218" cy="2798064"/>
           </a:xfrm>
           <a:prstGeom prst="roundRect">
@@ -13631,7 +13673,7 @@
         </p:nvSpPr>
         <p:spPr>
           <a:xfrm>
-            <a:off x="8322869" y="3090672"/>
+            <a:off x="8322869" y="3200400"/>
             <a:ext cx="548640" cy="292608"/>
           </a:xfrm>
           <a:prstGeom prst="rect">
@@ -13670,7 +13712,7 @@
         </p:nvSpPr>
         <p:spPr>
           <a:xfrm>
-            <a:off x="8889797" y="3108960"/>
+            <a:off x="8889797" y="3218688"/>
             <a:ext cx="2478938" cy="201168"/>
           </a:xfrm>
           <a:prstGeom prst="rect">
@@ -13709,7 +13751,7 @@
         </p:nvSpPr>
         <p:spPr>
           <a:xfrm>
-            <a:off x="8322869" y="3456432"/>
+            <a:off x="8322869" y="3566160"/>
             <a:ext cx="3027578" cy="329184"/>
           </a:xfrm>
           <a:prstGeom prst="rect">
@@ -13748,7 +13790,7 @@
         </p:nvSpPr>
         <p:spPr>
           <a:xfrm>
-            <a:off x="8341157" y="4032504"/>
+            <a:off x="8341157" y="4142232"/>
             <a:ext cx="128016" cy="128016"/>
           </a:xfrm>
           <a:prstGeom prst="ellipse">
@@ -13773,7 +13815,7 @@
         </p:nvSpPr>
         <p:spPr>
           <a:xfrm>
-            <a:off x="8615477" y="3895344"/>
+            <a:off x="8615477" y="4005072"/>
             <a:ext cx="2716682" cy="530352"/>
           </a:xfrm>
           <a:prstGeom prst="rect">
@@ -13801,7 +13843,7 @@
                 <a:ea typeface="Calibri" pitchFamily="34" charset="-122"/>
                 <a:cs typeface="Calibri" pitchFamily="34" charset="-120"/>
               </a:rPr>
-              <a:t>Work the base by spend band, largest AWS bills first.</a:t>
+              <a:t>Work the base mid-band first, largest accounts last — the slide 11 order.</a:t>
             </a:r>
             <a:endParaRPr lang="en-US" sz="1100" dirty="0"/>
           </a:p>
@@ -13815,7 +13857,7 @@
         </p:nvSpPr>
         <p:spPr>
           <a:xfrm>
-            <a:off x="8341157" y="4599432"/>
+            <a:off x="8341157" y="4709160"/>
             <a:ext cx="128016" cy="128016"/>
           </a:xfrm>
           <a:prstGeom prst="ellipse">
@@ -13840,7 +13882,7 @@
         </p:nvSpPr>
         <p:spPr>
           <a:xfrm>
-            <a:off x="8615477" y="4462272"/>
+            <a:off x="8615477" y="4572000"/>
             <a:ext cx="2716682" cy="530352"/>
           </a:xfrm>
           <a:prstGeom prst="rect">
@@ -13882,7 +13924,7 @@
         </p:nvSpPr>
         <p:spPr>
           <a:xfrm>
-            <a:off x="8341157" y="5166360"/>
+            <a:off x="8341157" y="5276088"/>
             <a:ext cx="128016" cy="128016"/>
           </a:xfrm>
           <a:prstGeom prst="ellipse">
@@ -13907,7 +13949,7 @@
         </p:nvSpPr>
         <p:spPr>
           <a:xfrm>
-            <a:off x="8615477" y="5029200"/>
+            <a:off x="8615477" y="5138928"/>
             <a:ext cx="2716682" cy="530352"/>
           </a:xfrm>
           <a:prstGeom prst="rect">
@@ -14084,7 +14126,7 @@
                 <a:ea typeface="Calibri" pitchFamily="34" charset="-122"/>
                 <a:cs typeface="Calibri" pitchFamily="34" charset="-120"/>
               </a:rPr>
-              <a:t>PART FIVE  ·  THE HONEST PART</a:t>
+              <a:t>PART FIVE  ·  THE RECKONING</a:t>
             </a:r>
             <a:endParaRPr lang="en-US" sz="1000" dirty="0"/>
           </a:p>
@@ -14284,7 +14326,7 @@
                 <a:ea typeface="Calibri" pitchFamily="34" charset="-122"/>
                 <a:cs typeface="Calibri" pitchFamily="34" charset="-120"/>
               </a:rPr>
-              <a:t>Rebate cover is off by default</a:t>
+              <a:t>Rebate cover: off by default</a:t>
             </a:r>
             <a:endParaRPr lang="en-US" sz="1300" dirty="0"/>
           </a:p>
@@ -14506,7 +14548,7 @@
                 <a:ea typeface="Calibri" pitchFamily="34" charset="-122"/>
                 <a:cs typeface="Calibri" pitchFamily="34" charset="-120"/>
               </a:rPr>
-              <a:t>Model premium economics per account</a:t>
+              <a:t>Model the economics per account</a:t>
             </a:r>
             <a:endParaRPr lang="en-US" sz="1300" dirty="0"/>
           </a:p>
@@ -14673,12 +14715,12 @@
         </p:nvSpPr>
         <p:spPr>
           <a:xfrm>
-            <a:off x="566928" y="5138928"/>
-            <a:ext cx="11057839" cy="786384"/>
+            <a:off x="566928" y="5175504"/>
+            <a:ext cx="11057839" cy="950976"/>
           </a:xfrm>
           <a:prstGeom prst="roundRect">
             <a:avLst>
-              <a:gd name="adj" fmla="val 8140"/>
+              <a:gd name="adj" fmla="val 6731"/>
             </a:avLst>
           </a:prstGeom>
           <a:solidFill>
@@ -14700,8 +14742,8 @@
         </p:nvSpPr>
         <p:spPr>
           <a:xfrm>
-            <a:off x="877824" y="5138928"/>
-            <a:ext cx="10436047" cy="786384"/>
+            <a:off x="877824" y="5175504"/>
+            <a:ext cx="10436047" cy="950976"/>
           </a:xfrm>
           <a:prstGeom prst="rect">
             <a:avLst/>
@@ -14728,7 +14770,7 @@
                 <a:ea typeface="Calibri" pitchFamily="34" charset="-122"/>
                 <a:cs typeface="Calibri" pitchFamily="34" charset="-120"/>
               </a:rPr>
-              <a:t>One disclosure.  </a:t>
+              <a:t>One disclosure. </a:t>
             </a:r>
             <a:pPr indent="0" marL="0">
               <a:lnSpc>
@@ -14745,7 +14787,7 @@
                 <a:ea typeface="Calibri" pitchFamily="34" charset="-122"/>
                 <a:cs typeface="Calibri" pitchFamily="34" charset="-120"/>
               </a:rPr>
-              <a:t>Anyone recommending this is paid on it — Archera, the partner, and us. We will still tell you when the right answer is the native three-year, because a customer who over-buys flexibility works out the maths eventually.</a:t>
+              <a:t>Anyone recommending this is paid on it — Archera, us, and once the rev-share is live, Automatum too. We will still tell you when the right answer is the native three-year. And the guarantees themselves are contractual under Archera's terms, backed by third-party reinsurance — not regulated insurance.</a:t>
             </a:r>
             <a:endParaRPr lang="en-US" sz="1250" dirty="0"/>
           </a:p>
@@ -14888,13 +14930,13 @@
             <a:r>
               <a:rPr lang="en-US" sz="1000" b="1" spc="260" kern="0" dirty="0">
                 <a:solidFill>
-                  <a:srgbClr val="19C6E6"/>
-                </a:solidFill>
-                <a:latin typeface="Calibri" pitchFamily="34" charset="0"/>
-                <a:ea typeface="Calibri" pitchFamily="34" charset="-122"/>
-                <a:cs typeface="Calibri" pitchFamily="34" charset="-120"/>
-              </a:rPr>
-              <a:t>THE STRUCTURE</a:t>
+                  <a:srgbClr val="F5A623"/>
+                </a:solidFill>
+                <a:latin typeface="Calibri" pitchFamily="34" charset="0"/>
+                <a:ea typeface="Calibri" pitchFamily="34" charset="-122"/>
+                <a:cs typeface="Calibri" pitchFamily="34" charset="-120"/>
+              </a:rPr>
+              <a:t>PART ONE  ·  THE STRUCTURE</a:t>
             </a:r>
             <a:endParaRPr lang="en-US" sz="1000" dirty="0"/>
           </a:p>
@@ -14978,7 +15020,7 @@
                 <a:ea typeface="Calibri" pitchFamily="34" charset="-122"/>
                 <a:cs typeface="Calibri" pitchFamily="34" charset="-120"/>
               </a:rPr>
-              <a:t>A native three-year RI or Savings Plan, purchased into the customer's own payer account — in their name, not Archera's. Their contractual obligation is 30 days or twelve months; Archera carries the balance of the term. AWS bills them directly throughout.</a:t>
+              <a:t>A native three-year RI or Savings Plan, bought into the customer's own payer account. Their obligation is 30 days or 12 months; Archera carries the balance and AWS bills them directly throughout. Archera calls these Guaranteed Commitments.</a:t>
             </a:r>
             <a:endParaRPr lang="en-US" sz="1300" dirty="0"/>
           </a:p>
@@ -15149,7 +15191,7 @@
                 <a:ea typeface="Calibri" pitchFamily="34" charset="-122"/>
                 <a:cs typeface="Calibri" pitchFamily="34" charset="-120"/>
               </a:rPr>
-              <a:t>Archera carries months 2–36.  </a:t>
+              <a:t>Archera carries months 2–36 — 30-day term shown. </a:t>
             </a:r>
             <a:pPr indent="0" marL="0">
               <a:buNone/>
@@ -15163,7 +15205,7 @@
                 <a:ea typeface="Calibri" pitchFamily="34" charset="-122"/>
                 <a:cs typeface="Calibri" pitchFamily="34" charset="-120"/>
               </a:rPr>
-              <a:t>Release or rebate window open from day 31.</a:t>
+              <a:t>On the 1-year, theirs through month 12.</a:t>
             </a:r>
             <a:endParaRPr lang="en-US" sz="1250" dirty="0"/>
           </a:p>
@@ -15397,7 +15439,7 @@
                 <a:ea typeface="Calibri" pitchFamily="34" charset="-122"/>
                 <a:cs typeface="Calibri" pitchFamily="34" charset="-120"/>
               </a:rPr>
-              <a:t>EFFECTIVE DISCOUNT</a:t>
+              <a:t>EFFECTIVE SAVINGS RATE</a:t>
             </a:r>
             <a:endParaRPr lang="en-US" sz="850" dirty="0"/>
           </a:p>
@@ -16553,7 +16595,7 @@
                 <a:ea typeface="Calibri" pitchFamily="34" charset="-122"/>
                 <a:cs typeface="Calibri" pitchFamily="34" charset="-120"/>
               </a:rPr>
-              <a:t>50% of the created saving on a 30-day term, 25% on a one-year. No savings, no fee.</a:t>
+              <a:t>50% of the created saving on the 30-day, 25% on the 1-year. No savings, no fee.</a:t>
             </a:r>
             <a:endParaRPr lang="en-US" sz="1100" dirty="0"/>
           </a:p>
@@ -16739,7 +16781,7 @@
                 <a:ea typeface="Calibri" pitchFamily="34" charset="-122"/>
                 <a:cs typeface="Calibri" pitchFamily="34" charset="-120"/>
               </a:rPr>
-              <a:t>Archera buys the commitment back, on terms as short as 30 days. Applies to select AWS commitments — see which, overleaf.</a:t>
+              <a:t>Archera buys the commitment back, on terms as short as 30 days. Applies to select AWS commitments — covered services on slide 4.</a:t>
             </a:r>
             <a:endParaRPr lang="en-US" sz="1000" dirty="0"/>
           </a:p>
@@ -16799,7 +16841,7 @@
             <a:r>
               <a:rPr lang="en-US" sz="850" b="1" spc="200" kern="0" dirty="0">
                 <a:solidFill>
-                  <a:srgbClr val="19C6E6"/>
+                  <a:srgbClr val="F5A623"/>
                 </a:solidFill>
                 <a:latin typeface="Calibri" pitchFamily="34" charset="0"/>
                 <a:ea typeface="Calibri" pitchFamily="34" charset="-122"/>
@@ -16886,7 +16928,7 @@
                 <a:ea typeface="Calibri" pitchFamily="34" charset="-122"/>
                 <a:cs typeface="Calibri" pitchFamily="34" charset="-120"/>
               </a:rPr>
-              <a:t>Net losses on what went unused, reimbursed in cash by ACH rather than credits. Broader coverage — and off until switched on.</a:t>
+              <a:t>Net losses on what went unused, reimbursed in cash by ACH rather than credits. Broader coverage — and off by default.</a:t>
             </a:r>
             <a:endParaRPr lang="en-US" sz="1000" dirty="0"/>
           </a:p>
@@ -16928,7 +16970,7 @@
                 <a:ea typeface="Calibri" pitchFamily="34" charset="-122"/>
                 <a:cs typeface="Calibri" pitchFamily="34" charset="-120"/>
               </a:rPr>
-              <a:t>AWS sells no commitment shorter than one year, at any price. On spend that genuinely cannot take a twelve-month term, the comparison to 28.5% is 0% — not 36%.</a:t>
+              <a:t>AWS sells no commitment shorter than one year, at any price.</a:t>
             </a:r>
             <a:endParaRPr lang="en-US" sz="850" dirty="0"/>
           </a:p>
@@ -17119,7 +17161,7 @@
                 <a:ea typeface="Calibri" pitchFamily="34" charset="-122"/>
                 <a:cs typeface="Calibri" pitchFamily="34" charset="-120"/>
               </a:rPr>
-              <a:t>Turn your customers' AWS bills
+              <a:t>Turn your customers’ AWS bills
 </a:t>
             </a:r>
             <a:pPr indent="0" marL="0">
@@ -17179,7 +17221,7 @@
                 <a:ea typeface="Calibri" pitchFamily="34" charset="-122"/>
                 <a:cs typeface="Calibri" pitchFamily="34" charset="-120"/>
               </a:rPr>
-              <a:t>One free platform, attached to a base that already exists. It automates the reviews Automatum's ISVs need to clear, produces savings on bills they already pay, and opens a recurring revenue line through the marketplace channel Automatum already runs — with almost no cost to introduce.</a:t>
+              <a:t>One free platform, attached to a base that already exists. It auto-populates the Well-Architected reviews Automatum's ISVs need, produces savings on bills they already pay, and opens a recurring revenue line through the marketplace channel Automatum already runs — with almost no cost to introduce.</a:t>
             </a:r>
             <a:endParaRPr lang="en-US" sz="1450" dirty="0"/>
           </a:p>
@@ -17629,7 +17671,7 @@
                 <a:ea typeface="Calibri" pitchFamily="34" charset="-122"/>
                 <a:cs typeface="Calibri" pitchFamily="34" charset="-120"/>
               </a:rPr>
-              <a:t>Confirm terms with Archera and wire the premium to the CPPO channel.</a:t>
+              <a:t>Confirm terms with Archera and route the premium through the CPPO channel.</a:t>
             </a:r>
             <a:endParaRPr lang="en-US" sz="1100" dirty="0"/>
           </a:p>
@@ -17862,7 +17904,7 @@
                 <a:ea typeface="Calibri" pitchFamily="34" charset="-122"/>
                 <a:cs typeface="Calibri" pitchFamily="34" charset="-120"/>
               </a:rPr>
-              <a:t>Archera is a 100%-free, multicloud commitment-management and FinOps platform. For Automatum it attaches to a base that already exists: 80+ ISVs, every one running on AWS, most carrying reservable spend that has never taken a commitment — and the premium bills through the AWS Marketplace channel Automatum already operates.</a:t>
+              <a:t>Archera is a free, multicloud commitment-management platform. For Automatum it attaches to a base that already exists: 80+ ISVs, most with AWS estates — and at the measured 55% median commitment coverage, most of that spend sits uncovered (AWS share of the base to confirm). The premium bills through the AWS Marketplace channel Automatum already operates.</a:t>
             </a:r>
             <a:endParaRPr lang="en-US" sz="1350" dirty="0"/>
           </a:p>
@@ -18012,7 +18054,7 @@
                 <a:ea typeface="Calibri" pitchFamily="34" charset="-122"/>
                 <a:cs typeface="Calibri" pitchFamily="34" charset="-120"/>
               </a:rPr>
-              <a:t>The savings analysis rides discovery, coverage lands at go-live, and the QBR gets a value agenda. No new pipeline to build.</a:t>
+              <a:t>The free savings analysis rides discovery, coverage lands at go-live, and the QBR gets a value agenda. No new pipeline to build.</a:t>
             </a:r>
             <a:endParaRPr lang="en-US" sz="1100" dirty="0"/>
           </a:p>
@@ -18462,7 +18504,7 @@
                 <a:ea typeface="Calibri" pitchFamily="34" charset="-122"/>
                 <a:cs typeface="Calibri" pitchFamily="34" charset="-120"/>
               </a:rPr>
-              <a:t>Revenue share on insured-commitment premiums, billed through the AWS Marketplace CPPO channel Automatum already runs.</a:t>
+              <a:t>Revenue share on Guaranteed Commitment premiums, billed through the CPPO channel Automatum already runs.</a:t>
             </a:r>
             <a:endParaRPr lang="en-US" sz="1100" dirty="0"/>
           </a:p>
@@ -18501,7 +18543,7 @@
                 <a:ea typeface="Calibri" pitchFamily="34" charset="-122"/>
                 <a:cs typeface="Calibri" pitchFamily="34" charset="-120"/>
               </a:rPr>
-              <a:t>The first one is the point.  </a:t>
+              <a:t>The first one is the point. </a:t>
             </a:r>
             <a:pPr indent="0" marL="0">
               <a:buNone/>
@@ -18515,7 +18557,7 @@
                 <a:ea typeface="Calibri" pitchFamily="34" charset="-122"/>
                 <a:cs typeface="Calibri" pitchFamily="34" charset="-120"/>
               </a:rPr>
-              <a:t>The other three compound on top of it — but the attach motion works on day one, on customers Automatum already bills.</a:t>
+              <a:t>The other three compound on top of it — and part four runs them as five motions, starting with the attach, which works on day one.</a:t>
             </a:r>
             <a:endParaRPr lang="en-US" sz="1300" dirty="0"/>
           </a:p>
@@ -18928,7 +18970,7 @@
                 <a:ea typeface="Calibri" pitchFamily="34" charset="-122"/>
                 <a:cs typeface="Calibri" pitchFamily="34" charset="-120"/>
               </a:rPr>
-              <a:t>Guaranteed &amp; Insured Commitments</a:t>
+              <a:t>Guaranteed Commitments</a:t>
             </a:r>
             <a:endParaRPr lang="en-US" sz="1300" dirty="0"/>
           </a:p>
@@ -18970,7 +19012,7 @@
                 <a:ea typeface="Calibri" pitchFamily="34" charset="-122"/>
                 <a:cs typeface="Calibri" pitchFamily="34" charset="-120"/>
               </a:rPr>
-              <a:t>Flexible, insurance-backed alternatives — commit without over-commitment risk.</a:t>
+              <a:t>Contractual, reinsurance-backed alternatives to native terms — commit without over-commitment risk.</a:t>
             </a:r>
             <a:endParaRPr lang="en-US" sz="1100" dirty="0"/>
           </a:p>
@@ -19081,7 +19123,7 @@
                 <a:ea typeface="Calibri" pitchFamily="34" charset="-122"/>
                 <a:cs typeface="Calibri" pitchFamily="34" charset="-120"/>
               </a:rPr>
-              <a:t>WAFR / WAR, industry and technology Lenses, and the Foundational Technical Review.</a:t>
+              <a:t>WAFR, industry and technology Lenses, and the FTR.</a:t>
             </a:r>
             <a:endParaRPr lang="en-US" sz="1100" dirty="0"/>
           </a:p>
@@ -19447,7 +19489,7 @@
                 <a:ea typeface="Calibri" pitchFamily="34" charset="-122"/>
                 <a:cs typeface="Calibri" pitchFamily="34" charset="-120"/>
               </a:rPr>
-              <a:t>Compute Savings Plans (EC2, Lambda, Fargate) and the reserved instances, nodes and capacity behind RDS, ElastiCache, OpenSearch, Redshift and DynamoDB. No resale route exists — the rebate guarantee is what covers them.</a:t>
+              <a:t>Compute Savings Plans (EC2, Lambda, Fargate) and the reserved instances, nodes and capacity behind RDS, ElastiCache, OpenSearch, Redshift and DynamoDB. No resale route — the rebate guarantee covers them, off by default.</a:t>
             </a:r>
             <a:endParaRPr lang="en-US" sz="1000" dirty="0"/>
           </a:p>
@@ -19462,7 +19504,7 @@
         <p:spPr>
           <a:xfrm>
             <a:off x="8412480" y="5431536"/>
-            <a:ext cx="3212287" cy="566928"/>
+            <a:ext cx="3212287" cy="822960"/>
           </a:xfrm>
           <a:prstGeom prst="rect">
             <a:avLst/>
@@ -19489,7 +19531,7 @@
                 <a:ea typeface="Calibri" pitchFamily="34" charset="-122"/>
                 <a:cs typeface="Calibri" pitchFamily="34" charset="-120"/>
               </a:rPr>
-              <a:t>This split is why the release guarantee applies to select commitments while the rebate guarantee is the broader of the two.</a:t>
+              <a:t>This split is why the release guarantee applies to select commitments while the rebate guarantee is the broader of the two. Mapping inferred from AWS resale rules — confirm the covered list with Archera.</a:t>
             </a:r>
             <a:endParaRPr lang="en-US" sz="950" dirty="0"/>
           </a:p>
@@ -20146,7 +20188,7 @@
                 <a:ea typeface="Calibri" pitchFamily="34" charset="-122"/>
                 <a:cs typeface="Calibri" pitchFamily="34" charset="-120"/>
               </a:rPr>
-              <a:t>marketplace revenue</a:t>
+              <a:t>marketplace GMV</a:t>
             </a:r>
             <a:endParaRPr lang="en-US" sz="1000" dirty="0"/>
           </a:p>
@@ -20828,7 +20870,7 @@
                 <a:ea typeface="Calibri" pitchFamily="34" charset="-122"/>
                 <a:cs typeface="Calibri" pitchFamily="34" charset="-120"/>
               </a:rPr>
-              <a:t>Archera's premium bills through AWS Marketplace and draws down the customer's EDP or MACC commit. Private offers, metering and CPPO resale are Automatum's core competency, not a new build.</a:t>
+              <a:t>Archera's premium bills through AWS Marketplace and draws down the customer's EDP commit. Private offers, metering and CPPO resale are Automatum's core competency, not a new build.</a:t>
             </a:r>
             <a:endParaRPr lang="en-US" sz="1050" dirty="0"/>
           </a:p>
@@ -20959,7 +21001,7 @@
                 <a:ea typeface="Calibri" pitchFamily="34" charset="-122"/>
                 <a:cs typeface="Calibri" pitchFamily="34" charset="-120"/>
               </a:rPr>
-              <a:t>Startups and scaleups sit exactly where measured coverage is lowest. The captured-savings bands below are the sales map for the base.</a:t>
+              <a:t>Startups and scaleups sit where measured savings capture is lowest — a skew to confirm from account data. The bands below are the sales map for the base.</a:t>
             </a:r>
             <a:endParaRPr lang="en-US" sz="1050" dirty="0"/>
           </a:p>
@@ -20998,7 +21040,7 @@
                 <a:ea typeface="Calibri" pitchFamily="34" charset="-122"/>
                 <a:cs typeface="Calibri" pitchFamily="34" charset="-120"/>
               </a:rPr>
-              <a:t>MEDIAN SAVING ALREADY CAPTURED, BY ANNUAL AWS COMPUTE</a:t>
+              <a:t>MEDIAN SAVING ALREADY CAPTURED, BY ANNUAL AWS COMPUTE USAGE</a:t>
             </a:r>
             <a:endParaRPr lang="en-US" sz="850" dirty="0"/>
           </a:p>
@@ -21208,7 +21250,7 @@
                 <a:ea typeface="Calibri" pitchFamily="34" charset="-122"/>
                 <a:cs typeface="Calibri" pitchFamily="34" charset="-120"/>
               </a:rPr>
-              <a:t>$500K – $10M</a:t>
+              <a:t>$500K–$10M</a:t>
             </a:r>
             <a:endParaRPr lang="en-US" sz="850" dirty="0"/>
           </a:p>
@@ -21483,7 +21525,7 @@
                 <a:ea typeface="Calibri" pitchFamily="34" charset="-122"/>
                 <a:cs typeface="Calibri" pitchFamily="34" charset="-120"/>
               </a:rPr>
-              <a:t>Insured Commitments cover AWS, Azure and Google Cloud from one control plane.</a:t>
+              <a:t>the same guarantee structure covers AWS, Azure and Google Cloud from one control plane.</a:t>
             </a:r>
             <a:endParaRPr lang="en-US" sz="1100" dirty="0"/>
           </a:p>
@@ -22779,7 +22821,7 @@
                 <a:ea typeface="Calibri" pitchFamily="34" charset="-122"/>
                 <a:cs typeface="Calibri" pitchFamily="34" charset="-120"/>
               </a:rPr>
-              <a:t>Net savings to the ISVs  ·  35% blended Archera rate</a:t>
+              <a:t>Net savings to the ISVs  ·  35% blended net rate</a:t>
             </a:r>
             <a:endParaRPr lang="en-US" sz="950" dirty="0"/>
           </a:p>
@@ -23524,11 +23566,11 @@
         <p:spPr>
           <a:xfrm>
             <a:off x="566928" y="2029968"/>
-            <a:ext cx="3576218" cy="1371600"/>
+            <a:ext cx="3576218" cy="1499616"/>
           </a:xfrm>
           <a:prstGeom prst="roundRect">
             <a:avLst>
-              <a:gd name="adj" fmla="val 4667"/>
+              <a:gd name="adj" fmla="val 4268"/>
             </a:avLst>
           </a:prstGeom>
           <a:solidFill>
@@ -23629,7 +23671,7 @@
         <p:spPr>
           <a:xfrm>
             <a:off x="822960" y="2889504"/>
-            <a:ext cx="3064154" cy="420624"/>
+            <a:ext cx="3064154" cy="566928"/>
           </a:xfrm>
           <a:prstGeom prst="rect">
             <a:avLst/>
@@ -23671,11 +23713,11 @@
         <p:spPr>
           <a:xfrm>
             <a:off x="4307738" y="2029968"/>
-            <a:ext cx="3576218" cy="1371600"/>
+            <a:ext cx="3576218" cy="1499616"/>
           </a:xfrm>
           <a:prstGeom prst="roundRect">
             <a:avLst>
-              <a:gd name="adj" fmla="val 4667"/>
+              <a:gd name="adj" fmla="val 4268"/>
             </a:avLst>
           </a:prstGeom>
           <a:solidFill>
@@ -23776,7 +23818,7 @@
         <p:spPr>
           <a:xfrm>
             <a:off x="4563770" y="2889504"/>
-            <a:ext cx="3064154" cy="420624"/>
+            <a:ext cx="3064154" cy="566928"/>
           </a:xfrm>
           <a:prstGeom prst="rect">
             <a:avLst/>
@@ -23803,7 +23845,7 @@
                 <a:ea typeface="Calibri" pitchFamily="34" charset="-122"/>
                 <a:cs typeface="Calibri" pitchFamily="34" charset="-120"/>
               </a:rPr>
-              <a:t>60% of the bill: EC2 and SP-eligible compute, plus RDS, OpenSearch, ElastiCache, Redshift, DynamoDB.</a:t>
+              <a:t>60% of the bill: compute plus RDS, OpenSearch, ElastiCache, Redshift, DynamoDB.</a:t>
             </a:r>
             <a:endParaRPr lang="en-US" sz="1050" dirty="0"/>
           </a:p>
@@ -23818,11 +23860,11 @@
         <p:spPr>
           <a:xfrm>
             <a:off x="8048549" y="2029968"/>
-            <a:ext cx="3576218" cy="1371600"/>
+            <a:ext cx="3576218" cy="1499616"/>
           </a:xfrm>
           <a:prstGeom prst="roundRect">
             <a:avLst>
-              <a:gd name="adj" fmla="val 4667"/>
+              <a:gd name="adj" fmla="val 4268"/>
             </a:avLst>
           </a:prstGeom>
           <a:solidFill>
@@ -23923,7 +23965,7 @@
         <p:spPr>
           <a:xfrm>
             <a:off x="8304581" y="2889504"/>
-            <a:ext cx="3064154" cy="420624"/>
+            <a:ext cx="3064154" cy="566928"/>
           </a:xfrm>
           <a:prstGeom prst="rect">
             <a:avLst/>
@@ -24538,7 +24580,7 @@
                 <a:ea typeface="Calibri" pitchFamily="34" charset="-122"/>
                 <a:cs typeface="Calibri" pitchFamily="34" charset="-120"/>
               </a:rPr>
-              <a:t>$28.4K a year back, on one mid-sized customer.  </a:t>
+              <a:t>$28.4K a year back, on one mid-sized customer. </a:t>
             </a:r>
             <a:pPr indent="0" marL="0">
               <a:buNone/>
@@ -24758,7 +24800,7 @@
         <p:spPr>
           <a:xfrm>
             <a:off x="566928" y="1060704"/>
-            <a:ext cx="5394960" cy="2011680"/>
+            <a:ext cx="5394960" cy="1828800"/>
           </a:xfrm>
           <a:prstGeom prst="rect">
             <a:avLst/>
@@ -24772,12 +24814,12 @@
           <a:p>
             <a:pPr indent="0" marL="0">
               <a:lnSpc>
-                <a:spcPts val="4600"/>
+                <a:spcPts val="4100"/>
               </a:lnSpc>
               <a:buNone/>
             </a:pPr>
             <a:r>
-              <a:rPr lang="en-US" sz="4000" b="1" dirty="0">
+              <a:rPr lang="en-US" sz="3500" b="1" dirty="0">
                 <a:solidFill>
                   <a:srgbClr val="FFFFFF"/>
                 </a:solidFill>
@@ -24785,19 +24827,19 @@
                 <a:ea typeface="Calibri" pitchFamily="34" charset="-122"/>
                 <a:cs typeface="Calibri" pitchFamily="34" charset="-120"/>
               </a:rPr>
-              <a:t>Five ways to put</a:t>
-            </a:r>
-            <a:endParaRPr lang="en-US" sz="4000" dirty="0"/>
+              <a:t>Five motions to put</a:t>
+            </a:r>
+            <a:endParaRPr lang="en-US" sz="3500" dirty="0"/>
           </a:p>
           <a:p>
             <a:pPr indent="0" marL="0">
               <a:lnSpc>
-                <a:spcPts val="4600"/>
+                <a:spcPts val="4100"/>
               </a:lnSpc>
               <a:buNone/>
             </a:pPr>
             <a:r>
-              <a:rPr lang="en-US" sz="4000" b="1" dirty="0">
+              <a:rPr lang="en-US" sz="3500" b="1" dirty="0">
                 <a:solidFill>
                   <a:srgbClr val="FFFFFF"/>
                 </a:solidFill>
@@ -24805,9 +24847,9 @@
                 <a:ea typeface="Calibri" pitchFamily="34" charset="-122"/>
                 <a:cs typeface="Calibri" pitchFamily="34" charset="-120"/>
               </a:rPr>
-              <a:t>Archera to work</a:t>
-            </a:r>
-            <a:endParaRPr lang="en-US" sz="4000" dirty="0"/>
+              <a:t>Archera to work.</a:t>
+            </a:r>
+            <a:endParaRPr lang="en-US" sz="3500" dirty="0"/>
           </a:p>
         </p:txBody>
       </p:sp>
@@ -24819,7 +24861,7 @@
         </p:nvSpPr>
         <p:spPr>
           <a:xfrm>
-            <a:off x="566928" y="2798064"/>
+            <a:off x="566928" y="2670048"/>
             <a:ext cx="5029200" cy="548640"/>
           </a:xfrm>
           <a:prstGeom prst="rect">
@@ -24927,23 +24969,20 @@
         </p:nvSpPr>
         <p:spPr>
           <a:xfrm>
-            <a:off x="7114032" y="914400"/>
-            <a:ext cx="4272991" cy="438912"/>
-          </a:xfrm>
-          <a:prstGeom prst="rect">
-            <a:avLst/>
-          </a:prstGeom>
-          <a:noFill/>
-          <a:ln/>
-        </p:spPr>
-        <p:txBody>
-          <a:bodyPr wrap="square" lIns="0" tIns="0" rIns="0" bIns="0" rtlCol="0" anchor="t"/>
-          <a:lstStyle/>
-          <a:p>
-            <a:pPr indent="0" marL="0">
-              <a:lnSpc>
-                <a:spcPts val="1800"/>
-              </a:lnSpc>
+            <a:off x="7114032" y="987552"/>
+            <a:ext cx="4272991" cy="292608"/>
+          </a:xfrm>
+          <a:prstGeom prst="rect">
+            <a:avLst/>
+          </a:prstGeom>
+          <a:noFill/>
+          <a:ln/>
+        </p:spPr>
+        <p:txBody>
+          <a:bodyPr wrap="square" lIns="0" tIns="0" rIns="0" bIns="0" rtlCol="0" anchor="ctr"/>
+          <a:lstStyle/>
+          <a:p>
+            <a:pPr indent="0" marL="0">
               <a:buNone/>
             </a:pPr>
             <a:r>
@@ -24955,7 +24994,7 @@
                 <a:ea typeface="Calibri" pitchFamily="34" charset="-122"/>
                 <a:cs typeface="Calibri" pitchFamily="34" charset="-120"/>
               </a:rPr>
-              <a:t>Attach savings to every ISV you already serve</a:t>
+              <a:t>Attach savings to the installed base</a:t>
             </a:r>
             <a:endParaRPr lang="en-US" sz="1350" dirty="0"/>
           </a:p>
@@ -24969,7 +25008,7 @@
         </p:nvSpPr>
         <p:spPr>
           <a:xfrm>
-            <a:off x="7114032" y="1371600"/>
+            <a:off x="7114032" y="1298448"/>
             <a:ext cx="4272991" cy="310896"/>
           </a:xfrm>
           <a:prstGeom prst="rect">
@@ -25074,23 +25113,20 @@
         </p:nvSpPr>
         <p:spPr>
           <a:xfrm>
-            <a:off x="7114032" y="1993392"/>
-            <a:ext cx="4272991" cy="438912"/>
-          </a:xfrm>
-          <a:prstGeom prst="rect">
-            <a:avLst/>
-          </a:prstGeom>
-          <a:noFill/>
-          <a:ln/>
-        </p:spPr>
-        <p:txBody>
-          <a:bodyPr wrap="square" lIns="0" tIns="0" rIns="0" bIns="0" rtlCol="0" anchor="t"/>
-          <a:lstStyle/>
-          <a:p>
-            <a:pPr indent="0" marL="0">
-              <a:lnSpc>
-                <a:spcPts val="1800"/>
-              </a:lnSpc>
+            <a:off x="7114032" y="2066544"/>
+            <a:ext cx="4272991" cy="292608"/>
+          </a:xfrm>
+          <a:prstGeom prst="rect">
+            <a:avLst/>
+          </a:prstGeom>
+          <a:noFill/>
+          <a:ln/>
+        </p:spPr>
+        <p:txBody>
+          <a:bodyPr wrap="square" lIns="0" tIns="0" rIns="0" bIns="0" rtlCol="0" anchor="ctr"/>
+          <a:lstStyle/>
+          <a:p>
+            <a:pPr indent="0" marL="0">
               <a:buNone/>
             </a:pPr>
             <a:r>
@@ -25102,7 +25138,7 @@
                 <a:ea typeface="Calibri" pitchFamily="34" charset="-122"/>
                 <a:cs typeface="Calibri" pitchFamily="34" charset="-120"/>
               </a:rPr>
-              <a:t>Make the Automatum subscription self-funding</a:t>
+              <a:t>Make the subscription self-funding</a:t>
             </a:r>
             <a:endParaRPr lang="en-US" sz="1350" dirty="0"/>
           </a:p>
@@ -25116,7 +25152,7 @@
         </p:nvSpPr>
         <p:spPr>
           <a:xfrm>
-            <a:off x="7114032" y="2450592"/>
+            <a:off x="7114032" y="2377440"/>
             <a:ext cx="4272991" cy="310896"/>
           </a:xfrm>
           <a:prstGeom prst="rect">
@@ -25221,23 +25257,20 @@
         </p:nvSpPr>
         <p:spPr>
           <a:xfrm>
-            <a:off x="7114032" y="3072384"/>
-            <a:ext cx="4272991" cy="438912"/>
-          </a:xfrm>
-          <a:prstGeom prst="rect">
-            <a:avLst/>
-          </a:prstGeom>
-          <a:noFill/>
-          <a:ln/>
-        </p:spPr>
-        <p:txBody>
-          <a:bodyPr wrap="square" lIns="0" tIns="0" rIns="0" bIns="0" rtlCol="0" anchor="t"/>
-          <a:lstStyle/>
-          <a:p>
-            <a:pPr indent="0" marL="0">
-              <a:lnSpc>
-                <a:spcPts val="1800"/>
-              </a:lnSpc>
+            <a:off x="7114032" y="3145536"/>
+            <a:ext cx="4272991" cy="292608"/>
+          </a:xfrm>
+          <a:prstGeom prst="rect">
+            <a:avLst/>
+          </a:prstGeom>
+          <a:noFill/>
+          <a:ln/>
+        </p:spPr>
+        <p:txBody>
+          <a:bodyPr wrap="square" lIns="0" tIns="0" rIns="0" bIns="0" rtlCol="0" anchor="ctr"/>
+          <a:lstStyle/>
+          <a:p>
+            <a:pPr indent="0" marL="0">
               <a:buNone/>
             </a:pPr>
             <a:r>
@@ -25263,7 +25296,7 @@
         </p:nvSpPr>
         <p:spPr>
           <a:xfrm>
-            <a:off x="7114032" y="3529584"/>
+            <a:off x="7114032" y="3456432"/>
             <a:ext cx="4272991" cy="310896"/>
           </a:xfrm>
           <a:prstGeom prst="rect">
@@ -25368,23 +25401,20 @@
         </p:nvSpPr>
         <p:spPr>
           <a:xfrm>
-            <a:off x="7114032" y="4151376"/>
-            <a:ext cx="4272991" cy="438912"/>
-          </a:xfrm>
-          <a:prstGeom prst="rect">
-            <a:avLst/>
-          </a:prstGeom>
-          <a:noFill/>
-          <a:ln/>
-        </p:spPr>
-        <p:txBody>
-          <a:bodyPr wrap="square" lIns="0" tIns="0" rIns="0" bIns="0" rtlCol="0" anchor="t"/>
-          <a:lstStyle/>
-          <a:p>
-            <a:pPr indent="0" marL="0">
-              <a:lnSpc>
-                <a:spcPts val="1800"/>
-              </a:lnSpc>
+            <a:off x="7114032" y="4224528"/>
+            <a:ext cx="4272991" cy="292608"/>
+          </a:xfrm>
+          <a:prstGeom prst="rect">
+            <a:avLst/>
+          </a:prstGeom>
+          <a:noFill/>
+          <a:ln/>
+        </p:spPr>
+        <p:txBody>
+          <a:bodyPr wrap="square" lIns="0" tIns="0" rIns="0" bIns="0" rtlCol="0" anchor="ctr"/>
+          <a:lstStyle/>
+          <a:p>
+            <a:pPr indent="0" marL="0">
               <a:buNone/>
             </a:pPr>
             <a:r>
@@ -25410,7 +25440,7 @@
         </p:nvSpPr>
         <p:spPr>
           <a:xfrm>
-            <a:off x="7114032" y="4608576"/>
+            <a:off x="7114032" y="4535424"/>
             <a:ext cx="4272991" cy="310896"/>
           </a:xfrm>
           <a:prstGeom prst="rect">
@@ -25435,7 +25465,7 @@
                 <a:ea typeface="Calibri" pitchFamily="34" charset="-122"/>
                 <a:cs typeface="Calibri" pitchFamily="34" charset="-120"/>
               </a:rPr>
-              <a:t>AI, bursty and migrating workloads, insured.</a:t>
+              <a:t>AI, bursty and migrating workloads — covered, not locked.</a:t>
             </a:r>
             <a:endParaRPr lang="en-US" sz="1050" dirty="0"/>
           </a:p>
@@ -25515,23 +25545,20 @@
         </p:nvSpPr>
         <p:spPr>
           <a:xfrm>
-            <a:off x="7114032" y="5230368"/>
-            <a:ext cx="4272991" cy="438912"/>
-          </a:xfrm>
-          <a:prstGeom prst="rect">
-            <a:avLst/>
-          </a:prstGeom>
-          <a:noFill/>
-          <a:ln/>
-        </p:spPr>
-        <p:txBody>
-          <a:bodyPr wrap="square" lIns="0" tIns="0" rIns="0" bIns="0" rtlCol="0" anchor="t"/>
-          <a:lstStyle/>
-          <a:p>
-            <a:pPr indent="0" marL="0">
-              <a:lnSpc>
-                <a:spcPts val="1800"/>
-              </a:lnSpc>
+            <a:off x="7114032" y="5303520"/>
+            <a:ext cx="4272991" cy="292608"/>
+          </a:xfrm>
+          <a:prstGeom prst="rect">
+            <a:avLst/>
+          </a:prstGeom>
+          <a:noFill/>
+          <a:ln/>
+        </p:spPr>
+        <p:txBody>
+          <a:bodyPr wrap="square" lIns="0" tIns="0" rIns="0" bIns="0" rtlCol="0" anchor="ctr"/>
+          <a:lstStyle/>
+          <a:p>
+            <a:pPr indent="0" marL="0">
               <a:buNone/>
             </a:pPr>
             <a:r>
@@ -25557,7 +25584,7 @@
         </p:nvSpPr>
         <p:spPr>
           <a:xfrm>
-            <a:off x="7114032" y="5687568"/>
+            <a:off x="7114032" y="5614416"/>
             <a:ext cx="4272991" cy="310896"/>
           </a:xfrm>
           <a:prstGeom prst="rect">
@@ -25882,7 +25909,7 @@
                 <a:ea typeface="Calibri" pitchFamily="34" charset="-122"/>
                 <a:cs typeface="Calibri" pitchFamily="34" charset="-120"/>
               </a:rPr>
-              <a:t>Connect a customer's AWS account in minutes, with minimal privileges — installed from AWS Marketplace.</a:t>
+              <a:t>Connect a customer's payer account in minutes, with minimal privileges — installed from AWS Marketplace.</a:t>
             </a:r>
             <a:endParaRPr lang="en-US" sz="1250" dirty="0"/>
           </a:p>
@@ -26083,7 +26110,7 @@
                 <a:ea typeface="Calibri" pitchFamily="34" charset="-122"/>
                 <a:cs typeface="Calibri" pitchFamily="34" charset="-120"/>
               </a:rPr>
-              <a:t>Live in days — inside the onboarding window Automatum already promises, on the access the listing build already needs.</a:t>
+              <a:t>Live in days — inside Automatum's standard onboarding window, on the same access the listing build requires.</a:t>
             </a:r>
             <a:endParaRPr lang="en-US" sz="1250" dirty="0"/>
           </a:p>

--- a/decks/Archera-for-Automatum.pptx
+++ b/decks/Archera-for-Automatum.pptx
@@ -1137,7 +1137,7 @@
           <a:p>
             <a:r>
               <a:rPr lang="en-US" dirty="0"/>
-              <a:t>The point of this slide is that the plumbing is Automatum's home turf — CPPO, private offers, metering, disbursement reconciliation are the product they already operate. The two open items on the right are the actual negotiation with Archera; everything on the left is stock work. Do not let the flow read as a quoted deal: the on-slide caveat matters.</a:t>
+              <a:t>The point of this slide is that the plumbing is Automatum's home turf — CPPO, private offers, metering, disbursement reconciliation are the product they already operate. The terms panel now reflects the distributor agreement template: 20/25/30 tiers on marketplace net revenue, monthly, via the Partner Portal — and rev-share applies to net-new Archera customers only, which makes moving before Archera sells into the base directly worth real money. Still open: execution, starting tier, joint GTM plan.</a:t>
             </a:r>
             <a:endParaRPr lang="en-US" dirty="0"/>
           </a:p>
@@ -1313,7 +1313,7 @@
           <a:p>
             <a:r>
               <a:rPr lang="en-US" dirty="0"/>
-              <a:t>Keep the pilot to two accounts. The single most useful output of days 0 to 30 is a real coverage baseline across those accounts, because it replaces every assumption on the sizing slide with a measured number.</a:t>
+              <a:t>The enablement bar in the agreement: three people through Archera Sales Enablement and one through Technical Sales Enablement, both free, plus a twice-monthly pipeline cadence with Archera. Keep the pilot to two accounts. The single most useful output of days 0 to 30 is a real coverage baseline across those accounts, because it replaces every assumption on the sizing slide with a measured number.</a:t>
             </a:r>
             <a:endParaRPr lang="en-US" dirty="0"/>
           </a:p>
@@ -1929,7 +1929,7 @@
           <a:p>
             <a:r>
               <a:rPr lang="en-US" dirty="0"/>
-              <a:t>Do not defend the inputs — invite the audience to replace them. The point of the slide is that even the conservative column, at $10K a month of average AWS spend, produces a high-six-figure savings pool for the base (seven figures in the base case) and a five-figure revenue line for Automatum. If Automatum can pull actual spend data for even ten accounts, the base case tightens immediately.</a:t>
+              <a:t>Do not defend the inputs — invite the audience to replace them. The point of the slide is that even the conservative column, at $10K a month of average AWS spend, produces a high-six-figure savings pool for the base (seven figures in the base case) and a six-figure revenue line for Automatum at the agreement's 20-30% tiers. If Automatum can pull actual spend data for even ten accounts, the base case tightens immediately.</a:t>
             </a:r>
             <a:endParaRPr lang="en-US" dirty="0"/>
           </a:p>
@@ -8321,7 +8321,7 @@
         <p:spPr>
           <a:xfrm>
             <a:off x="566928" y="1335024"/>
-            <a:ext cx="8595360" cy="548640"/>
+            <a:ext cx="8961120" cy="548640"/>
           </a:xfrm>
           <a:prstGeom prst="rect">
             <a:avLst/>
@@ -8348,7 +8348,7 @@
                 <a:ea typeface="Calibri" pitchFamily="34" charset="-122"/>
                 <a:cs typeface="Calibri" pitchFamily="34" charset="-120"/>
               </a:rPr>
-              <a:t>Two models, depending on how much of the customer relationship Automatum wants to carry.</a:t>
+              <a:t>The distributor agreement offers two postures — and the recurring revenue line this deck argues for requires the second.</a:t>
             </a:r>
             <a:endParaRPr lang="en-US" sz="1350" dirty="0"/>
           </a:p>
@@ -8414,7 +8414,7 @@
                 <a:ea typeface="Calibri" pitchFamily="34" charset="-122"/>
                 <a:cs typeface="Calibri" pitchFamily="34" charset="-120"/>
               </a:rPr>
-              <a:t>REFER &amp; CO-SELL</a:t>
+              <a:t>REFERRAL TIER</a:t>
             </a:r>
             <a:endParaRPr lang="en-US" sz="950" dirty="0"/>
           </a:p>
@@ -8456,7 +8456,7 @@
                 <a:ea typeface="Calibri" pitchFamily="34" charset="-122"/>
                 <a:cs typeface="Calibri" pitchFamily="34" charset="-120"/>
               </a:rPr>
-              <a:t>Participation without delivery obligation</a:t>
+              <a:t>A one-time bonus, not a revenue line</a:t>
             </a:r>
             <a:endParaRPr lang="en-US" sz="1500" dirty="0"/>
           </a:p>
@@ -8523,7 +8523,7 @@
                 <a:ea typeface="Calibri" pitchFamily="34" charset="-122"/>
                 <a:cs typeface="Calibri" pitchFamily="34" charset="-120"/>
               </a:rPr>
-              <a:t>Automatum registers and introduces; Archera runs the sale and the support relationship.</a:t>
+              <a:t>Automatum registers the lead; Archera runs the sale, onboarding and support.</a:t>
             </a:r>
             <a:endParaRPr lang="en-US" sz="1150" dirty="0"/>
           </a:p>
@@ -8590,7 +8590,7 @@
                 <a:ea typeface="Calibri" pitchFamily="34" charset="-122"/>
                 <a:cs typeface="Calibri" pitchFamily="34" charset="-120"/>
               </a:rPr>
-              <a:t>Fastest to stand up — no channel registration, no offer template, no reconciliation.</a:t>
+              <a:t>Pays a one-off bonus of the first month's MRR — nothing recurring.</a:t>
             </a:r>
             <a:endParaRPr lang="en-US" sz="1150" dirty="0"/>
           </a:p>
@@ -8657,7 +8657,7 @@
                 <a:ea typeface="Calibri" pitchFamily="34" charset="-122"/>
                 <a:cs typeface="Calibri" pitchFamily="34" charset="-120"/>
               </a:rPr>
-              <a:t>The right default while the pilot accounts prove the motion.</a:t>
+              <a:t>Fine for the odd out-of-scope account. It is not the line this deck argues for.</a:t>
             </a:r>
             <a:endParaRPr lang="en-US" sz="1150" dirty="0"/>
           </a:p>
@@ -8723,7 +8723,7 @@
                 <a:ea typeface="Calibri" pitchFamily="34" charset="-122"/>
                 <a:cs typeface="Calibri" pitchFamily="34" charset="-120"/>
               </a:rPr>
-              <a:t>RESELL &amp; MANAGE</a:t>
+              <a:t>CO-SELLER TIER</a:t>
             </a:r>
             <a:endParaRPr lang="en-US" sz="950" dirty="0"/>
           </a:p>
@@ -8765,7 +8765,7 @@
                 <a:ea typeface="Calibri" pitchFamily="34" charset="-122"/>
                 <a:cs typeface="Calibri" pitchFamily="34" charset="-120"/>
               </a:rPr>
-              <a:t>Structural margin as channel partner of record</a:t>
+              <a:t>20–30% recurring, rising with the book</a:t>
             </a:r>
             <a:endParaRPr lang="en-US" sz="1500" dirty="0"/>
           </a:p>
@@ -8832,7 +8832,7 @@
                 <a:ea typeface="Calibri" pitchFamily="34" charset="-122"/>
                 <a:cs typeface="Calibri" pitchFamily="34" charset="-120"/>
               </a:rPr>
-              <a:t>Automatum holds the private offer; the margin is contractual, not referral.</a:t>
+              <a:t>Bronze 20% under $100K GRI/GSP MRR, Silver 25% under $500K, Gold 30% at $1M+.</a:t>
             </a:r>
             <a:endParaRPr lang="en-US" sz="1150" dirty="0"/>
           </a:p>
@@ -8899,7 +8899,7 @@
                 <a:ea typeface="Calibri" pitchFamily="34" charset="-122"/>
                 <a:cs typeface="Calibri" pitchFamily="34" charset="-120"/>
               </a:rPr>
-              <a:t>De-risks RI and Savings Plan management across any consolidated-billing or managed book.</a:t>
+              <a:t>Automatum runs the motion with joint GTM support; Archera provides Tier-2 support.</a:t>
             </a:r>
             <a:endParaRPr lang="en-US" sz="1150" dirty="0"/>
           </a:p>
@@ -8966,7 +8966,7 @@
                 <a:ea typeface="Calibri" pitchFamily="34" charset="-122"/>
                 <a:cs typeface="Calibri" pitchFamily="34" charset="-120"/>
               </a:rPr>
-              <a:t>The rails — CPPO, metering, EDP drawdown — are on the next slide.</a:t>
+              <a:t>The rails — CPPO, metering, the Partner Portal — are on the next slide.</a:t>
             </a:r>
             <a:endParaRPr lang="en-US" sz="1150" dirty="0"/>
           </a:p>
@@ -9810,7 +9810,7 @@
                 <a:ea typeface="Calibri" pitchFamily="34" charset="-122"/>
                 <a:cs typeface="Calibri" pitchFamily="34" charset="-120"/>
               </a:rPr>
-              <a:t>One click on the private offer. No new contract paper beyond it.</a:t>
+              <a:t>One click on the private offer; onboarded via the Archera Partner Portal.</a:t>
             </a:r>
             <a:endParaRPr lang="en-US" sz="950" dirty="0"/>
           </a:p>
@@ -10334,7 +10334,7 @@
                 <a:ea typeface="Calibri" pitchFamily="34" charset="-122"/>
                 <a:cs typeface="Calibri" pitchFamily="34" charset="-120"/>
               </a:rPr>
-              <a:t>STILL TO AGREE WITH ARCHERA</a:t>
+              <a:t>THE TERMS, PER THE AGREEMENT</a:t>
             </a:r>
             <a:endParaRPr lang="en-US" sz="850" dirty="0"/>
           </a:p>
@@ -10363,12 +10363,12 @@
           <a:p>
             <a:pPr indent="0" marL="0">
               <a:lnSpc>
-                <a:spcPts val="1500"/>
+                <a:spcPts val="1350"/>
               </a:lnSpc>
               <a:buNone/>
             </a:pPr>
             <a:r>
-              <a:rPr lang="en-US" sz="1050" dirty="0">
+              <a:rPr lang="en-US" sz="950" dirty="0">
                 <a:solidFill>
                   <a:srgbClr val="B7C0E0"/>
                 </a:solidFill>
@@ -10376,9 +10376,9 @@
                 <a:ea typeface="Calibri" pitchFamily="34" charset="-122"/>
                 <a:cs typeface="Calibri" pitchFamily="34" charset="-120"/>
               </a:rPr>
-              <a:t>The rev-share rate, and whether it is struck on premium or on net savings. Who owns first-line support. Refer vs. resell, decided per account.</a:t>
-            </a:r>
-            <a:endParaRPr lang="en-US" sz="1050" dirty="0"/>
+              <a:t>20–30% tiered rev-share on marketplace net revenue, paid monthly and reported in the Partner Portal. Rev-share applies to net-new entities only — Archera checks each against its existing book. Still open: execution, the starting tier, and the joint GTM plan.</a:t>
+            </a:r>
+            <a:endParaRPr lang="en-US" sz="950" dirty="0"/>
           </a:p>
         </p:txBody>
       </p:sp>
@@ -10498,7 +10498,7 @@
                 <a:ea typeface="Calibri" pitchFamily="34" charset="-122"/>
                 <a:cs typeface="Calibri" pitchFamily="34" charset="-120"/>
               </a:rPr>
-              <a:t>Flow shape per the CPPO private-offer model; the rev-share rate and terms are not quoted in any source behind this deck — confirm with Archera. A structure to negotiate against, not an offer.</a:t>
+              <a:t>Terms per Archera's Distributor Partner Agreement template (Appendix A) — unsigned, so everything here is subject to execution. Azure and GCP channel private offers are approved routes under the same agreement.</a:t>
             </a:r>
             <a:endParaRPr lang="en-US" sz="850" dirty="0"/>
           </a:p>
@@ -13565,7 +13565,7 @@
                 <a:ea typeface="Calibri" pitchFamily="34" charset="-122"/>
                 <a:cs typeface="Calibri" pitchFamily="34" charset="-120"/>
               </a:rPr>
-              <a:t>Confirm the rev-share model with Archera and align it to the CPPO channel.</a:t>
+              <a:t>Execute the distributor agreement and clear its free enablement bar.</a:t>
             </a:r>
             <a:endParaRPr lang="en-US" sz="1100" dirty="0"/>
           </a:p>
@@ -17629,7 +17629,7 @@
                 <a:ea typeface="Calibri" pitchFamily="34" charset="-122"/>
                 <a:cs typeface="Calibri" pitchFamily="34" charset="-120"/>
               </a:rPr>
-              <a:t>Agree the rev-share</a:t>
+              <a:t>Sign the distributor agreement</a:t>
             </a:r>
             <a:endParaRPr lang="en-US" sz="1500" dirty="0"/>
           </a:p>
@@ -17671,7 +17671,7 @@
                 <a:ea typeface="Calibri" pitchFamily="34" charset="-122"/>
                 <a:cs typeface="Calibri" pitchFamily="34" charset="-120"/>
               </a:rPr>
-              <a:t>Confirm terms with Archera and route the premium through the CPPO channel.</a:t>
+              <a:t>20–30% tiered rev-share, paid monthly through the marketplace channel.</a:t>
             </a:r>
             <a:endParaRPr lang="en-US" sz="1100" dirty="0"/>
           </a:p>
@@ -18504,7 +18504,7 @@
                 <a:ea typeface="Calibri" pitchFamily="34" charset="-122"/>
                 <a:cs typeface="Calibri" pitchFamily="34" charset="-120"/>
               </a:rPr>
-              <a:t>Revenue share on Guaranteed Commitment premiums, billed through the CPPO channel Automatum already runs.</a:t>
+              <a:t>A 20–30% tiered revenue share on premiums, through the CPPO channel Automatum already runs.</a:t>
             </a:r>
             <a:endParaRPr lang="en-US" sz="1100" dirty="0"/>
           </a:p>
@@ -23159,7 +23159,7 @@
                 <a:ea typeface="Calibri" pitchFamily="34" charset="-122"/>
                 <a:cs typeface="Calibri" pitchFamily="34" charset="-120"/>
               </a:rPr>
-              <a:t>Recurring revenue to Automatum  ·  10–20% rev-share</a:t>
+              <a:t>Recurring revenue to Automatum  ·  20–30% tiered rev-share</a:t>
             </a:r>
             <a:endParaRPr lang="en-US" sz="950" dirty="0"/>
           </a:p>
@@ -23198,7 +23198,7 @@
                 <a:ea typeface="Calibri" pitchFamily="34" charset="-122"/>
                 <a:cs typeface="Calibri" pitchFamily="34" charset="-120"/>
               </a:rPr>
-              <a:t>$57–114K</a:t>
+              <a:t>$114–171K</a:t>
             </a:r>
             <a:endParaRPr lang="en-US" sz="1200" dirty="0"/>
           </a:p>
@@ -23237,7 +23237,7 @@
                 <a:ea typeface="Calibri" pitchFamily="34" charset="-122"/>
                 <a:cs typeface="Calibri" pitchFamily="34" charset="-120"/>
               </a:rPr>
-              <a:t>$143–285K</a:t>
+              <a:t>$285–428K</a:t>
             </a:r>
             <a:endParaRPr lang="en-US" sz="1200" dirty="0"/>
           </a:p>
@@ -23276,7 +23276,7 @@
                 <a:ea typeface="Calibri" pitchFamily="34" charset="-122"/>
                 <a:cs typeface="Calibri" pitchFamily="34" charset="-120"/>
               </a:rPr>
-              <a:t>$285–570K</a:t>
+              <a:t>$570–855K</a:t>
             </a:r>
             <a:endParaRPr lang="en-US" sz="1200" dirty="0"/>
           </a:p>
@@ -23318,7 +23318,7 @@
                 <a:ea typeface="Calibri" pitchFamily="34" charset="-122"/>
                 <a:cs typeface="Calibri" pitchFamily="34" charset="-120"/>
               </a:rPr>
-              <a:t>Illustrative. Reservable share and the blended Archera rate are assumptions; the 45% coverage gap follows the measured 55% median AWS commitment coverage (ProsperOps). The 22% premium is the gap between the 57% a three-year creates and the 35% blended net the customer keeps. The 10–20% rev-share band is a placeholder pending terms with Archera.</a:t>
+              <a:t>Illustrative. Reservable share and the blended Archera rate are assumptions; the 45% coverage gap follows the measured 55% median AWS commitment coverage (ProsperOps). The 22% premium is the gap between the 57% a three-year creates and the 35% blended net the customer keeps. Rev-share tiers per Archera's distributor agreement: Bronze 20% (under $100K GRI/GSP MRR), Silver 25% (under $500K), Gold 30% ($1M+) — the base case's ~$119K premium MRR lands in Silver.</a:t>
             </a:r>
             <a:endParaRPr lang="en-US" sz="850" dirty="0"/>
           </a:p>
@@ -25609,7 +25609,7 @@
                 <a:ea typeface="Calibri" pitchFamily="34" charset="-122"/>
                 <a:cs typeface="Calibri" pitchFamily="34" charset="-120"/>
               </a:rPr>
-              <a:t>Rev-share on premiums, billed via AWS Marketplace CPPO.</a:t>
+              <a:t>20–30% tiered rev-share on premiums, billed via AWS Marketplace CPPO.</a:t>
             </a:r>
             <a:endParaRPr lang="en-US" sz="1050" dirty="0"/>
           </a:p>

--- a/decks/Archera-for-Automatum.pptx
+++ b/decks/Archera-for-Automatum.pptx
@@ -25,9 +25,10 @@
     <p:sldId id="273" r:id="rId19"/>
     <p:sldId id="274" r:id="rId20"/>
     <p:sldId id="275" r:id="rId21"/>
+    <p:sldId id="276" r:id="rId22"/>
   </p:sldIdLst>
   <p:notesMasterIdLst>
-    <p:notesMasterId r:id="rId22"/>
+    <p:notesMasterId r:id="rId23"/>
   </p:notesMasterIdLst>
   <p:sldSz cx="12191695" cy="6858000"/>
   <p:notesSz cx="6858000" cy="12191695"/>
@@ -1601,6 +1602,94 @@
             <a:fld id="{F7021451-1387-4CA6-816F-3879F97B5CBC}" type="slidenum">
               <a:rPr lang="en-US"/>
               <a:t>20</a:t>
+            </a:fld>
+            <a:endParaRPr lang="en-US"/>
+          </a:p>
+        </p:txBody>
+      </p:sp>
+    </p:spTree>
+    <p:extLst>
+      <p:ext uri="{BB962C8B-B14F-4D97-AF65-F5344CB8AC3E}">
+        <p14:creationId xmlns:p14="http://schemas.microsoft.com/office/powerpoint/2010/main" val="1024086991"/>
+      </p:ext>
+    </p:extLst>
+  </p:cSld>
+  <p:clrMapOvr>
+    <a:masterClrMapping/>
+  </p:clrMapOvr>
+</p:notes>
+</file>
+
+<file path=ppt/notesSlides/notesSlide21.xml><?xml version="1.0" encoding="utf-8"?>
+<p:notes xmlns:a="http://schemas.openxmlformats.org/drawingml/2006/main" xmlns:r="http://schemas.openxmlformats.org/officeDocument/2006/relationships" xmlns:p="http://schemas.openxmlformats.org/presentationml/2006/main">
+  <p:cSld>
+    <p:spTree>
+      <p:nvGrpSpPr>
+        <p:cNvPr id="1" name=""/>
+        <p:cNvGrpSpPr/>
+        <p:nvPr/>
+      </p:nvGrpSpPr>
+      <p:grpSpPr>
+        <a:xfrm>
+          <a:off x="0" y="0"/>
+          <a:ext cx="0" cy="0"/>
+          <a:chOff x="0" y="0"/>
+          <a:chExt cx="0" cy="0"/>
+        </a:xfrm>
+      </p:grpSpPr>
+      <p:sp>
+        <p:nvSpPr>
+          <p:cNvPr id="2" name="Slide Image Placeholder 1"/>
+          <p:cNvSpPr>
+            <a:spLocks noGrp="1" noRot="1" noChangeAspect="1"/>
+          </p:cNvSpPr>
+          <p:nvPr>
+            <p:ph type="sldImg"/>
+          </p:nvPr>
+        </p:nvSpPr>
+        <p:spPr/>
+      </p:sp>
+      <p:sp>
+        <p:nvSpPr>
+          <p:cNvPr id="3" name="Notes Placeholder 2"/>
+          <p:cNvSpPr>
+            <a:spLocks noGrp="1"/>
+          </p:cNvSpPr>
+          <p:nvPr>
+            <p:ph type="body" idx="1"/>
+          </p:nvPr>
+        </p:nvSpPr>
+        <p:spPr/>
+        <p:txBody>
+          <a:bodyPr/>
+          <a:lstStyle/>
+          <a:p>
+            <a:r>
+              <a:rPr lang="en-US" dirty="0"/>
+              <a:t>The forwardable slide: everything load-bearing in one frame, for the CEO to send to their team without the deck. If only one slide survives the meeting, this is the one it should be.</a:t>
+            </a:r>
+            <a:endParaRPr lang="en-US" dirty="0"/>
+          </a:p>
+        </p:txBody>
+      </p:sp>
+      <p:sp>
+        <p:nvSpPr>
+          <p:cNvPr id="4" name="Slide Number Placeholder 3"/>
+          <p:cNvSpPr>
+            <a:spLocks noGrp="1"/>
+          </p:cNvSpPr>
+          <p:nvPr>
+            <p:ph type="sldNum" sz="quarter" idx="10"/>
+          </p:nvPr>
+        </p:nvSpPr>
+        <p:spPr/>
+        <p:txBody>
+          <a:bodyPr/>
+          <a:lstStyle/>
+          <a:p>
+            <a:fld id="{F7021451-1387-4CA6-816F-3879F97B5CBC}" type="slidenum">
+              <a:rPr lang="en-US"/>
+              <a:t>21</a:t>
             </a:fld>
             <a:endParaRPr lang="en-US"/>
           </a:p>
@@ -8429,7 +8518,7 @@
         <p:spPr>
           <a:xfrm>
             <a:off x="877824" y="2395728"/>
-            <a:ext cx="4797400" cy="493776"/>
+            <a:ext cx="4797400" cy="310896"/>
           </a:xfrm>
           <a:prstGeom prst="rect">
             <a:avLst/>
@@ -8738,7 +8827,7 @@
         <p:spPr>
           <a:xfrm>
             <a:off x="6516472" y="2395728"/>
-            <a:ext cx="4797400" cy="493776"/>
+            <a:ext cx="4797400" cy="310896"/>
           </a:xfrm>
           <a:prstGeom prst="rect">
             <a:avLst/>
@@ -8779,16 +8868,137 @@
         </p:nvSpPr>
         <p:spPr>
           <a:xfrm>
-            <a:off x="6534760" y="3127248"/>
-            <a:ext cx="137160" cy="137160"/>
-          </a:xfrm>
-          <a:prstGeom prst="ellipse">
-            <a:avLst/>
+            <a:off x="6516472" y="2852928"/>
+            <a:ext cx="4797400" cy="457200"/>
+          </a:xfrm>
+          <a:prstGeom prst="roundRect">
+            <a:avLst>
+              <a:gd name="adj" fmla="val 12000"/>
+            </a:avLst>
           </a:prstGeom>
           <a:solidFill>
-            <a:srgbClr val="5566D8"/>
+            <a:srgbClr val="141A4F"/>
           </a:solidFill>
-          <a:ln w="3175">
+          <a:ln w="9525">
+            <a:solidFill>
+              <a:srgbClr val="3D4569"/>
+            </a:solidFill>
+            <a:prstDash val="solid"/>
+          </a:ln>
+        </p:spPr>
+      </p:sp>
+      <p:sp>
+        <p:nvSpPr>
+          <p:cNvPr id="18" name="Text 16"/>
+          <p:cNvSpPr txBox="1"/>
+          <p:nvPr/>
+        </p:nvSpPr>
+        <p:spPr>
+          <a:xfrm>
+            <a:off x="6681064" y="2852928"/>
+            <a:ext cx="4468216" cy="457200"/>
+          </a:xfrm>
+          <a:prstGeom prst="rect">
+            <a:avLst/>
+          </a:prstGeom>
+          <a:noFill/>
+          <a:ln/>
+        </p:spPr>
+        <p:txBody>
+          <a:bodyPr wrap="square" lIns="0" tIns="0" rIns="0" bIns="0" rtlCol="0" anchor="ctr"/>
+          <a:lstStyle/>
+          <a:p>
+            <a:pPr indent="0" marL="0">
+              <a:buNone/>
+            </a:pPr>
+            <a:r>
+              <a:rPr lang="en-US" sz="1150" b="1" dirty="0">
+                <a:solidFill>
+                  <a:srgbClr val="FFFFFF"/>
+                </a:solidFill>
+                <a:latin typeface="Calibri" pitchFamily="34" charset="0"/>
+                <a:ea typeface="Calibri" pitchFamily="34" charset="-122"/>
+                <a:cs typeface="Calibri" pitchFamily="34" charset="-120"/>
+              </a:rPr>
+              <a:t>BRONZE  20%</a:t>
+            </a:r>
+            <a:pPr indent="0" marL="0">
+              <a:buNone/>
+            </a:pPr>
+            <a:r>
+              <a:rPr lang="en-US" sz="950" dirty="0">
+                <a:solidFill>
+                  <a:srgbClr val="AAB2D0"/>
+                </a:solidFill>
+                <a:latin typeface="Calibri" pitchFamily="34" charset="0"/>
+                <a:ea typeface="Calibri" pitchFamily="34" charset="-122"/>
+                <a:cs typeface="Calibri" pitchFamily="34" charset="-120"/>
+              </a:rPr>
+              <a:t>   under $100K MRR</a:t>
+            </a:r>
+            <a:endParaRPr lang="en-US" sz="1150" dirty="0"/>
+          </a:p>
+        </p:txBody>
+      </p:sp>
+      <p:sp>
+        <p:nvSpPr>
+          <p:cNvPr id="19" name="Text 17"/>
+          <p:cNvSpPr txBox="1"/>
+          <p:nvPr/>
+        </p:nvSpPr>
+        <p:spPr>
+          <a:xfrm>
+            <a:off x="6681064" y="2852928"/>
+            <a:ext cx="4303624" cy="457200"/>
+          </a:xfrm>
+          <a:prstGeom prst="rect">
+            <a:avLst/>
+          </a:prstGeom>
+          <a:noFill/>
+          <a:ln/>
+        </p:spPr>
+        <p:txBody>
+          <a:bodyPr wrap="square" lIns="0" tIns="0" rIns="0" bIns="0" rtlCol="0" anchor="ctr"/>
+          <a:lstStyle/>
+          <a:p>
+            <a:pPr algn="r" indent="0" marL="0">
+              <a:buNone/>
+            </a:pPr>
+            <a:r>
+              <a:rPr lang="en-US" sz="850" i="1" dirty="0">
+                <a:solidFill>
+                  <a:srgbClr val="8E96C8"/>
+                </a:solidFill>
+                <a:latin typeface="Calibri" pitchFamily="34" charset="0"/>
+                <a:ea typeface="Calibri" pitchFamily="34" charset="-122"/>
+                <a:cs typeface="Calibri" pitchFamily="34" charset="-120"/>
+              </a:rPr>
+              <a:t>conservative ~$48K MRR</a:t>
+            </a:r>
+            <a:endParaRPr lang="en-US" sz="850" dirty="0"/>
+          </a:p>
+        </p:txBody>
+      </p:sp>
+      <p:sp>
+        <p:nvSpPr>
+          <p:cNvPr id="20" name="Shape 18"/>
+          <p:cNvSpPr/>
+          <p:nvPr/>
+        </p:nvSpPr>
+        <p:spPr>
+          <a:xfrm>
+            <a:off x="6516472" y="3401568"/>
+            <a:ext cx="4797400" cy="457200"/>
+          </a:xfrm>
+          <a:prstGeom prst="roundRect">
+            <a:avLst>
+              <a:gd name="adj" fmla="val 12000"/>
+            </a:avLst>
+          </a:prstGeom>
+          <a:solidFill>
+            <a:srgbClr val="3B4CC0"/>
+          </a:solidFill>
+          <a:ln w="12700">
             <a:solidFill>
               <a:srgbClr val="5566D8"/>
             </a:solidFill>
@@ -8798,41 +9008,52 @@
       </p:sp>
       <p:sp>
         <p:nvSpPr>
-          <p:cNvPr id="18" name="Text 16"/>
-          <p:cNvSpPr txBox="1"/>
-          <p:nvPr/>
-        </p:nvSpPr>
-        <p:spPr>
-          <a:xfrm>
-            <a:off x="6827368" y="2980944"/>
-            <a:ext cx="4486504" cy="512064"/>
-          </a:xfrm>
-          <a:prstGeom prst="rect">
-            <a:avLst/>
-          </a:prstGeom>
-          <a:noFill/>
-          <a:ln/>
-        </p:spPr>
-        <p:txBody>
-          <a:bodyPr wrap="square" lIns="0" tIns="0" rIns="0" bIns="0" rtlCol="0" anchor="ctr"/>
-          <a:lstStyle/>
-          <a:p>
-            <a:pPr indent="0" marL="0">
-              <a:lnSpc>
-                <a:spcPts val="1550"/>
-              </a:lnSpc>
-              <a:buNone/>
-            </a:pPr>
-            <a:r>
-              <a:rPr lang="en-US" sz="1150" dirty="0">
-                <a:solidFill>
-                  <a:srgbClr val="B7C0E0"/>
-                </a:solidFill>
-                <a:latin typeface="Calibri" pitchFamily="34" charset="0"/>
-                <a:ea typeface="Calibri" pitchFamily="34" charset="-122"/>
-                <a:cs typeface="Calibri" pitchFamily="34" charset="-120"/>
-              </a:rPr>
-              <a:t>Bronze 20% under $100K GRI/GSP MRR, Silver 25% under $500K, Gold 30% at $1M+.</a:t>
+          <p:cNvPr id="21" name="Text 19"/>
+          <p:cNvSpPr txBox="1"/>
+          <p:nvPr/>
+        </p:nvSpPr>
+        <p:spPr>
+          <a:xfrm>
+            <a:off x="6681064" y="3401568"/>
+            <a:ext cx="4468216" cy="457200"/>
+          </a:xfrm>
+          <a:prstGeom prst="rect">
+            <a:avLst/>
+          </a:prstGeom>
+          <a:noFill/>
+          <a:ln/>
+        </p:spPr>
+        <p:txBody>
+          <a:bodyPr wrap="square" lIns="0" tIns="0" rIns="0" bIns="0" rtlCol="0" anchor="ctr"/>
+          <a:lstStyle/>
+          <a:p>
+            <a:pPr indent="0" marL="0">
+              <a:buNone/>
+            </a:pPr>
+            <a:r>
+              <a:rPr lang="en-US" sz="1150" b="1" dirty="0">
+                <a:solidFill>
+                  <a:srgbClr val="FFFFFF"/>
+                </a:solidFill>
+                <a:latin typeface="Calibri" pitchFamily="34" charset="0"/>
+                <a:ea typeface="Calibri" pitchFamily="34" charset="-122"/>
+                <a:cs typeface="Calibri" pitchFamily="34" charset="-120"/>
+              </a:rPr>
+              <a:t>SILVER  25%</a:t>
+            </a:r>
+            <a:pPr indent="0" marL="0">
+              <a:buNone/>
+            </a:pPr>
+            <a:r>
+              <a:rPr lang="en-US" sz="950" dirty="0">
+                <a:solidFill>
+                  <a:srgbClr val="C4CBEC"/>
+                </a:solidFill>
+                <a:latin typeface="Calibri" pitchFamily="34" charset="0"/>
+                <a:ea typeface="Calibri" pitchFamily="34" charset="-122"/>
+                <a:cs typeface="Calibri" pitchFamily="34" charset="-120"/>
+              </a:rPr>
+              <a:t>   under $500K</a:t>
             </a:r>
             <a:endParaRPr lang="en-US" sz="1150" dirty="0"/>
           </a:p>
@@ -8840,24 +9061,65 @@
       </p:sp>
       <p:sp>
         <p:nvSpPr>
-          <p:cNvPr id="19" name="Shape 17"/>
+          <p:cNvPr id="22" name="Text 20"/>
+          <p:cNvSpPr txBox="1"/>
+          <p:nvPr/>
+        </p:nvSpPr>
+        <p:spPr>
+          <a:xfrm>
+            <a:off x="6681064" y="3401568"/>
+            <a:ext cx="4303624" cy="457200"/>
+          </a:xfrm>
+          <a:prstGeom prst="rect">
+            <a:avLst/>
+          </a:prstGeom>
+          <a:noFill/>
+          <a:ln/>
+        </p:spPr>
+        <p:txBody>
+          <a:bodyPr wrap="square" lIns="0" tIns="0" rIns="0" bIns="0" rtlCol="0" anchor="ctr"/>
+          <a:lstStyle/>
+          <a:p>
+            <a:pPr algn="r" indent="0" marL="0">
+              <a:buNone/>
+            </a:pPr>
+            <a:r>
+              <a:rPr lang="en-US" sz="850" i="1" dirty="0">
+                <a:solidFill>
+                  <a:srgbClr val="C4CBEC"/>
+                </a:solidFill>
+                <a:latin typeface="Calibri" pitchFamily="34" charset="0"/>
+                <a:ea typeface="Calibri" pitchFamily="34" charset="-122"/>
+                <a:cs typeface="Calibri" pitchFamily="34" charset="-120"/>
+              </a:rPr>
+              <a:t>base ~$119K · optimistic ~$238K</a:t>
+            </a:r>
+            <a:endParaRPr lang="en-US" sz="850" dirty="0"/>
+          </a:p>
+        </p:txBody>
+      </p:sp>
+      <p:sp>
+        <p:nvSpPr>
+          <p:cNvPr id="23" name="Shape 21"/>
           <p:cNvSpPr/>
           <p:nvPr/>
         </p:nvSpPr>
         <p:spPr>
           <a:xfrm>
-            <a:off x="6534760" y="3730752"/>
-            <a:ext cx="137160" cy="137160"/>
-          </a:xfrm>
-          <a:prstGeom prst="ellipse">
-            <a:avLst/>
+            <a:off x="6516472" y="3950208"/>
+            <a:ext cx="4797400" cy="457200"/>
+          </a:xfrm>
+          <a:prstGeom prst="roundRect">
+            <a:avLst>
+              <a:gd name="adj" fmla="val 12000"/>
+            </a:avLst>
           </a:prstGeom>
           <a:solidFill>
-            <a:srgbClr val="5566D8"/>
+            <a:srgbClr val="141A4F"/>
           </a:solidFill>
-          <a:ln w="3175">
+          <a:ln w="9525">
             <a:solidFill>
-              <a:srgbClr val="5566D8"/>
+              <a:srgbClr val="3D4569"/>
             </a:solidFill>
             <a:prstDash val="solid"/>
           </a:ln>
@@ -8865,116 +9127,180 @@
       </p:sp>
       <p:sp>
         <p:nvSpPr>
-          <p:cNvPr id="20" name="Text 18"/>
-          <p:cNvSpPr txBox="1"/>
-          <p:nvPr/>
-        </p:nvSpPr>
-        <p:spPr>
-          <a:xfrm>
-            <a:off x="6827368" y="3584448"/>
-            <a:ext cx="4486504" cy="512064"/>
-          </a:xfrm>
-          <a:prstGeom prst="rect">
-            <a:avLst/>
-          </a:prstGeom>
-          <a:noFill/>
-          <a:ln/>
-        </p:spPr>
-        <p:txBody>
-          <a:bodyPr wrap="square" lIns="0" tIns="0" rIns="0" bIns="0" rtlCol="0" anchor="ctr"/>
+          <p:cNvPr id="24" name="Text 22"/>
+          <p:cNvSpPr txBox="1"/>
+          <p:nvPr/>
+        </p:nvSpPr>
+        <p:spPr>
+          <a:xfrm>
+            <a:off x="6681064" y="3950208"/>
+            <a:ext cx="4468216" cy="457200"/>
+          </a:xfrm>
+          <a:prstGeom prst="rect">
+            <a:avLst/>
+          </a:prstGeom>
+          <a:noFill/>
+          <a:ln/>
+        </p:spPr>
+        <p:txBody>
+          <a:bodyPr wrap="square" lIns="0" tIns="0" rIns="0" bIns="0" rtlCol="0" anchor="ctr"/>
+          <a:lstStyle/>
+          <a:p>
+            <a:pPr indent="0" marL="0">
+              <a:buNone/>
+            </a:pPr>
+            <a:r>
+              <a:rPr lang="en-US" sz="1150" b="1" dirty="0">
+                <a:solidFill>
+                  <a:srgbClr val="FFFFFF"/>
+                </a:solidFill>
+                <a:latin typeface="Calibri" pitchFamily="34" charset="0"/>
+                <a:ea typeface="Calibri" pitchFamily="34" charset="-122"/>
+                <a:cs typeface="Calibri" pitchFamily="34" charset="-120"/>
+              </a:rPr>
+              <a:t>GOLD  30%</a:t>
+            </a:r>
+            <a:pPr indent="0" marL="0">
+              <a:buNone/>
+            </a:pPr>
+            <a:r>
+              <a:rPr lang="en-US" sz="950" dirty="0">
+                <a:solidFill>
+                  <a:srgbClr val="AAB2D0"/>
+                </a:solidFill>
+                <a:latin typeface="Calibri" pitchFamily="34" charset="0"/>
+                <a:ea typeface="Calibri" pitchFamily="34" charset="-122"/>
+                <a:cs typeface="Calibri" pitchFamily="34" charset="-120"/>
+              </a:rPr>
+              <a:t>   $1M+ MRR</a:t>
+            </a:r>
+            <a:endParaRPr lang="en-US" sz="1150" dirty="0"/>
+          </a:p>
+        </p:txBody>
+      </p:sp>
+      <p:sp>
+        <p:nvSpPr>
+          <p:cNvPr id="25" name="Text 23"/>
+          <p:cNvSpPr txBox="1"/>
+          <p:nvPr/>
+        </p:nvSpPr>
+        <p:spPr>
+          <a:xfrm>
+            <a:off x="6681064" y="3950208"/>
+            <a:ext cx="4303624" cy="457200"/>
+          </a:xfrm>
+          <a:prstGeom prst="rect">
+            <a:avLst/>
+          </a:prstGeom>
+          <a:noFill/>
+          <a:ln/>
+        </p:spPr>
+        <p:txBody>
+          <a:bodyPr wrap="square" lIns="0" tIns="0" rIns="0" bIns="0" rtlCol="0" anchor="ctr"/>
+          <a:lstStyle/>
+          <a:p>
+            <a:pPr algn="r" indent="0" marL="0">
+              <a:buNone/>
+            </a:pPr>
+            <a:r>
+              <a:rPr lang="en-US" sz="850" i="1" dirty="0">
+                <a:solidFill>
+                  <a:srgbClr val="8E96C8"/>
+                </a:solidFill>
+                <a:latin typeface="Calibri" pitchFamily="34" charset="0"/>
+                <a:ea typeface="Calibri" pitchFamily="34" charset="-122"/>
+                <a:cs typeface="Calibri" pitchFamily="34" charset="-120"/>
+              </a:rPr>
+              <a:t>a multi-year ambition</a:t>
+            </a:r>
+            <a:endParaRPr lang="en-US" sz="850" dirty="0"/>
+          </a:p>
+        </p:txBody>
+      </p:sp>
+      <p:sp>
+        <p:nvSpPr>
+          <p:cNvPr id="26" name="Text 24"/>
+          <p:cNvSpPr txBox="1"/>
+          <p:nvPr/>
+        </p:nvSpPr>
+        <p:spPr>
+          <a:xfrm>
+            <a:off x="6516472" y="4535424"/>
+            <a:ext cx="4797400" cy="256032"/>
+          </a:xfrm>
+          <a:prstGeom prst="rect">
+            <a:avLst/>
+          </a:prstGeom>
+          <a:noFill/>
+          <a:ln/>
+        </p:spPr>
+        <p:txBody>
+          <a:bodyPr wrap="square" lIns="0" tIns="0" rIns="0" bIns="0" rtlCol="0" anchor="ctr"/>
+          <a:lstStyle/>
+          <a:p>
+            <a:pPr indent="0" marL="0">
+              <a:buNone/>
+            </a:pPr>
+            <a:r>
+              <a:rPr lang="en-US" sz="1000" dirty="0">
+                <a:solidFill>
+                  <a:srgbClr val="B7C0E0"/>
+                </a:solidFill>
+                <a:latin typeface="Calibri" pitchFamily="34" charset="0"/>
+                <a:ea typeface="Calibri" pitchFamily="34" charset="-122"/>
+                <a:cs typeface="Calibri" pitchFamily="34" charset="-120"/>
+              </a:rPr>
+              <a:t>Automatum runs the motion with joint GTM support; Archera provides Tier-2 support.</a:t>
+            </a:r>
+            <a:endParaRPr lang="en-US" sz="1000" dirty="0"/>
+          </a:p>
+        </p:txBody>
+      </p:sp>
+      <p:sp>
+        <p:nvSpPr>
+          <p:cNvPr id="27" name="Text 25"/>
+          <p:cNvSpPr txBox="1"/>
+          <p:nvPr/>
+        </p:nvSpPr>
+        <p:spPr>
+          <a:xfrm>
+            <a:off x="566928" y="6089904"/>
+            <a:ext cx="11057839" cy="274320"/>
+          </a:xfrm>
+          <a:prstGeom prst="rect">
+            <a:avLst/>
+          </a:prstGeom>
+          <a:noFill/>
+          <a:ln/>
+        </p:spPr>
+        <p:txBody>
+          <a:bodyPr wrap="square" lIns="0" tIns="0" rIns="0" bIns="0" rtlCol="0" anchor="t"/>
           <a:lstStyle/>
           <a:p>
             <a:pPr indent="0" marL="0">
               <a:lnSpc>
-                <a:spcPts val="1550"/>
+                <a:spcPts val="1100"/>
               </a:lnSpc>
               <a:buNone/>
             </a:pPr>
             <a:r>
-              <a:rPr lang="en-US" sz="1150" dirty="0">
-                <a:solidFill>
-                  <a:srgbClr val="B7C0E0"/>
-                </a:solidFill>
-                <a:latin typeface="Calibri" pitchFamily="34" charset="0"/>
-                <a:ea typeface="Calibri" pitchFamily="34" charset="-122"/>
-                <a:cs typeface="Calibri" pitchFamily="34" charset="-120"/>
-              </a:rPr>
-              <a:t>Automatum runs the motion with joint GTM support; Archera provides Tier-2 support.</a:t>
-            </a:r>
-            <a:endParaRPr lang="en-US" sz="1150" dirty="0"/>
-          </a:p>
-        </p:txBody>
-      </p:sp>
-      <p:sp>
-        <p:nvSpPr>
-          <p:cNvPr id="21" name="Shape 19"/>
-          <p:cNvSpPr/>
-          <p:nvPr/>
-        </p:nvSpPr>
-        <p:spPr>
-          <a:xfrm>
-            <a:off x="6534760" y="4334256"/>
-            <a:ext cx="137160" cy="137160"/>
-          </a:xfrm>
-          <a:prstGeom prst="ellipse">
-            <a:avLst/>
-          </a:prstGeom>
-          <a:solidFill>
-            <a:srgbClr val="5566D8"/>
-          </a:solidFill>
-          <a:ln w="3175">
-            <a:solidFill>
-              <a:srgbClr val="5566D8"/>
-            </a:solidFill>
-            <a:prstDash val="solid"/>
-          </a:ln>
-        </p:spPr>
-      </p:sp>
-      <p:sp>
-        <p:nvSpPr>
-          <p:cNvPr id="22" name="Text 20"/>
-          <p:cNvSpPr txBox="1"/>
-          <p:nvPr/>
-        </p:nvSpPr>
-        <p:spPr>
-          <a:xfrm>
-            <a:off x="6827368" y="4187952"/>
-            <a:ext cx="4486504" cy="512064"/>
-          </a:xfrm>
-          <a:prstGeom prst="rect">
-            <a:avLst/>
-          </a:prstGeom>
-          <a:noFill/>
-          <a:ln/>
-        </p:spPr>
-        <p:txBody>
-          <a:bodyPr wrap="square" lIns="0" tIns="0" rIns="0" bIns="0" rtlCol="0" anchor="ctr"/>
-          <a:lstStyle/>
-          <a:p>
-            <a:pPr indent="0" marL="0">
-              <a:lnSpc>
-                <a:spcPts val="1550"/>
-              </a:lnSpc>
-              <a:buNone/>
-            </a:pPr>
-            <a:r>
-              <a:rPr lang="en-US" sz="1150" dirty="0">
-                <a:solidFill>
-                  <a:srgbClr val="B7C0E0"/>
-                </a:solidFill>
-                <a:latin typeface="Calibri" pitchFamily="34" charset="0"/>
-                <a:ea typeface="Calibri" pitchFamily="34" charset="-122"/>
-                <a:cs typeface="Calibri" pitchFamily="34" charset="-120"/>
-              </a:rPr>
-              <a:t>The rails — CPPO, metering, the Partner Portal — are on the next slide.</a:t>
-            </a:r>
-            <a:endParaRPr lang="en-US" sz="1150" dirty="0"/>
-          </a:p>
-        </p:txBody>
-      </p:sp>
-      <p:sp>
-        <p:nvSpPr>
-          <p:cNvPr id="23" name="Shape 21"/>
+              <a:rPr lang="en-US" sz="850" i="1" dirty="0">
+                <a:solidFill>
+                  <a:srgbClr val="5B6486"/>
+                </a:solidFill>
+                <a:latin typeface="Calibri" pitchFamily="34" charset="0"/>
+                <a:ea typeface="Calibri" pitchFamily="34" charset="-122"/>
+                <a:cs typeface="Calibri" pitchFamily="34" charset="-120"/>
+              </a:rPr>
+              <a:t>Tier bands measured on commitment MRR — Archera's GRI/GSP (Guaranteed RI and Savings Plan) revenue across the partner's book. Scenario placements per the slide 6 model (premium pool ÷ 12).</a:t>
+            </a:r>
+            <a:endParaRPr lang="en-US" sz="850" dirty="0"/>
+          </a:p>
+        </p:txBody>
+      </p:sp>
+      <p:sp>
+        <p:nvSpPr>
+          <p:cNvPr id="28" name="Shape 26"/>
           <p:cNvSpPr/>
           <p:nvPr/>
         </p:nvSpPr>
@@ -9001,7 +9327,7 @@
       </p:sp>
       <p:sp>
         <p:nvSpPr>
-          <p:cNvPr id="24" name="Text 22"/>
+          <p:cNvPr id="29" name="Text 27"/>
           <p:cNvSpPr txBox="1"/>
           <p:nvPr/>
         </p:nvSpPr>
@@ -9060,7 +9386,7 @@
       </p:sp>
       <p:sp>
         <p:nvSpPr>
-          <p:cNvPr id="25" name="Text 23"/>
+          <p:cNvPr id="30" name="Text 28"/>
           <p:cNvSpPr txBox="1"/>
           <p:nvPr/>
         </p:nvSpPr>
@@ -9099,7 +9425,7 @@
       </p:sp>
       <p:sp>
         <p:nvSpPr>
-          <p:cNvPr id="26" name="Text 24"/>
+          <p:cNvPr id="31" name="Text 29"/>
           <p:cNvSpPr txBox="1"/>
           <p:nvPr/>
         </p:nvSpPr>
@@ -10401,9 +10727,9 @@
           <a:solidFill>
             <a:srgbClr val="141A4F"/>
           </a:solidFill>
-          <a:ln w="9525">
+          <a:ln w="12700">
             <a:solidFill>
-              <a:srgbClr val="3D4569"/>
+              <a:srgbClr val="F5A623"/>
             </a:solidFill>
             <a:prstDash val="solid"/>
           </a:ln>
@@ -10431,20 +10757,26 @@
           <a:lstStyle/>
           <a:p>
             <a:pPr indent="0" marL="0">
+              <a:lnSpc>
+                <a:spcPts val="1700"/>
+              </a:lnSpc>
               <a:buNone/>
             </a:pPr>
             <a:r>
               <a:rPr lang="en-US" sz="1200" b="1" dirty="0">
                 <a:solidFill>
-                  <a:srgbClr val="FFFFFF"/>
-                </a:solidFill>
-                <a:latin typeface="Calibri" pitchFamily="34" charset="0"/>
-                <a:ea typeface="Calibri" pitchFamily="34" charset="-122"/>
-                <a:cs typeface="Calibri" pitchFamily="34" charset="-120"/>
-              </a:rPr>
-              <a:t>For the ISV, the charge is marketplace spend. </a:t>
-            </a:r>
-            <a:pPr indent="0" marL="0">
+                  <a:srgbClr val="F5A623"/>
+                </a:solidFill>
+                <a:latin typeface="Calibri" pitchFamily="34" charset="0"/>
+                <a:ea typeface="Calibri" pitchFamily="34" charset="-122"/>
+                <a:cs typeface="Calibri" pitchFamily="34" charset="-120"/>
+              </a:rPr>
+              <a:t>Rev-share counts net-new Archera customers only. </a:t>
+            </a:r>
+            <a:pPr indent="0" marL="0">
+              <a:lnSpc>
+                <a:spcPts val="1700"/>
+              </a:lnSpc>
               <a:buNone/>
             </a:pPr>
             <a:r>
@@ -10456,7 +10788,7 @@
                 <a:ea typeface="Calibri" pitchFamily="34" charset="-122"/>
                 <a:cs typeface="Calibri" pitchFamily="34" charset="-120"/>
               </a:rPr>
-              <a:t>It consolidates onto the AWS invoice and draws down committed spend they were going to burn anyway.</a:t>
+              <a:t>Every ISV Archera signs directly first is permanently off Automatum's rev-share — the strongest argument for moving first. For the ISV, the charge is simply marketplace spend on the AWS invoice.</a:t>
             </a:r>
             <a:endParaRPr lang="en-US" sz="1200" dirty="0"/>
           </a:p>
@@ -14801,6 +15133,48 @@
         </p:nvSpPr>
         <p:spPr>
           <a:xfrm>
+            <a:off x="566928" y="6181344"/>
+            <a:ext cx="11057839" cy="274320"/>
+          </a:xfrm>
+          <a:prstGeom prst="rect">
+            <a:avLst/>
+          </a:prstGeom>
+          <a:noFill/>
+          <a:ln/>
+        </p:spPr>
+        <p:txBody>
+          <a:bodyPr wrap="square" lIns="0" tIns="0" rIns="0" bIns="0" rtlCol="0" anchor="t"/>
+          <a:lstStyle/>
+          <a:p>
+            <a:pPr indent="0" marL="0">
+              <a:lnSpc>
+                <a:spcPts val="1100"/>
+              </a:lnSpc>
+              <a:buNone/>
+            </a:pPr>
+            <a:r>
+              <a:rPr lang="en-US" sz="850" i="1" dirty="0">
+                <a:solidFill>
+                  <a:srgbClr val="5B6486"/>
+                </a:solidFill>
+                <a:latin typeface="Calibri" pitchFamily="34" charset="0"/>
+                <a:ea typeface="Calibri" pitchFamily="34" charset="-122"/>
+                <a:cs typeface="Calibri" pitchFamily="34" charset="-120"/>
+              </a:rPr>
+              <a:t>Also review the agreement's term before signing: it auto-renews in 18-month cycles unless terminated with at least six months' written notice, under Delaware law.</a:t>
+            </a:r>
+            <a:endParaRPr lang="en-US" sz="850" dirty="0"/>
+          </a:p>
+        </p:txBody>
+      </p:sp>
+      <p:sp>
+        <p:nvSpPr>
+          <p:cNvPr id="21" name="Text 19"/>
+          <p:cNvSpPr txBox="1"/>
+          <p:nvPr/>
+        </p:nvSpPr>
+        <p:spPr>
+          <a:xfrm>
             <a:off x="566928" y="6345936"/>
             <a:ext cx="4572000" cy="256032"/>
           </a:xfrm>
@@ -14834,7 +15208,7 @@
       </p:sp>
       <p:sp>
         <p:nvSpPr>
-          <p:cNvPr id="21" name="Text 19"/>
+          <p:cNvPr id="22" name="Text 20"/>
           <p:cNvSpPr txBox="1"/>
           <p:nvPr/>
         </p:nvSpPr>
@@ -17763,6 +18137,1976 @@
 </p:sld>
 </file>
 
+<file path=ppt/slides/slide21.xml><?xml version="1.0" encoding="utf-8"?>
+<p:sld xmlns:a="http://schemas.openxmlformats.org/drawingml/2006/main" xmlns:r="http://schemas.openxmlformats.org/officeDocument/2006/relationships" xmlns:p="http://schemas.openxmlformats.org/presentationml/2006/main">
+  <p:cSld name="Slide 21">
+    <p:bg>
+      <p:bgPr>
+        <a:solidFill>
+          <a:srgbClr val="05060F"/>
+        </a:solidFill>
+      </p:bgPr>
+    </p:bg>
+    <p:spTree>
+      <p:nvGrpSpPr>
+        <p:cNvPr id="1" name=""/>
+        <p:cNvGrpSpPr/>
+        <p:nvPr/>
+      </p:nvGrpSpPr>
+      <p:grpSpPr>
+        <a:xfrm>
+          <a:off x="0" y="0"/>
+          <a:ext cx="0" cy="0"/>
+          <a:chOff x="0" y="0"/>
+          <a:chExt cx="0" cy="0"/>
+        </a:xfrm>
+      </p:grpSpPr>
+      <p:sp>
+        <p:nvSpPr>
+          <p:cNvPr id="2" name="Text 0"/>
+          <p:cNvSpPr txBox="1"/>
+          <p:nvPr/>
+        </p:nvSpPr>
+        <p:spPr>
+          <a:xfrm>
+            <a:off x="566928" y="365760"/>
+            <a:ext cx="11057839" cy="237744"/>
+          </a:xfrm>
+          <a:prstGeom prst="rect">
+            <a:avLst/>
+          </a:prstGeom>
+          <a:noFill/>
+          <a:ln/>
+        </p:spPr>
+        <p:txBody>
+          <a:bodyPr wrap="square" lIns="0" tIns="0" rIns="0" bIns="0" rtlCol="0" anchor="ctr"/>
+          <a:lstStyle/>
+          <a:p>
+            <a:pPr indent="0" marL="0">
+              <a:buNone/>
+            </a:pPr>
+            <a:r>
+              <a:rPr lang="en-US" sz="1000" b="1" spc="260" kern="0" dirty="0">
+                <a:solidFill>
+                  <a:srgbClr val="19C6E6"/>
+                </a:solidFill>
+                <a:latin typeface="Calibri" pitchFamily="34" charset="0"/>
+                <a:ea typeface="Calibri" pitchFamily="34" charset="-122"/>
+                <a:cs typeface="Calibri" pitchFamily="34" charset="-120"/>
+              </a:rPr>
+              <a:t>SEND THIS ON</a:t>
+            </a:r>
+            <a:endParaRPr lang="en-US" sz="1000" dirty="0"/>
+          </a:p>
+        </p:txBody>
+      </p:sp>
+      <p:sp>
+        <p:nvSpPr>
+          <p:cNvPr id="3" name="Text 1"/>
+          <p:cNvSpPr txBox="1"/>
+          <p:nvPr/>
+        </p:nvSpPr>
+        <p:spPr>
+          <a:xfrm>
+            <a:off x="566928" y="658368"/>
+            <a:ext cx="11057839" cy="457200"/>
+          </a:xfrm>
+          <a:prstGeom prst="rect">
+            <a:avLst/>
+          </a:prstGeom>
+          <a:noFill/>
+          <a:ln/>
+        </p:spPr>
+        <p:txBody>
+          <a:bodyPr wrap="square" lIns="0" tIns="0" rIns="0" bIns="0" rtlCol="0" anchor="t"/>
+          <a:lstStyle/>
+          <a:p>
+            <a:pPr indent="0" marL="0">
+              <a:lnSpc>
+                <a:spcPts val="3400"/>
+              </a:lnSpc>
+              <a:buNone/>
+            </a:pPr>
+            <a:r>
+              <a:rPr lang="en-US" sz="2600" b="1" dirty="0">
+                <a:solidFill>
+                  <a:srgbClr val="FFFFFF"/>
+                </a:solidFill>
+                <a:latin typeface="Calibri" pitchFamily="34" charset="0"/>
+                <a:ea typeface="Calibri" pitchFamily="34" charset="-122"/>
+                <a:cs typeface="Calibri" pitchFamily="34" charset="-120"/>
+              </a:rPr>
+              <a:t>Archera × Automatum, in one frame.</a:t>
+            </a:r>
+            <a:endParaRPr lang="en-US" sz="2600" dirty="0"/>
+          </a:p>
+        </p:txBody>
+      </p:sp>
+      <p:sp>
+        <p:nvSpPr>
+          <p:cNvPr id="4" name="Text 2"/>
+          <p:cNvSpPr txBox="1"/>
+          <p:nvPr/>
+        </p:nvSpPr>
+        <p:spPr>
+          <a:xfrm>
+            <a:off x="566928" y="1133856"/>
+            <a:ext cx="7315200" cy="548640"/>
+          </a:xfrm>
+          <a:prstGeom prst="rect">
+            <a:avLst/>
+          </a:prstGeom>
+          <a:noFill/>
+          <a:ln/>
+        </p:spPr>
+        <p:txBody>
+          <a:bodyPr wrap="square" lIns="0" tIns="0" rIns="0" bIns="0" rtlCol="0" anchor="t"/>
+          <a:lstStyle/>
+          <a:p>
+            <a:pPr indent="0" marL="0">
+              <a:lnSpc>
+                <a:spcPts val="1900"/>
+              </a:lnSpc>
+              <a:buNone/>
+            </a:pPr>
+            <a:r>
+              <a:rPr lang="en-US" sz="1200" dirty="0">
+                <a:solidFill>
+                  <a:srgbClr val="B7C0E0"/>
+                </a:solidFill>
+                <a:latin typeface="Calibri" pitchFamily="34" charset="0"/>
+                <a:ea typeface="Calibri" pitchFamily="34" charset="-122"/>
+                <a:cs typeface="Calibri" pitchFamily="34" charset="-120"/>
+              </a:rPr>
+              <a:t>The whole argument, for whoever was not in the room.</a:t>
+            </a:r>
+            <a:endParaRPr lang="en-US" sz="1200" dirty="0"/>
+          </a:p>
+        </p:txBody>
+      </p:sp>
+      <p:sp>
+        <p:nvSpPr>
+          <p:cNvPr id="5" name="Shape 3"/>
+          <p:cNvSpPr/>
+          <p:nvPr/>
+        </p:nvSpPr>
+        <p:spPr>
+          <a:xfrm>
+            <a:off x="566928" y="1627632"/>
+            <a:ext cx="3551834" cy="4169664"/>
+          </a:xfrm>
+          <a:prstGeom prst="roundRect">
+            <a:avLst>
+              <a:gd name="adj" fmla="val 1802"/>
+            </a:avLst>
+          </a:prstGeom>
+          <a:solidFill>
+            <a:srgbClr val="141A4F"/>
+          </a:solidFill>
+          <a:ln w="9525">
+            <a:solidFill>
+              <a:srgbClr val="3D4569"/>
+            </a:solidFill>
+            <a:prstDash val="solid"/>
+          </a:ln>
+        </p:spPr>
+      </p:sp>
+      <p:sp>
+        <p:nvSpPr>
+          <p:cNvPr id="6" name="Text 4"/>
+          <p:cNvSpPr txBox="1"/>
+          <p:nvPr/>
+        </p:nvSpPr>
+        <p:spPr>
+          <a:xfrm>
+            <a:off x="822960" y="1810512"/>
+            <a:ext cx="3039770" cy="201168"/>
+          </a:xfrm>
+          <a:prstGeom prst="rect">
+            <a:avLst/>
+          </a:prstGeom>
+          <a:noFill/>
+          <a:ln/>
+        </p:spPr>
+        <p:txBody>
+          <a:bodyPr wrap="square" lIns="0" tIns="0" rIns="0" bIns="0" rtlCol="0" anchor="ctr"/>
+          <a:lstStyle/>
+          <a:p>
+            <a:pPr indent="0" marL="0">
+              <a:buNone/>
+            </a:pPr>
+            <a:r>
+              <a:rPr lang="en-US" sz="900" b="1" spc="200" kern="0" dirty="0">
+                <a:solidFill>
+                  <a:srgbClr val="5566D8"/>
+                </a:solidFill>
+                <a:latin typeface="Calibri" pitchFamily="34" charset="0"/>
+                <a:ea typeface="Calibri" pitchFamily="34" charset="-122"/>
+                <a:cs typeface="Calibri" pitchFamily="34" charset="-120"/>
+              </a:rPr>
+              <a:t>THE STRUCTURE</a:t>
+            </a:r>
+            <a:endParaRPr lang="en-US" sz="900" dirty="0"/>
+          </a:p>
+        </p:txBody>
+      </p:sp>
+      <p:sp>
+        <p:nvSpPr>
+          <p:cNvPr id="7" name="Text 5"/>
+          <p:cNvSpPr txBox="1"/>
+          <p:nvPr/>
+        </p:nvSpPr>
+        <p:spPr>
+          <a:xfrm>
+            <a:off x="822960" y="2084832"/>
+            <a:ext cx="3039770" cy="566928"/>
+          </a:xfrm>
+          <a:prstGeom prst="rect">
+            <a:avLst/>
+          </a:prstGeom>
+          <a:noFill/>
+          <a:ln/>
+        </p:spPr>
+        <p:txBody>
+          <a:bodyPr wrap="square" lIns="0" tIns="0" rIns="0" bIns="0" rtlCol="0" anchor="t"/>
+          <a:lstStyle/>
+          <a:p>
+            <a:pPr indent="0" marL="0">
+              <a:lnSpc>
+                <a:spcPts val="1350"/>
+              </a:lnSpc>
+              <a:buNone/>
+            </a:pPr>
+            <a:r>
+              <a:rPr lang="en-US" sz="1000" dirty="0">
+                <a:solidFill>
+                  <a:srgbClr val="B7C0E0"/>
+                </a:solidFill>
+                <a:latin typeface="Calibri" pitchFamily="34" charset="0"/>
+                <a:ea typeface="Calibri" pitchFamily="34" charset="-122"/>
+                <a:cs typeface="Calibri" pitchFamily="34" charset="-120"/>
+              </a:rPr>
+              <a:t>A native 3-year RI or Savings Plan, bought into the customer's own payer account.</a:t>
+            </a:r>
+            <a:endParaRPr lang="en-US" sz="1000" dirty="0"/>
+          </a:p>
+        </p:txBody>
+      </p:sp>
+      <p:sp>
+        <p:nvSpPr>
+          <p:cNvPr id="8" name="Text 6"/>
+          <p:cNvSpPr txBox="1"/>
+          <p:nvPr/>
+        </p:nvSpPr>
+        <p:spPr>
+          <a:xfrm>
+            <a:off x="822960" y="2688336"/>
+            <a:ext cx="3039770" cy="566928"/>
+          </a:xfrm>
+          <a:prstGeom prst="rect">
+            <a:avLst/>
+          </a:prstGeom>
+          <a:noFill/>
+          <a:ln/>
+        </p:spPr>
+        <p:txBody>
+          <a:bodyPr wrap="square" lIns="0" tIns="0" rIns="0" bIns="0" rtlCol="0" anchor="t"/>
+          <a:lstStyle/>
+          <a:p>
+            <a:pPr indent="0" marL="0">
+              <a:lnSpc>
+                <a:spcPts val="1350"/>
+              </a:lnSpc>
+              <a:buNone/>
+            </a:pPr>
+            <a:r>
+              <a:rPr lang="en-US" sz="1000" dirty="0">
+                <a:solidFill>
+                  <a:srgbClr val="B7C0E0"/>
+                </a:solidFill>
+                <a:latin typeface="Calibri" pitchFamily="34" charset="0"/>
+                <a:ea typeface="Calibri" pitchFamily="34" charset="-122"/>
+                <a:cs typeface="Calibri" pitchFamily="34" charset="-120"/>
+              </a:rPr>
+              <a:t>Their obligation: 30 days or 12 months. Archera carries the balance; AWS bills them directly.</a:t>
+            </a:r>
+            <a:endParaRPr lang="en-US" sz="1000" dirty="0"/>
+          </a:p>
+        </p:txBody>
+      </p:sp>
+      <p:sp>
+        <p:nvSpPr>
+          <p:cNvPr id="9" name="Text 7"/>
+          <p:cNvSpPr txBox="1"/>
+          <p:nvPr/>
+        </p:nvSpPr>
+        <p:spPr>
+          <a:xfrm>
+            <a:off x="822960" y="3291840"/>
+            <a:ext cx="3039770" cy="566928"/>
+          </a:xfrm>
+          <a:prstGeom prst="rect">
+            <a:avLst/>
+          </a:prstGeom>
+          <a:noFill/>
+          <a:ln/>
+        </p:spPr>
+        <p:txBody>
+          <a:bodyPr wrap="square" lIns="0" tIns="0" rIns="0" bIns="0" rtlCol="0" anchor="t"/>
+          <a:lstStyle/>
+          <a:p>
+            <a:pPr indent="0" marL="0">
+              <a:lnSpc>
+                <a:spcPts val="1350"/>
+              </a:lnSpc>
+              <a:buNone/>
+            </a:pPr>
+            <a:r>
+              <a:rPr lang="en-US" sz="1000" dirty="0">
+                <a:solidFill>
+                  <a:srgbClr val="B7C0E0"/>
+                </a:solidFill>
+                <a:latin typeface="Calibri" pitchFamily="34" charset="0"/>
+                <a:ea typeface="Calibri" pitchFamily="34" charset="-122"/>
+                <a:cs typeface="Calibri" pitchFamily="34" charset="-120"/>
+              </a:rPr>
+              <a:t>Fee: 50% of the created saving on the 30-day term, 25% on the 1-year. No savings, no fee.</a:t>
+            </a:r>
+            <a:endParaRPr lang="en-US" sz="1000" dirty="0"/>
+          </a:p>
+        </p:txBody>
+      </p:sp>
+      <p:sp>
+        <p:nvSpPr>
+          <p:cNvPr id="10" name="Text 8"/>
+          <p:cNvSpPr txBox="1"/>
+          <p:nvPr/>
+        </p:nvSpPr>
+        <p:spPr>
+          <a:xfrm>
+            <a:off x="822960" y="4023360"/>
+            <a:ext cx="1325880" cy="292608"/>
+          </a:xfrm>
+          <a:prstGeom prst="rect">
+            <a:avLst/>
+          </a:prstGeom>
+          <a:noFill/>
+          <a:ln/>
+        </p:spPr>
+        <p:txBody>
+          <a:bodyPr wrap="square" lIns="0" tIns="0" rIns="0" bIns="0" rtlCol="0" anchor="ctr"/>
+          <a:lstStyle/>
+          <a:p>
+            <a:pPr indent="0" marL="0">
+              <a:buNone/>
+            </a:pPr>
+            <a:r>
+              <a:rPr lang="en-US" sz="950" dirty="0">
+                <a:solidFill>
+                  <a:srgbClr val="AAB2D0"/>
+                </a:solidFill>
+                <a:latin typeface="Calibri" pitchFamily="34" charset="0"/>
+                <a:ea typeface="Calibri" pitchFamily="34" charset="-122"/>
+                <a:cs typeface="Calibri" pitchFamily="34" charset="-120"/>
+              </a:rPr>
+              <a:t>Pay as you go</a:t>
+            </a:r>
+            <a:endParaRPr lang="en-US" sz="950" dirty="0"/>
+          </a:p>
+        </p:txBody>
+      </p:sp>
+      <p:sp>
+        <p:nvSpPr>
+          <p:cNvPr id="11" name="Shape 9"/>
+          <p:cNvSpPr/>
+          <p:nvPr/>
+        </p:nvSpPr>
+        <p:spPr>
+          <a:xfrm>
+            <a:off x="2194560" y="4123944"/>
+            <a:ext cx="1005840" cy="91440"/>
+          </a:xfrm>
+          <a:prstGeom prst="rect">
+            <a:avLst/>
+          </a:prstGeom>
+          <a:solidFill>
+            <a:srgbClr val="1E2668"/>
+          </a:solidFill>
+          <a:ln w="3175">
+            <a:solidFill>
+              <a:srgbClr val="1E2668"/>
+            </a:solidFill>
+            <a:prstDash val="solid"/>
+          </a:ln>
+        </p:spPr>
+      </p:sp>
+      <p:sp>
+        <p:nvSpPr>
+          <p:cNvPr id="12" name="Text 10"/>
+          <p:cNvSpPr txBox="1"/>
+          <p:nvPr/>
+        </p:nvSpPr>
+        <p:spPr>
+          <a:xfrm>
+            <a:off x="3273552" y="4023360"/>
+            <a:ext cx="717194" cy="292608"/>
+          </a:xfrm>
+          <a:prstGeom prst="rect">
+            <a:avLst/>
+          </a:prstGeom>
+          <a:noFill/>
+          <a:ln/>
+        </p:spPr>
+        <p:txBody>
+          <a:bodyPr wrap="square" lIns="0" tIns="0" rIns="0" bIns="0" rtlCol="0" anchor="ctr"/>
+          <a:lstStyle/>
+          <a:p>
+            <a:pPr indent="0" marL="0">
+              <a:buNone/>
+            </a:pPr>
+            <a:r>
+              <a:rPr lang="en-US" sz="950" b="1" dirty="0">
+                <a:solidFill>
+                  <a:srgbClr val="AAB2D0"/>
+                </a:solidFill>
+                <a:latin typeface="Calibri" pitchFamily="34" charset="0"/>
+                <a:ea typeface="Calibri" pitchFamily="34" charset="-122"/>
+                <a:cs typeface="Calibri" pitchFamily="34" charset="-120"/>
+              </a:rPr>
+              <a:t>0%</a:t>
+            </a:r>
+            <a:endParaRPr lang="en-US" sz="950" dirty="0"/>
+          </a:p>
+        </p:txBody>
+      </p:sp>
+      <p:sp>
+        <p:nvSpPr>
+          <p:cNvPr id="13" name="Text 11"/>
+          <p:cNvSpPr txBox="1"/>
+          <p:nvPr/>
+        </p:nvSpPr>
+        <p:spPr>
+          <a:xfrm>
+            <a:off x="822960" y="4361688"/>
+            <a:ext cx="1325880" cy="292608"/>
+          </a:xfrm>
+          <a:prstGeom prst="rect">
+            <a:avLst/>
+          </a:prstGeom>
+          <a:noFill/>
+          <a:ln/>
+        </p:spPr>
+        <p:txBody>
+          <a:bodyPr wrap="square" lIns="0" tIns="0" rIns="0" bIns="0" rtlCol="0" anchor="ctr"/>
+          <a:lstStyle/>
+          <a:p>
+            <a:pPr indent="0" marL="0">
+              <a:buNone/>
+            </a:pPr>
+            <a:r>
+              <a:rPr lang="en-US" sz="950" b="1" dirty="0">
+                <a:solidFill>
+                  <a:srgbClr val="FFFFFF"/>
+                </a:solidFill>
+                <a:latin typeface="Calibri" pitchFamily="34" charset="0"/>
+                <a:ea typeface="Calibri" pitchFamily="34" charset="-122"/>
+                <a:cs typeface="Calibri" pitchFamily="34" charset="-120"/>
+              </a:rPr>
+              <a:t>Archera 30-day</a:t>
+            </a:r>
+            <a:endParaRPr lang="en-US" sz="950" dirty="0"/>
+          </a:p>
+        </p:txBody>
+      </p:sp>
+      <p:sp>
+        <p:nvSpPr>
+          <p:cNvPr id="14" name="Shape 12"/>
+          <p:cNvSpPr/>
+          <p:nvPr/>
+        </p:nvSpPr>
+        <p:spPr>
+          <a:xfrm>
+            <a:off x="2194560" y="4462272"/>
+            <a:ext cx="1005840" cy="91440"/>
+          </a:xfrm>
+          <a:prstGeom prst="rect">
+            <a:avLst/>
+          </a:prstGeom>
+          <a:solidFill>
+            <a:srgbClr val="1E2668"/>
+          </a:solidFill>
+          <a:ln w="3175">
+            <a:solidFill>
+              <a:srgbClr val="1E2668"/>
+            </a:solidFill>
+            <a:prstDash val="solid"/>
+          </a:ln>
+        </p:spPr>
+      </p:sp>
+      <p:sp>
+        <p:nvSpPr>
+          <p:cNvPr id="15" name="Shape 13"/>
+          <p:cNvSpPr/>
+          <p:nvPr/>
+        </p:nvSpPr>
+        <p:spPr>
+          <a:xfrm>
+            <a:off x="2194560" y="4462272"/>
+            <a:ext cx="502920" cy="91440"/>
+          </a:xfrm>
+          <a:prstGeom prst="rect">
+            <a:avLst/>
+          </a:prstGeom>
+          <a:solidFill>
+            <a:srgbClr val="0E93AE"/>
+          </a:solidFill>
+          <a:ln w="3175">
+            <a:solidFill>
+              <a:srgbClr val="0E93AE"/>
+            </a:solidFill>
+            <a:prstDash val="solid"/>
+          </a:ln>
+        </p:spPr>
+      </p:sp>
+      <p:sp>
+        <p:nvSpPr>
+          <p:cNvPr id="16" name="Text 14"/>
+          <p:cNvSpPr txBox="1"/>
+          <p:nvPr/>
+        </p:nvSpPr>
+        <p:spPr>
+          <a:xfrm>
+            <a:off x="3273552" y="4361688"/>
+            <a:ext cx="717194" cy="292608"/>
+          </a:xfrm>
+          <a:prstGeom prst="rect">
+            <a:avLst/>
+          </a:prstGeom>
+          <a:noFill/>
+          <a:ln/>
+        </p:spPr>
+        <p:txBody>
+          <a:bodyPr wrap="square" lIns="0" tIns="0" rIns="0" bIns="0" rtlCol="0" anchor="ctr"/>
+          <a:lstStyle/>
+          <a:p>
+            <a:pPr indent="0" marL="0">
+              <a:buNone/>
+            </a:pPr>
+            <a:r>
+              <a:rPr lang="en-US" sz="950" b="1" dirty="0">
+                <a:solidFill>
+                  <a:srgbClr val="0E93AE"/>
+                </a:solidFill>
+                <a:latin typeface="Calibri" pitchFamily="34" charset="0"/>
+                <a:ea typeface="Calibri" pitchFamily="34" charset="-122"/>
+                <a:cs typeface="Calibri" pitchFamily="34" charset="-120"/>
+              </a:rPr>
+              <a:t>28.5%  · exit</a:t>
+            </a:r>
+            <a:endParaRPr lang="en-US" sz="950" dirty="0"/>
+          </a:p>
+        </p:txBody>
+      </p:sp>
+      <p:sp>
+        <p:nvSpPr>
+          <p:cNvPr id="17" name="Text 15"/>
+          <p:cNvSpPr txBox="1"/>
+          <p:nvPr/>
+        </p:nvSpPr>
+        <p:spPr>
+          <a:xfrm>
+            <a:off x="822960" y="4700016"/>
+            <a:ext cx="1325880" cy="292608"/>
+          </a:xfrm>
+          <a:prstGeom prst="rect">
+            <a:avLst/>
+          </a:prstGeom>
+          <a:noFill/>
+          <a:ln/>
+        </p:spPr>
+        <p:txBody>
+          <a:bodyPr wrap="square" lIns="0" tIns="0" rIns="0" bIns="0" rtlCol="0" anchor="ctr"/>
+          <a:lstStyle/>
+          <a:p>
+            <a:pPr indent="0" marL="0">
+              <a:buNone/>
+            </a:pPr>
+            <a:r>
+              <a:rPr lang="en-US" sz="950" dirty="0">
+                <a:solidFill>
+                  <a:srgbClr val="AAB2D0"/>
+                </a:solidFill>
+                <a:latin typeface="Calibri" pitchFamily="34" charset="0"/>
+                <a:ea typeface="Calibri" pitchFamily="34" charset="-122"/>
+                <a:cs typeface="Calibri" pitchFamily="34" charset="-120"/>
+              </a:rPr>
+              <a:t>Native 1-year</a:t>
+            </a:r>
+            <a:endParaRPr lang="en-US" sz="950" dirty="0"/>
+          </a:p>
+        </p:txBody>
+      </p:sp>
+      <p:sp>
+        <p:nvSpPr>
+          <p:cNvPr id="18" name="Shape 16"/>
+          <p:cNvSpPr/>
+          <p:nvPr/>
+        </p:nvSpPr>
+        <p:spPr>
+          <a:xfrm>
+            <a:off x="2194560" y="4800600"/>
+            <a:ext cx="1005840" cy="91440"/>
+          </a:xfrm>
+          <a:prstGeom prst="rect">
+            <a:avLst/>
+          </a:prstGeom>
+          <a:solidFill>
+            <a:srgbClr val="1E2668"/>
+          </a:solidFill>
+          <a:ln w="3175">
+            <a:solidFill>
+              <a:srgbClr val="1E2668"/>
+            </a:solidFill>
+            <a:prstDash val="solid"/>
+          </a:ln>
+        </p:spPr>
+      </p:sp>
+      <p:sp>
+        <p:nvSpPr>
+          <p:cNvPr id="19" name="Shape 17"/>
+          <p:cNvSpPr/>
+          <p:nvPr/>
+        </p:nvSpPr>
+        <p:spPr>
+          <a:xfrm>
+            <a:off x="2194560" y="4800600"/>
+            <a:ext cx="635267" cy="91440"/>
+          </a:xfrm>
+          <a:prstGeom prst="rect">
+            <a:avLst/>
+          </a:prstGeom>
+          <a:solidFill>
+            <a:srgbClr val="5B6486"/>
+          </a:solidFill>
+          <a:ln w="3175">
+            <a:solidFill>
+              <a:srgbClr val="5B6486"/>
+            </a:solidFill>
+            <a:prstDash val="solid"/>
+          </a:ln>
+        </p:spPr>
+      </p:sp>
+      <p:sp>
+        <p:nvSpPr>
+          <p:cNvPr id="20" name="Text 18"/>
+          <p:cNvSpPr txBox="1"/>
+          <p:nvPr/>
+        </p:nvSpPr>
+        <p:spPr>
+          <a:xfrm>
+            <a:off x="3273552" y="4700016"/>
+            <a:ext cx="717194" cy="292608"/>
+          </a:xfrm>
+          <a:prstGeom prst="rect">
+            <a:avLst/>
+          </a:prstGeom>
+          <a:noFill/>
+          <a:ln/>
+        </p:spPr>
+        <p:txBody>
+          <a:bodyPr wrap="square" lIns="0" tIns="0" rIns="0" bIns="0" rtlCol="0" anchor="ctr"/>
+          <a:lstStyle/>
+          <a:p>
+            <a:pPr indent="0" marL="0">
+              <a:buNone/>
+            </a:pPr>
+            <a:r>
+              <a:rPr lang="en-US" sz="950" b="1" dirty="0">
+                <a:solidFill>
+                  <a:srgbClr val="AAB2D0"/>
+                </a:solidFill>
+                <a:latin typeface="Calibri" pitchFamily="34" charset="0"/>
+                <a:ea typeface="Calibri" pitchFamily="34" charset="-122"/>
+                <a:cs typeface="Calibri" pitchFamily="34" charset="-120"/>
+              </a:rPr>
+              <a:t>36%</a:t>
+            </a:r>
+            <a:endParaRPr lang="en-US" sz="950" dirty="0"/>
+          </a:p>
+        </p:txBody>
+      </p:sp>
+      <p:sp>
+        <p:nvSpPr>
+          <p:cNvPr id="21" name="Text 19"/>
+          <p:cNvSpPr txBox="1"/>
+          <p:nvPr/>
+        </p:nvSpPr>
+        <p:spPr>
+          <a:xfrm>
+            <a:off x="822960" y="5038344"/>
+            <a:ext cx="1325880" cy="292608"/>
+          </a:xfrm>
+          <a:prstGeom prst="rect">
+            <a:avLst/>
+          </a:prstGeom>
+          <a:noFill/>
+          <a:ln/>
+        </p:spPr>
+        <p:txBody>
+          <a:bodyPr wrap="square" lIns="0" tIns="0" rIns="0" bIns="0" rtlCol="0" anchor="ctr"/>
+          <a:lstStyle/>
+          <a:p>
+            <a:pPr indent="0" marL="0">
+              <a:buNone/>
+            </a:pPr>
+            <a:r>
+              <a:rPr lang="en-US" sz="950" b="1" dirty="0">
+                <a:solidFill>
+                  <a:srgbClr val="FFFFFF"/>
+                </a:solidFill>
+                <a:latin typeface="Calibri" pitchFamily="34" charset="0"/>
+                <a:ea typeface="Calibri" pitchFamily="34" charset="-122"/>
+                <a:cs typeface="Calibri" pitchFamily="34" charset="-120"/>
+              </a:rPr>
+              <a:t>Archera 1-year</a:t>
+            </a:r>
+            <a:endParaRPr lang="en-US" sz="950" dirty="0"/>
+          </a:p>
+        </p:txBody>
+      </p:sp>
+      <p:sp>
+        <p:nvSpPr>
+          <p:cNvPr id="22" name="Shape 20"/>
+          <p:cNvSpPr/>
+          <p:nvPr/>
+        </p:nvSpPr>
+        <p:spPr>
+          <a:xfrm>
+            <a:off x="2194560" y="5138928"/>
+            <a:ext cx="1005840" cy="91440"/>
+          </a:xfrm>
+          <a:prstGeom prst="rect">
+            <a:avLst/>
+          </a:prstGeom>
+          <a:solidFill>
+            <a:srgbClr val="1E2668"/>
+          </a:solidFill>
+          <a:ln w="3175">
+            <a:solidFill>
+              <a:srgbClr val="1E2668"/>
+            </a:solidFill>
+            <a:prstDash val="solid"/>
+          </a:ln>
+        </p:spPr>
+      </p:sp>
+      <p:sp>
+        <p:nvSpPr>
+          <p:cNvPr id="23" name="Shape 21"/>
+          <p:cNvSpPr/>
+          <p:nvPr/>
+        </p:nvSpPr>
+        <p:spPr>
+          <a:xfrm>
+            <a:off x="2194560" y="5138928"/>
+            <a:ext cx="754380" cy="91440"/>
+          </a:xfrm>
+          <a:prstGeom prst="rect">
+            <a:avLst/>
+          </a:prstGeom>
+          <a:solidFill>
+            <a:srgbClr val="5566D8"/>
+          </a:solidFill>
+          <a:ln w="3175">
+            <a:solidFill>
+              <a:srgbClr val="5566D8"/>
+            </a:solidFill>
+            <a:prstDash val="solid"/>
+          </a:ln>
+        </p:spPr>
+      </p:sp>
+      <p:sp>
+        <p:nvSpPr>
+          <p:cNvPr id="24" name="Text 22"/>
+          <p:cNvSpPr txBox="1"/>
+          <p:nvPr/>
+        </p:nvSpPr>
+        <p:spPr>
+          <a:xfrm>
+            <a:off x="3273552" y="5038344"/>
+            <a:ext cx="717194" cy="292608"/>
+          </a:xfrm>
+          <a:prstGeom prst="rect">
+            <a:avLst/>
+          </a:prstGeom>
+          <a:noFill/>
+          <a:ln/>
+        </p:spPr>
+        <p:txBody>
+          <a:bodyPr wrap="square" lIns="0" tIns="0" rIns="0" bIns="0" rtlCol="0" anchor="ctr"/>
+          <a:lstStyle/>
+          <a:p>
+            <a:pPr indent="0" marL="0">
+              <a:buNone/>
+            </a:pPr>
+            <a:r>
+              <a:rPr lang="en-US" sz="950" b="1" dirty="0">
+                <a:solidFill>
+                  <a:srgbClr val="5566D8"/>
+                </a:solidFill>
+                <a:latin typeface="Calibri" pitchFamily="34" charset="0"/>
+                <a:ea typeface="Calibri" pitchFamily="34" charset="-122"/>
+                <a:cs typeface="Calibri" pitchFamily="34" charset="-120"/>
+              </a:rPr>
+              <a:t>42.75%  · exit</a:t>
+            </a:r>
+            <a:endParaRPr lang="en-US" sz="950" dirty="0"/>
+          </a:p>
+        </p:txBody>
+      </p:sp>
+      <p:sp>
+        <p:nvSpPr>
+          <p:cNvPr id="25" name="Text 23"/>
+          <p:cNvSpPr txBox="1"/>
+          <p:nvPr/>
+        </p:nvSpPr>
+        <p:spPr>
+          <a:xfrm>
+            <a:off x="822960" y="5376672"/>
+            <a:ext cx="1325880" cy="292608"/>
+          </a:xfrm>
+          <a:prstGeom prst="rect">
+            <a:avLst/>
+          </a:prstGeom>
+          <a:noFill/>
+          <a:ln/>
+        </p:spPr>
+        <p:txBody>
+          <a:bodyPr wrap="square" lIns="0" tIns="0" rIns="0" bIns="0" rtlCol="0" anchor="ctr"/>
+          <a:lstStyle/>
+          <a:p>
+            <a:pPr indent="0" marL="0">
+              <a:buNone/>
+            </a:pPr>
+            <a:r>
+              <a:rPr lang="en-US" sz="950" dirty="0">
+                <a:solidFill>
+                  <a:srgbClr val="AAB2D0"/>
+                </a:solidFill>
+                <a:latin typeface="Calibri" pitchFamily="34" charset="0"/>
+                <a:ea typeface="Calibri" pitchFamily="34" charset="-122"/>
+                <a:cs typeface="Calibri" pitchFamily="34" charset="-120"/>
+              </a:rPr>
+              <a:t>Native 3-year</a:t>
+            </a:r>
+            <a:endParaRPr lang="en-US" sz="950" dirty="0"/>
+          </a:p>
+        </p:txBody>
+      </p:sp>
+      <p:sp>
+        <p:nvSpPr>
+          <p:cNvPr id="26" name="Shape 24"/>
+          <p:cNvSpPr/>
+          <p:nvPr/>
+        </p:nvSpPr>
+        <p:spPr>
+          <a:xfrm>
+            <a:off x="2194560" y="5477256"/>
+            <a:ext cx="1005840" cy="91440"/>
+          </a:xfrm>
+          <a:prstGeom prst="rect">
+            <a:avLst/>
+          </a:prstGeom>
+          <a:solidFill>
+            <a:srgbClr val="1E2668"/>
+          </a:solidFill>
+          <a:ln w="3175">
+            <a:solidFill>
+              <a:srgbClr val="1E2668"/>
+            </a:solidFill>
+            <a:prstDash val="solid"/>
+          </a:ln>
+        </p:spPr>
+      </p:sp>
+      <p:sp>
+        <p:nvSpPr>
+          <p:cNvPr id="27" name="Shape 25"/>
+          <p:cNvSpPr/>
+          <p:nvPr/>
+        </p:nvSpPr>
+        <p:spPr>
+          <a:xfrm>
+            <a:off x="2194560" y="5477256"/>
+            <a:ext cx="1005840" cy="91440"/>
+          </a:xfrm>
+          <a:prstGeom prst="rect">
+            <a:avLst/>
+          </a:prstGeom>
+          <a:solidFill>
+            <a:srgbClr val="8E96C8"/>
+          </a:solidFill>
+          <a:ln w="3175">
+            <a:solidFill>
+              <a:srgbClr val="8E96C8"/>
+            </a:solidFill>
+            <a:prstDash val="solid"/>
+          </a:ln>
+        </p:spPr>
+      </p:sp>
+      <p:sp>
+        <p:nvSpPr>
+          <p:cNvPr id="28" name="Text 26"/>
+          <p:cNvSpPr txBox="1"/>
+          <p:nvPr/>
+        </p:nvSpPr>
+        <p:spPr>
+          <a:xfrm>
+            <a:off x="3273552" y="5376672"/>
+            <a:ext cx="717194" cy="292608"/>
+          </a:xfrm>
+          <a:prstGeom prst="rect">
+            <a:avLst/>
+          </a:prstGeom>
+          <a:noFill/>
+          <a:ln/>
+        </p:spPr>
+        <p:txBody>
+          <a:bodyPr wrap="square" lIns="0" tIns="0" rIns="0" bIns="0" rtlCol="0" anchor="ctr"/>
+          <a:lstStyle/>
+          <a:p>
+            <a:pPr indent="0" marL="0">
+              <a:buNone/>
+            </a:pPr>
+            <a:r>
+              <a:rPr lang="en-US" sz="950" b="1" dirty="0">
+                <a:solidFill>
+                  <a:srgbClr val="AAB2D0"/>
+                </a:solidFill>
+                <a:latin typeface="Calibri" pitchFamily="34" charset="0"/>
+                <a:ea typeface="Calibri" pitchFamily="34" charset="-122"/>
+                <a:cs typeface="Calibri" pitchFamily="34" charset="-120"/>
+              </a:rPr>
+              <a:t>57%</a:t>
+            </a:r>
+            <a:endParaRPr lang="en-US" sz="950" dirty="0"/>
+          </a:p>
+        </p:txBody>
+      </p:sp>
+      <p:sp>
+        <p:nvSpPr>
+          <p:cNvPr id="29" name="Shape 27"/>
+          <p:cNvSpPr/>
+          <p:nvPr/>
+        </p:nvSpPr>
+        <p:spPr>
+          <a:xfrm>
+            <a:off x="4319930" y="1627632"/>
+            <a:ext cx="3551834" cy="4169664"/>
+          </a:xfrm>
+          <a:prstGeom prst="roundRect">
+            <a:avLst>
+              <a:gd name="adj" fmla="val 1802"/>
+            </a:avLst>
+          </a:prstGeom>
+          <a:solidFill>
+            <a:srgbClr val="141A4F"/>
+          </a:solidFill>
+          <a:ln w="9525">
+            <a:solidFill>
+              <a:srgbClr val="3D4569"/>
+            </a:solidFill>
+            <a:prstDash val="solid"/>
+          </a:ln>
+        </p:spPr>
+      </p:sp>
+      <p:sp>
+        <p:nvSpPr>
+          <p:cNvPr id="30" name="Text 28"/>
+          <p:cNvSpPr txBox="1"/>
+          <p:nvPr/>
+        </p:nvSpPr>
+        <p:spPr>
+          <a:xfrm>
+            <a:off x="4575962" y="1810512"/>
+            <a:ext cx="3039770" cy="201168"/>
+          </a:xfrm>
+          <a:prstGeom prst="rect">
+            <a:avLst/>
+          </a:prstGeom>
+          <a:noFill/>
+          <a:ln/>
+        </p:spPr>
+        <p:txBody>
+          <a:bodyPr wrap="square" lIns="0" tIns="0" rIns="0" bIns="0" rtlCol="0" anchor="ctr"/>
+          <a:lstStyle/>
+          <a:p>
+            <a:pPr indent="0" marL="0">
+              <a:buNone/>
+            </a:pPr>
+            <a:r>
+              <a:rPr lang="en-US" sz="900" b="1" spc="200" kern="0" dirty="0">
+                <a:solidFill>
+                  <a:srgbClr val="F5A623"/>
+                </a:solidFill>
+                <a:latin typeface="Calibri" pitchFamily="34" charset="0"/>
+                <a:ea typeface="Calibri" pitchFamily="34" charset="-122"/>
+                <a:cs typeface="Calibri" pitchFamily="34" charset="-120"/>
+              </a:rPr>
+              <a:t>WHEN NOT TO — AND THE FINE PRINT</a:t>
+            </a:r>
+            <a:endParaRPr lang="en-US" sz="900" dirty="0"/>
+          </a:p>
+        </p:txBody>
+      </p:sp>
+      <p:sp>
+        <p:nvSpPr>
+          <p:cNvPr id="31" name="Text 29"/>
+          <p:cNvSpPr txBox="1"/>
+          <p:nvPr/>
+        </p:nvSpPr>
+        <p:spPr>
+          <a:xfrm>
+            <a:off x="4575962" y="2103120"/>
+            <a:ext cx="3039770" cy="237744"/>
+          </a:xfrm>
+          <a:prstGeom prst="rect">
+            <a:avLst/>
+          </a:prstGeom>
+          <a:noFill/>
+          <a:ln/>
+        </p:spPr>
+        <p:txBody>
+          <a:bodyPr wrap="square" lIns="0" tIns="0" rIns="0" bIns="0" rtlCol="0" anchor="ctr"/>
+          <a:lstStyle/>
+          <a:p>
+            <a:pPr indent="0" marL="0">
+              <a:buNone/>
+            </a:pPr>
+            <a:r>
+              <a:rPr lang="en-US" sz="1050" b="1" dirty="0">
+                <a:solidFill>
+                  <a:srgbClr val="FFFFFF"/>
+                </a:solidFill>
+                <a:latin typeface="Calibri" pitchFamily="34" charset="0"/>
+                <a:ea typeface="Calibri" pitchFamily="34" charset="-122"/>
+                <a:cs typeface="Calibri" pitchFamily="34" charset="-120"/>
+              </a:rPr>
+              <a:t>Stable three-year workloads</a:t>
+            </a:r>
+            <a:endParaRPr lang="en-US" sz="1050" dirty="0"/>
+          </a:p>
+        </p:txBody>
+      </p:sp>
+      <p:sp>
+        <p:nvSpPr>
+          <p:cNvPr id="32" name="Text 30"/>
+          <p:cNvSpPr txBox="1"/>
+          <p:nvPr/>
+        </p:nvSpPr>
+        <p:spPr>
+          <a:xfrm>
+            <a:off x="4575962" y="2350008"/>
+            <a:ext cx="3039770" cy="566928"/>
+          </a:xfrm>
+          <a:prstGeom prst="rect">
+            <a:avLst/>
+          </a:prstGeom>
+          <a:noFill/>
+          <a:ln/>
+        </p:spPr>
+        <p:txBody>
+          <a:bodyPr wrap="square" lIns="0" tIns="0" rIns="0" bIns="0" rtlCol="0" anchor="t"/>
+          <a:lstStyle/>
+          <a:p>
+            <a:pPr indent="0" marL="0">
+              <a:lnSpc>
+                <a:spcPts val="1300"/>
+              </a:lnSpc>
+              <a:buNone/>
+            </a:pPr>
+            <a:r>
+              <a:rPr lang="en-US" sz="950" dirty="0">
+                <a:solidFill>
+                  <a:srgbClr val="B7C0E0"/>
+                </a:solidFill>
+                <a:latin typeface="Calibri" pitchFamily="34" charset="0"/>
+                <a:ea typeface="Calibri" pitchFamily="34" charset="-122"/>
+                <a:cs typeface="Calibri" pitchFamily="34" charset="-120"/>
+              </a:rPr>
+              <a:t>Buy the native 3-year and keep all 57%. Archera is only for the spend that cannot honestly be committed.</a:t>
+            </a:r>
+            <a:endParaRPr lang="en-US" sz="950" dirty="0"/>
+          </a:p>
+        </p:txBody>
+      </p:sp>
+      <p:sp>
+        <p:nvSpPr>
+          <p:cNvPr id="33" name="Text 31"/>
+          <p:cNvSpPr txBox="1"/>
+          <p:nvPr/>
+        </p:nvSpPr>
+        <p:spPr>
+          <a:xfrm>
+            <a:off x="4575962" y="2999232"/>
+            <a:ext cx="3039770" cy="237744"/>
+          </a:xfrm>
+          <a:prstGeom prst="rect">
+            <a:avLst/>
+          </a:prstGeom>
+          <a:noFill/>
+          <a:ln/>
+        </p:spPr>
+        <p:txBody>
+          <a:bodyPr wrap="square" lIns="0" tIns="0" rIns="0" bIns="0" rtlCol="0" anchor="ctr"/>
+          <a:lstStyle/>
+          <a:p>
+            <a:pPr indent="0" marL="0">
+              <a:buNone/>
+            </a:pPr>
+            <a:r>
+              <a:rPr lang="en-US" sz="1050" b="1" dirty="0">
+                <a:solidFill>
+                  <a:srgbClr val="FFFFFF"/>
+                </a:solidFill>
+                <a:latin typeface="Calibri" pitchFamily="34" charset="0"/>
+                <a:ea typeface="Calibri" pitchFamily="34" charset="-122"/>
+                <a:cs typeface="Calibri" pitchFamily="34" charset="-120"/>
+              </a:rPr>
+              <a:t>Rebate cover is off by default</a:t>
+            </a:r>
+            <a:endParaRPr lang="en-US" sz="1050" dirty="0"/>
+          </a:p>
+        </p:txBody>
+      </p:sp>
+      <p:sp>
+        <p:nvSpPr>
+          <p:cNvPr id="34" name="Text 32"/>
+          <p:cNvSpPr txBox="1"/>
+          <p:nvPr/>
+        </p:nvSpPr>
+        <p:spPr>
+          <a:xfrm>
+            <a:off x="4575962" y="3246120"/>
+            <a:ext cx="3039770" cy="566928"/>
+          </a:xfrm>
+          <a:prstGeom prst="rect">
+            <a:avLst/>
+          </a:prstGeom>
+          <a:noFill/>
+          <a:ln/>
+        </p:spPr>
+        <p:txBody>
+          <a:bodyPr wrap="square" lIns="0" tIns="0" rIns="0" bIns="0" rtlCol="0" anchor="t"/>
+          <a:lstStyle/>
+          <a:p>
+            <a:pPr indent="0" marL="0">
+              <a:lnSpc>
+                <a:spcPts val="1300"/>
+              </a:lnSpc>
+              <a:buNone/>
+            </a:pPr>
+            <a:r>
+              <a:rPr lang="en-US" sz="950" dirty="0">
+                <a:solidFill>
+                  <a:srgbClr val="B7C0E0"/>
+                </a:solidFill>
+                <a:latin typeface="Calibri" pitchFamily="34" charset="0"/>
+                <a:ea typeface="Calibri" pitchFamily="34" charset="-122"/>
+                <a:cs typeface="Calibri" pitchFamily="34" charset="-120"/>
+              </a:rPr>
+              <a:t>It must be switched on with Archera — release-only cover is not rebate cover.</a:t>
+            </a:r>
+            <a:endParaRPr lang="en-US" sz="950" dirty="0"/>
+          </a:p>
+        </p:txBody>
+      </p:sp>
+      <p:sp>
+        <p:nvSpPr>
+          <p:cNvPr id="35" name="Text 33"/>
+          <p:cNvSpPr txBox="1"/>
+          <p:nvPr/>
+        </p:nvSpPr>
+        <p:spPr>
+          <a:xfrm>
+            <a:off x="4575962" y="3895344"/>
+            <a:ext cx="3039770" cy="237744"/>
+          </a:xfrm>
+          <a:prstGeom prst="rect">
+            <a:avLst/>
+          </a:prstGeom>
+          <a:noFill/>
+          <a:ln/>
+        </p:spPr>
+        <p:txBody>
+          <a:bodyPr wrap="square" lIns="0" tIns="0" rIns="0" bIns="0" rtlCol="0" anchor="ctr"/>
+          <a:lstStyle/>
+          <a:p>
+            <a:pPr indent="0" marL="0">
+              <a:buNone/>
+            </a:pPr>
+            <a:r>
+              <a:rPr lang="en-US" sz="1050" b="1" dirty="0">
+                <a:solidFill>
+                  <a:srgbClr val="FFFFFF"/>
+                </a:solidFill>
+                <a:latin typeface="Calibri" pitchFamily="34" charset="0"/>
+                <a:ea typeface="Calibri" pitchFamily="34" charset="-122"/>
+                <a:cs typeface="Calibri" pitchFamily="34" charset="-120"/>
+              </a:rPr>
+              <a:t>Buybacks are filed, not automatic</a:t>
+            </a:r>
+            <a:endParaRPr lang="en-US" sz="1050" dirty="0"/>
+          </a:p>
+        </p:txBody>
+      </p:sp>
+      <p:sp>
+        <p:nvSpPr>
+          <p:cNvPr id="36" name="Text 34"/>
+          <p:cNvSpPr txBox="1"/>
+          <p:nvPr/>
+        </p:nvSpPr>
+        <p:spPr>
+          <a:xfrm>
+            <a:off x="4575962" y="4142232"/>
+            <a:ext cx="3039770" cy="566928"/>
+          </a:xfrm>
+          <a:prstGeom prst="rect">
+            <a:avLst/>
+          </a:prstGeom>
+          <a:noFill/>
+          <a:ln/>
+        </p:spPr>
+        <p:txBody>
+          <a:bodyPr wrap="square" lIns="0" tIns="0" rIns="0" bIns="0" rtlCol="0" anchor="t"/>
+          <a:lstStyle/>
+          <a:p>
+            <a:pPr indent="0" marL="0">
+              <a:lnSpc>
+                <a:spcPts val="1300"/>
+              </a:lnSpc>
+              <a:buNone/>
+            </a:pPr>
+            <a:r>
+              <a:rPr lang="en-US" sz="950" dirty="0">
+                <a:solidFill>
+                  <a:srgbClr val="B7C0E0"/>
+                </a:solidFill>
+                <a:latin typeface="Calibri" pitchFamily="34" charset="0"/>
+                <a:ea typeface="Calibri" pitchFamily="34" charset="-122"/>
+                <a:cs typeface="Calibri" pitchFamily="34" charset="-120"/>
+              </a:rPr>
+              <a:t>Somebody requests the release, and EC2 buybacks need the RI Marketplace enabled first.</a:t>
+            </a:r>
+            <a:endParaRPr lang="en-US" sz="950" dirty="0"/>
+          </a:p>
+        </p:txBody>
+      </p:sp>
+      <p:sp>
+        <p:nvSpPr>
+          <p:cNvPr id="37" name="Text 35"/>
+          <p:cNvSpPr txBox="1"/>
+          <p:nvPr/>
+        </p:nvSpPr>
+        <p:spPr>
+          <a:xfrm>
+            <a:off x="4575962" y="4791456"/>
+            <a:ext cx="3039770" cy="237744"/>
+          </a:xfrm>
+          <a:prstGeom prst="rect">
+            <a:avLst/>
+          </a:prstGeom>
+          <a:noFill/>
+          <a:ln/>
+        </p:spPr>
+        <p:txBody>
+          <a:bodyPr wrap="square" lIns="0" tIns="0" rIns="0" bIns="0" rtlCol="0" anchor="ctr"/>
+          <a:lstStyle/>
+          <a:p>
+            <a:pPr indent="0" marL="0">
+              <a:buNone/>
+            </a:pPr>
+            <a:r>
+              <a:rPr lang="en-US" sz="1050" b="1" dirty="0">
+                <a:solidFill>
+                  <a:srgbClr val="FFFFFF"/>
+                </a:solidFill>
+                <a:latin typeface="Calibri" pitchFamily="34" charset="0"/>
+                <a:ea typeface="Calibri" pitchFamily="34" charset="-122"/>
+                <a:cs typeface="Calibri" pitchFamily="34" charset="-120"/>
+              </a:rPr>
+              <a:t>The guarantees are contractual</a:t>
+            </a:r>
+            <a:endParaRPr lang="en-US" sz="1050" dirty="0"/>
+          </a:p>
+        </p:txBody>
+      </p:sp>
+      <p:sp>
+        <p:nvSpPr>
+          <p:cNvPr id="38" name="Text 36"/>
+          <p:cNvSpPr txBox="1"/>
+          <p:nvPr/>
+        </p:nvSpPr>
+        <p:spPr>
+          <a:xfrm>
+            <a:off x="4575962" y="5038344"/>
+            <a:ext cx="3039770" cy="566928"/>
+          </a:xfrm>
+          <a:prstGeom prst="rect">
+            <a:avLst/>
+          </a:prstGeom>
+          <a:noFill/>
+          <a:ln/>
+        </p:spPr>
+        <p:txBody>
+          <a:bodyPr wrap="square" lIns="0" tIns="0" rIns="0" bIns="0" rtlCol="0" anchor="t"/>
+          <a:lstStyle/>
+          <a:p>
+            <a:pPr indent="0" marL="0">
+              <a:lnSpc>
+                <a:spcPts val="1300"/>
+              </a:lnSpc>
+              <a:buNone/>
+            </a:pPr>
+            <a:r>
+              <a:rPr lang="en-US" sz="950" dirty="0">
+                <a:solidFill>
+                  <a:srgbClr val="B7C0E0"/>
+                </a:solidFill>
+                <a:latin typeface="Calibri" pitchFamily="34" charset="0"/>
+                <a:ea typeface="Calibri" pitchFamily="34" charset="-122"/>
+                <a:cs typeface="Calibri" pitchFamily="34" charset="-120"/>
+              </a:rPr>
+              <a:t>Backed by third-party reinsurance — not a regulated insurance policy.</a:t>
+            </a:r>
+            <a:endParaRPr lang="en-US" sz="950" dirty="0"/>
+          </a:p>
+        </p:txBody>
+      </p:sp>
+      <p:sp>
+        <p:nvSpPr>
+          <p:cNvPr id="39" name="Shape 37"/>
+          <p:cNvSpPr/>
+          <p:nvPr/>
+        </p:nvSpPr>
+        <p:spPr>
+          <a:xfrm>
+            <a:off x="8072933" y="1627632"/>
+            <a:ext cx="3551834" cy="4169664"/>
+          </a:xfrm>
+          <a:prstGeom prst="roundRect">
+            <a:avLst>
+              <a:gd name="adj" fmla="val 1802"/>
+            </a:avLst>
+          </a:prstGeom>
+          <a:solidFill>
+            <a:srgbClr val="1E2668"/>
+          </a:solidFill>
+          <a:ln w="13970">
+            <a:solidFill>
+              <a:srgbClr val="3B4CC0"/>
+            </a:solidFill>
+            <a:prstDash val="solid"/>
+          </a:ln>
+        </p:spPr>
+      </p:sp>
+      <p:sp>
+        <p:nvSpPr>
+          <p:cNvPr id="40" name="Text 38"/>
+          <p:cNvSpPr txBox="1"/>
+          <p:nvPr/>
+        </p:nvSpPr>
+        <p:spPr>
+          <a:xfrm>
+            <a:off x="8328965" y="1810512"/>
+            <a:ext cx="3039770" cy="201168"/>
+          </a:xfrm>
+          <a:prstGeom prst="rect">
+            <a:avLst/>
+          </a:prstGeom>
+          <a:noFill/>
+          <a:ln/>
+        </p:spPr>
+        <p:txBody>
+          <a:bodyPr wrap="square" lIns="0" tIns="0" rIns="0" bIns="0" rtlCol="0" anchor="ctr"/>
+          <a:lstStyle/>
+          <a:p>
+            <a:pPr indent="0" marL="0">
+              <a:buNone/>
+            </a:pPr>
+            <a:r>
+              <a:rPr lang="en-US" sz="900" b="1" spc="200" kern="0" dirty="0">
+                <a:solidFill>
+                  <a:srgbClr val="19C6E6"/>
+                </a:solidFill>
+                <a:latin typeface="Calibri" pitchFamily="34" charset="0"/>
+                <a:ea typeface="Calibri" pitchFamily="34" charset="-122"/>
+                <a:cs typeface="Calibri" pitchFamily="34" charset="-120"/>
+              </a:rPr>
+              <a:t>THE PARTNERSHIP</a:t>
+            </a:r>
+            <a:endParaRPr lang="en-US" sz="900" dirty="0"/>
+          </a:p>
+        </p:txBody>
+      </p:sp>
+      <p:sp>
+        <p:nvSpPr>
+          <p:cNvPr id="41" name="Text 39"/>
+          <p:cNvSpPr txBox="1"/>
+          <p:nvPr/>
+        </p:nvSpPr>
+        <p:spPr>
+          <a:xfrm>
+            <a:off x="8328965" y="2084832"/>
+            <a:ext cx="3039770" cy="658368"/>
+          </a:xfrm>
+          <a:prstGeom prst="rect">
+            <a:avLst/>
+          </a:prstGeom>
+          <a:noFill/>
+          <a:ln/>
+        </p:spPr>
+        <p:txBody>
+          <a:bodyPr wrap="square" lIns="0" tIns="0" rIns="0" bIns="0" rtlCol="0" anchor="t"/>
+          <a:lstStyle/>
+          <a:p>
+            <a:pPr indent="0" marL="0">
+              <a:lnSpc>
+                <a:spcPts val="1350"/>
+              </a:lnSpc>
+              <a:buNone/>
+            </a:pPr>
+            <a:r>
+              <a:rPr lang="en-US" sz="1000" dirty="0">
+                <a:solidFill>
+                  <a:srgbClr val="B7C0E0"/>
+                </a:solidFill>
+                <a:latin typeface="Calibri" pitchFamily="34" charset="0"/>
+                <a:ea typeface="Calibri" pitchFamily="34" charset="-122"/>
+                <a:cs typeface="Calibri" pitchFamily="34" charset="-120"/>
+              </a:rPr>
+              <a:t>The platform is free; the premium meters monthly on savings realised, billed through AWS Marketplace CPPO.</a:t>
+            </a:r>
+            <a:endParaRPr lang="en-US" sz="1000" dirty="0"/>
+          </a:p>
+        </p:txBody>
+      </p:sp>
+      <p:sp>
+        <p:nvSpPr>
+          <p:cNvPr id="42" name="Text 40"/>
+          <p:cNvSpPr txBox="1"/>
+          <p:nvPr/>
+        </p:nvSpPr>
+        <p:spPr>
+          <a:xfrm>
+            <a:off x="8328965" y="2779776"/>
+            <a:ext cx="3039770" cy="658368"/>
+          </a:xfrm>
+          <a:prstGeom prst="rect">
+            <a:avLst/>
+          </a:prstGeom>
+          <a:noFill/>
+          <a:ln/>
+        </p:spPr>
+        <p:txBody>
+          <a:bodyPr wrap="square" lIns="0" tIns="0" rIns="0" bIns="0" rtlCol="0" anchor="t"/>
+          <a:lstStyle/>
+          <a:p>
+            <a:pPr indent="0" marL="0">
+              <a:lnSpc>
+                <a:spcPts val="1350"/>
+              </a:lnSpc>
+              <a:buNone/>
+            </a:pPr>
+            <a:r>
+              <a:rPr lang="en-US" sz="1000" dirty="0">
+                <a:solidFill>
+                  <a:srgbClr val="B7C0E0"/>
+                </a:solidFill>
+                <a:latin typeface="Calibri" pitchFamily="34" charset="0"/>
+                <a:ea typeface="Calibri" pitchFamily="34" charset="-122"/>
+                <a:cs typeface="Calibri" pitchFamily="34" charset="-120"/>
+              </a:rPr>
+              <a:t>Co-Seller rev-share: 20% / 25% / 30% by commitment MRR — on entities net-new to Archera only.</a:t>
+            </a:r>
+            <a:endParaRPr lang="en-US" sz="1000" dirty="0"/>
+          </a:p>
+        </p:txBody>
+      </p:sp>
+      <p:sp>
+        <p:nvSpPr>
+          <p:cNvPr id="43" name="Text 41"/>
+          <p:cNvSpPr txBox="1"/>
+          <p:nvPr/>
+        </p:nvSpPr>
+        <p:spPr>
+          <a:xfrm>
+            <a:off x="8328965" y="3584448"/>
+            <a:ext cx="3039770" cy="201168"/>
+          </a:xfrm>
+          <a:prstGeom prst="rect">
+            <a:avLst/>
+          </a:prstGeom>
+          <a:noFill/>
+          <a:ln/>
+        </p:spPr>
+        <p:txBody>
+          <a:bodyPr wrap="square" lIns="0" tIns="0" rIns="0" bIns="0" rtlCol="0" anchor="ctr"/>
+          <a:lstStyle/>
+          <a:p>
+            <a:pPr indent="0" marL="0">
+              <a:buNone/>
+            </a:pPr>
+            <a:r>
+              <a:rPr lang="en-US" sz="850" b="1" spc="200" kern="0" dirty="0">
+                <a:solidFill>
+                  <a:srgbClr val="8E96C8"/>
+                </a:solidFill>
+                <a:latin typeface="Calibri" pitchFamily="34" charset="0"/>
+                <a:ea typeface="Calibri" pitchFamily="34" charset="-122"/>
+                <a:cs typeface="Calibri" pitchFamily="34" charset="-120"/>
+              </a:rPr>
+              <a:t>THE THREE ASKS</a:t>
+            </a:r>
+            <a:endParaRPr lang="en-US" sz="850" dirty="0"/>
+          </a:p>
+        </p:txBody>
+      </p:sp>
+      <p:sp>
+        <p:nvSpPr>
+          <p:cNvPr id="44" name="Shape 42"/>
+          <p:cNvSpPr/>
+          <p:nvPr/>
+        </p:nvSpPr>
+        <p:spPr>
+          <a:xfrm>
+            <a:off x="8347253" y="3941064"/>
+            <a:ext cx="274320" cy="274320"/>
+          </a:xfrm>
+          <a:prstGeom prst="ellipse">
+            <a:avLst/>
+          </a:prstGeom>
+          <a:solidFill>
+            <a:srgbClr val="3B4CC0"/>
+          </a:solidFill>
+          <a:ln w="9525">
+            <a:solidFill>
+              <a:srgbClr val="5566D8"/>
+            </a:solidFill>
+            <a:prstDash val="solid"/>
+          </a:ln>
+        </p:spPr>
+      </p:sp>
+      <p:sp>
+        <p:nvSpPr>
+          <p:cNvPr id="45" name="Text 43"/>
+          <p:cNvSpPr txBox="1"/>
+          <p:nvPr/>
+        </p:nvSpPr>
+        <p:spPr>
+          <a:xfrm>
+            <a:off x="8347253" y="3941064"/>
+            <a:ext cx="274320" cy="274320"/>
+          </a:xfrm>
+          <a:prstGeom prst="rect">
+            <a:avLst/>
+          </a:prstGeom>
+          <a:noFill/>
+          <a:ln/>
+        </p:spPr>
+        <p:txBody>
+          <a:bodyPr wrap="square" lIns="0" tIns="0" rIns="0" bIns="0" rtlCol="0" anchor="ctr"/>
+          <a:lstStyle/>
+          <a:p>
+            <a:pPr algn="ctr" indent="0" marL="0">
+              <a:buNone/>
+            </a:pPr>
+            <a:r>
+              <a:rPr lang="en-US" sz="1000" b="1" dirty="0">
+                <a:solidFill>
+                  <a:srgbClr val="FFFFFF"/>
+                </a:solidFill>
+                <a:latin typeface="Calibri" pitchFamily="34" charset="0"/>
+                <a:ea typeface="Calibri" pitchFamily="34" charset="-122"/>
+                <a:cs typeface="Calibri" pitchFamily="34" charset="-120"/>
+              </a:rPr>
+              <a:t>1</a:t>
+            </a:r>
+            <a:endParaRPr lang="en-US" sz="1000" dirty="0"/>
+          </a:p>
+        </p:txBody>
+      </p:sp>
+      <p:sp>
+        <p:nvSpPr>
+          <p:cNvPr id="46" name="Text 44"/>
+          <p:cNvSpPr txBox="1"/>
+          <p:nvPr/>
+        </p:nvSpPr>
+        <p:spPr>
+          <a:xfrm>
+            <a:off x="8731301" y="3840480"/>
+            <a:ext cx="2619146" cy="475488"/>
+          </a:xfrm>
+          <a:prstGeom prst="rect">
+            <a:avLst/>
+          </a:prstGeom>
+          <a:noFill/>
+          <a:ln/>
+        </p:spPr>
+        <p:txBody>
+          <a:bodyPr wrap="square" lIns="0" tIns="0" rIns="0" bIns="0" rtlCol="0" anchor="ctr"/>
+          <a:lstStyle/>
+          <a:p>
+            <a:pPr indent="0" marL="0">
+              <a:buNone/>
+            </a:pPr>
+            <a:r>
+              <a:rPr lang="en-US" sz="1100" b="1" dirty="0">
+                <a:solidFill>
+                  <a:srgbClr val="FFFFFF"/>
+                </a:solidFill>
+                <a:latin typeface="Calibri" pitchFamily="34" charset="0"/>
+                <a:ea typeface="Calibri" pitchFamily="34" charset="-122"/>
+                <a:cs typeface="Calibri" pitchFamily="34" charset="-120"/>
+              </a:rPr>
+              <a:t>Pick two pilot ISVs</a:t>
+            </a:r>
+            <a:endParaRPr lang="en-US" sz="1100" dirty="0"/>
+          </a:p>
+        </p:txBody>
+      </p:sp>
+      <p:sp>
+        <p:nvSpPr>
+          <p:cNvPr id="47" name="Shape 45"/>
+          <p:cNvSpPr/>
+          <p:nvPr/>
+        </p:nvSpPr>
+        <p:spPr>
+          <a:xfrm>
+            <a:off x="8347253" y="4507992"/>
+            <a:ext cx="274320" cy="274320"/>
+          </a:xfrm>
+          <a:prstGeom prst="ellipse">
+            <a:avLst/>
+          </a:prstGeom>
+          <a:solidFill>
+            <a:srgbClr val="3B4CC0"/>
+          </a:solidFill>
+          <a:ln w="9525">
+            <a:solidFill>
+              <a:srgbClr val="5566D8"/>
+            </a:solidFill>
+            <a:prstDash val="solid"/>
+          </a:ln>
+        </p:spPr>
+      </p:sp>
+      <p:sp>
+        <p:nvSpPr>
+          <p:cNvPr id="48" name="Text 46"/>
+          <p:cNvSpPr txBox="1"/>
+          <p:nvPr/>
+        </p:nvSpPr>
+        <p:spPr>
+          <a:xfrm>
+            <a:off x="8347253" y="4507992"/>
+            <a:ext cx="274320" cy="274320"/>
+          </a:xfrm>
+          <a:prstGeom prst="rect">
+            <a:avLst/>
+          </a:prstGeom>
+          <a:noFill/>
+          <a:ln/>
+        </p:spPr>
+        <p:txBody>
+          <a:bodyPr wrap="square" lIns="0" tIns="0" rIns="0" bIns="0" rtlCol="0" anchor="ctr"/>
+          <a:lstStyle/>
+          <a:p>
+            <a:pPr algn="ctr" indent="0" marL="0">
+              <a:buNone/>
+            </a:pPr>
+            <a:r>
+              <a:rPr lang="en-US" sz="1000" b="1" dirty="0">
+                <a:solidFill>
+                  <a:srgbClr val="FFFFFF"/>
+                </a:solidFill>
+                <a:latin typeface="Calibri" pitchFamily="34" charset="0"/>
+                <a:ea typeface="Calibri" pitchFamily="34" charset="-122"/>
+                <a:cs typeface="Calibri" pitchFamily="34" charset="-120"/>
+              </a:rPr>
+              <a:t>2</a:t>
+            </a:r>
+            <a:endParaRPr lang="en-US" sz="1000" dirty="0"/>
+          </a:p>
+        </p:txBody>
+      </p:sp>
+      <p:sp>
+        <p:nvSpPr>
+          <p:cNvPr id="49" name="Text 47"/>
+          <p:cNvSpPr txBox="1"/>
+          <p:nvPr/>
+        </p:nvSpPr>
+        <p:spPr>
+          <a:xfrm>
+            <a:off x="8731301" y="4407408"/>
+            <a:ext cx="2619146" cy="475488"/>
+          </a:xfrm>
+          <a:prstGeom prst="rect">
+            <a:avLst/>
+          </a:prstGeom>
+          <a:noFill/>
+          <a:ln/>
+        </p:spPr>
+        <p:txBody>
+          <a:bodyPr wrap="square" lIns="0" tIns="0" rIns="0" bIns="0" rtlCol="0" anchor="ctr"/>
+          <a:lstStyle/>
+          <a:p>
+            <a:pPr indent="0" marL="0">
+              <a:buNone/>
+            </a:pPr>
+            <a:r>
+              <a:rPr lang="en-US" sz="1100" b="1" dirty="0">
+                <a:solidFill>
+                  <a:srgbClr val="FFFFFF"/>
+                </a:solidFill>
+                <a:latin typeface="Calibri" pitchFamily="34" charset="0"/>
+                <a:ea typeface="Calibri" pitchFamily="34" charset="-122"/>
+                <a:cs typeface="Calibri" pitchFamily="34" charset="-120"/>
+              </a:rPr>
+              <a:t>Run the free savings analysis</a:t>
+            </a:r>
+            <a:endParaRPr lang="en-US" sz="1100" dirty="0"/>
+          </a:p>
+        </p:txBody>
+      </p:sp>
+      <p:sp>
+        <p:nvSpPr>
+          <p:cNvPr id="50" name="Shape 48"/>
+          <p:cNvSpPr/>
+          <p:nvPr/>
+        </p:nvSpPr>
+        <p:spPr>
+          <a:xfrm>
+            <a:off x="8347253" y="5074920"/>
+            <a:ext cx="274320" cy="274320"/>
+          </a:xfrm>
+          <a:prstGeom prst="ellipse">
+            <a:avLst/>
+          </a:prstGeom>
+          <a:solidFill>
+            <a:srgbClr val="3B4CC0"/>
+          </a:solidFill>
+          <a:ln w="9525">
+            <a:solidFill>
+              <a:srgbClr val="5566D8"/>
+            </a:solidFill>
+            <a:prstDash val="solid"/>
+          </a:ln>
+        </p:spPr>
+      </p:sp>
+      <p:sp>
+        <p:nvSpPr>
+          <p:cNvPr id="51" name="Text 49"/>
+          <p:cNvSpPr txBox="1"/>
+          <p:nvPr/>
+        </p:nvSpPr>
+        <p:spPr>
+          <a:xfrm>
+            <a:off x="8347253" y="5074920"/>
+            <a:ext cx="274320" cy="274320"/>
+          </a:xfrm>
+          <a:prstGeom prst="rect">
+            <a:avLst/>
+          </a:prstGeom>
+          <a:noFill/>
+          <a:ln/>
+        </p:spPr>
+        <p:txBody>
+          <a:bodyPr wrap="square" lIns="0" tIns="0" rIns="0" bIns="0" rtlCol="0" anchor="ctr"/>
+          <a:lstStyle/>
+          <a:p>
+            <a:pPr algn="ctr" indent="0" marL="0">
+              <a:buNone/>
+            </a:pPr>
+            <a:r>
+              <a:rPr lang="en-US" sz="1000" b="1" dirty="0">
+                <a:solidFill>
+                  <a:srgbClr val="FFFFFF"/>
+                </a:solidFill>
+                <a:latin typeface="Calibri" pitchFamily="34" charset="0"/>
+                <a:ea typeface="Calibri" pitchFamily="34" charset="-122"/>
+                <a:cs typeface="Calibri" pitchFamily="34" charset="-120"/>
+              </a:rPr>
+              <a:t>3</a:t>
+            </a:r>
+            <a:endParaRPr lang="en-US" sz="1000" dirty="0"/>
+          </a:p>
+        </p:txBody>
+      </p:sp>
+      <p:sp>
+        <p:nvSpPr>
+          <p:cNvPr id="52" name="Text 50"/>
+          <p:cNvSpPr txBox="1"/>
+          <p:nvPr/>
+        </p:nvSpPr>
+        <p:spPr>
+          <a:xfrm>
+            <a:off x="8731301" y="4974336"/>
+            <a:ext cx="2619146" cy="475488"/>
+          </a:xfrm>
+          <a:prstGeom prst="rect">
+            <a:avLst/>
+          </a:prstGeom>
+          <a:noFill/>
+          <a:ln/>
+        </p:spPr>
+        <p:txBody>
+          <a:bodyPr wrap="square" lIns="0" tIns="0" rIns="0" bIns="0" rtlCol="0" anchor="ctr"/>
+          <a:lstStyle/>
+          <a:p>
+            <a:pPr indent="0" marL="0">
+              <a:buNone/>
+            </a:pPr>
+            <a:r>
+              <a:rPr lang="en-US" sz="1100" b="1" dirty="0">
+                <a:solidFill>
+                  <a:srgbClr val="FFFFFF"/>
+                </a:solidFill>
+                <a:latin typeface="Calibri" pitchFamily="34" charset="0"/>
+                <a:ea typeface="Calibri" pitchFamily="34" charset="-122"/>
+                <a:cs typeface="Calibri" pitchFamily="34" charset="-120"/>
+              </a:rPr>
+              <a:t>Sign the distributor agreement</a:t>
+            </a:r>
+            <a:endParaRPr lang="en-US" sz="1100" dirty="0"/>
+          </a:p>
+        </p:txBody>
+      </p:sp>
+      <p:sp>
+        <p:nvSpPr>
+          <p:cNvPr id="53" name="Text 51"/>
+          <p:cNvSpPr txBox="1"/>
+          <p:nvPr/>
+        </p:nvSpPr>
+        <p:spPr>
+          <a:xfrm>
+            <a:off x="566928" y="5943600"/>
+            <a:ext cx="11057839" cy="274320"/>
+          </a:xfrm>
+          <a:prstGeom prst="rect">
+            <a:avLst/>
+          </a:prstGeom>
+          <a:noFill/>
+          <a:ln/>
+        </p:spPr>
+        <p:txBody>
+          <a:bodyPr wrap="square" lIns="0" tIns="0" rIns="0" bIns="0" rtlCol="0" anchor="t"/>
+          <a:lstStyle/>
+          <a:p>
+            <a:pPr indent="0" marL="0">
+              <a:lnSpc>
+                <a:spcPts val="1100"/>
+              </a:lnSpc>
+              <a:buNone/>
+            </a:pPr>
+            <a:r>
+              <a:rPr lang="en-US" sz="850" i="1" dirty="0">
+                <a:solidFill>
+                  <a:srgbClr val="5B6486"/>
+                </a:solidFill>
+                <a:latin typeface="Calibri" pitchFamily="34" charset="0"/>
+                <a:ea typeface="Calibri" pitchFamily="34" charset="-122"/>
+                <a:cs typeface="Calibri" pitchFamily="34" charset="-120"/>
+              </a:rPr>
+              <a:t>Figures per this deck: savings vs on-demand from Archera's AWS pricing; tiers per the distributor agreement template (unsigned). Full sources on the slides behind each claim.</a:t>
+            </a:r>
+            <a:endParaRPr lang="en-US" sz="850" dirty="0"/>
+          </a:p>
+        </p:txBody>
+      </p:sp>
+      <p:sp>
+        <p:nvSpPr>
+          <p:cNvPr id="54" name="Text 52"/>
+          <p:cNvSpPr txBox="1"/>
+          <p:nvPr/>
+        </p:nvSpPr>
+        <p:spPr>
+          <a:xfrm>
+            <a:off x="566928" y="6309360"/>
+            <a:ext cx="7315200" cy="274320"/>
+          </a:xfrm>
+          <a:prstGeom prst="rect">
+            <a:avLst/>
+          </a:prstGeom>
+          <a:noFill/>
+          <a:ln/>
+        </p:spPr>
+        <p:txBody>
+          <a:bodyPr wrap="square" lIns="0" tIns="0" rIns="0" bIns="0" rtlCol="0" anchor="ctr"/>
+          <a:lstStyle/>
+          <a:p>
+            <a:pPr indent="0" marL="0">
+              <a:buNone/>
+            </a:pPr>
+            <a:r>
+              <a:rPr lang="en-US" sz="1000" spc="80" kern="0" dirty="0">
+                <a:solidFill>
+                  <a:srgbClr val="5B6486"/>
+                </a:solidFill>
+                <a:latin typeface="Calibri" pitchFamily="34" charset="0"/>
+                <a:ea typeface="Calibri" pitchFamily="34" charset="-122"/>
+                <a:cs typeface="Calibri" pitchFamily="34" charset="-120"/>
+              </a:rPr>
+              <a:t>Prepared by Only Best Practices  ·  AWS Alliance Advisory</a:t>
+            </a:r>
+            <a:endParaRPr lang="en-US" sz="1000" dirty="0"/>
+          </a:p>
+        </p:txBody>
+      </p:sp>
+      <p:sp>
+        <p:nvSpPr>
+          <p:cNvPr id="55" name="Text 53"/>
+          <p:cNvSpPr txBox="1"/>
+          <p:nvPr/>
+        </p:nvSpPr>
+        <p:spPr>
+          <a:xfrm>
+            <a:off x="10527487" y="6309360"/>
+            <a:ext cx="1097280" cy="274320"/>
+          </a:xfrm>
+          <a:prstGeom prst="rect">
+            <a:avLst/>
+          </a:prstGeom>
+          <a:noFill/>
+          <a:ln/>
+        </p:spPr>
+        <p:txBody>
+          <a:bodyPr wrap="square" lIns="0" tIns="0" rIns="0" bIns="0" rtlCol="0" anchor="ctr"/>
+          <a:lstStyle/>
+          <a:p>
+            <a:pPr algn="r" indent="0" marL="0">
+              <a:buNone/>
+            </a:pPr>
+            <a:r>
+              <a:rPr lang="en-US" sz="900" dirty="0">
+                <a:solidFill>
+                  <a:srgbClr val="5B6486"/>
+                </a:solidFill>
+                <a:latin typeface="Calibri" pitchFamily="34" charset="0"/>
+                <a:ea typeface="Calibri" pitchFamily="34" charset="-122"/>
+                <a:cs typeface="Calibri" pitchFamily="34" charset="-120"/>
+              </a:rPr>
+              <a:t>21</a:t>
+            </a:r>
+            <a:endParaRPr lang="en-US" sz="900" dirty="0"/>
+          </a:p>
+        </p:txBody>
+      </p:sp>
+    </p:spTree>
+  </p:cSld>
+  <p:clrMapOvr>
+    <a:masterClrMapping/>
+  </p:clrMapOvr>
+</p:sld>
+</file>
+
 <file path=ppt/slides/slide3.xml><?xml version="1.0" encoding="utf-8"?>
 <p:sld xmlns:a="http://schemas.openxmlformats.org/drawingml/2006/main" xmlns:r="http://schemas.openxmlformats.org/officeDocument/2006/relationships" xmlns:p="http://schemas.openxmlformats.org/presentationml/2006/main">
   <p:cSld name="Slide 3">
@@ -18519,19 +20863,22 @@
         <p:spPr>
           <a:xfrm>
             <a:off x="566928" y="5340096"/>
-            <a:ext cx="11057839" cy="365760"/>
-          </a:xfrm>
-          <a:prstGeom prst="rect">
-            <a:avLst/>
-          </a:prstGeom>
-          <a:noFill/>
-          <a:ln/>
-        </p:spPr>
-        <p:txBody>
-          <a:bodyPr wrap="square" lIns="0" tIns="0" rIns="0" bIns="0" rtlCol="0" anchor="ctr"/>
-          <a:lstStyle/>
-          <a:p>
-            <a:pPr indent="0" marL="0">
+            <a:ext cx="11057839" cy="566928"/>
+          </a:xfrm>
+          <a:prstGeom prst="rect">
+            <a:avLst/>
+          </a:prstGeom>
+          <a:noFill/>
+          <a:ln/>
+        </p:spPr>
+        <p:txBody>
+          <a:bodyPr wrap="square" lIns="0" tIns="0" rIns="0" bIns="0" rtlCol="0" anchor="t"/>
+          <a:lstStyle/>
+          <a:p>
+            <a:pPr indent="0" marL="0">
+              <a:lnSpc>
+                <a:spcPts val="1900"/>
+              </a:lnSpc>
               <a:buNone/>
             </a:pPr>
             <a:r>
@@ -18546,6 +20893,9 @@
               <a:t>The first one is the point. </a:t>
             </a:r>
             <a:pPr indent="0" marL="0">
+              <a:lnSpc>
+                <a:spcPts val="1900"/>
+              </a:lnSpc>
               <a:buNone/>
             </a:pPr>
             <a:r>
@@ -18557,7 +20907,7 @@
                 <a:ea typeface="Calibri" pitchFamily="34" charset="-122"/>
                 <a:cs typeface="Calibri" pitchFamily="34" charset="-120"/>
               </a:rPr>
-              <a:t>The other three compound on top of it — and part four runs them as five motions, starting with the attach, which works on day one.</a:t>
+              <a:t>The other three compound on top of it — and part four runs them as five motions, starting with the attach, which works on day one. One clock to respect: rev-share counts only entities net-new to Archera.</a:t>
             </a:r>
             <a:endParaRPr lang="en-US" sz="1300" dirty="0"/>
           </a:p>
@@ -23318,7 +25668,7 @@
                 <a:ea typeface="Calibri" pitchFamily="34" charset="-122"/>
                 <a:cs typeface="Calibri" pitchFamily="34" charset="-120"/>
               </a:rPr>
-              <a:t>Illustrative. Reservable share and the blended Archera rate are assumptions; the 45% coverage gap follows the measured 55% median AWS commitment coverage (ProsperOps). The 22% premium is the gap between the 57% a three-year creates and the 35% blended net the customer keeps. Rev-share tiers per Archera's distributor agreement: Bronze 20% (under $100K GRI/GSP MRR), Silver 25% (under $500K), Gold 30% ($1M+) — the base case's ~$119K premium MRR lands in Silver.</a:t>
+              <a:t>Illustrative. Reservable share and the blended Archera rate are assumptions; the 45% coverage gap follows the measured 55% median AWS commitment coverage (ProsperOps). The 22% premium is the gap between the 57% a three-year creates and the 35% blended net the customer keeps. Rev-share tiers per Archera's distributor agreement: Bronze 20% (under $100K commitment MRR), Silver 25% (under $500K), Gold 30% ($1M+) — the base case's ~$119K premium MRR lands in Silver.</a:t>
             </a:r>
             <a:endParaRPr lang="en-US" sz="850" dirty="0"/>
           </a:p>

--- a/decks/Archera-for-Automatum.pptx
+++ b/decks/Archera-for-Automatum.pptx
@@ -1485,7 +1485,7 @@
           <a:p>
             <a:r>
               <a:rPr lang="en-US" dirty="0"/>
-              <a:t>This is the slide that separates Automatum from a generic partner pitch: the rev-share plumbing most partners would have to build is the product Automatum already sells. The evidence line to speak to: ProsperOps measures the median company under $500K of annual compute as having captured nothing — and that is most of an ISV base. The sequencing slide carries the full bands.</a:t>
+              <a:t>This is the slide that separates Automatum from a generic partner pitch: the rev-share plumbing most partners would have to build is the product Automatum already sells. The base includes enterprise names — CBRE, Knight Frank, Deel, ELMO, Subex, Tanda, Energy Exemplar, SettleMint — not just startups, which strengthens the mid- and upper-band sizing. The evidence line to speak to: ProsperOps measures the median company under $500K of annual compute as having captured nothing — and that is most of an ISV base. The sequencing slide carries the full bands.</a:t>
             </a:r>
             <a:endParaRPr lang="en-US" dirty="0"/>
           </a:p>
@@ -1661,7 +1661,7 @@
           <a:p>
             <a:r>
               <a:rPr lang="en-US" dirty="0"/>
-              <a:t>Deliberately left open: we do not put Automatum's price on the slide, because we do not have it and guessing it would undermine everything else. Ask them to fill it in live — if a mid-tier subscription sits anywhere below roughly $28K a year, self-funding is arithmetic rather than marketing. This is also the retention argument: ask directly what a renewal conversation looks like when the customer sees a larger number coming back off their AWS bill than they pay Automatum.</a:t>
+              <a:t>The self-funding claim is now arithmetic against Automatum's own list prices ($1,199 / $3,999 / $9,999 a year): the base-case ISV's savings run 2.8x the Enterprise plan, and the thresholds in the caption show even Startup-plan customers self-fund from about $1.1K a month of AWS spend. Caveat to say out loud: list prices — negotiated or legacy pricing may differ. This is also the retention argument: ask what a renewal conversation looks like when the customer sees a larger number coming back off their AWS bill than they pay Automatum.</a:t>
             </a:r>
             <a:endParaRPr lang="en-US" dirty="0"/>
           </a:p>
@@ -15461,7 +15461,7 @@
                 <a:ea typeface="Calibri" pitchFamily="34" charset="-122"/>
                 <a:cs typeface="Calibri" pitchFamily="34" charset="-120"/>
               </a:rPr>
-              <a:t>The customer's AWS saving can cover what they pay Automatum — turning a cost line into one that argues for itself.</a:t>
+              <a:t>Base-case savings run ~3× the $9,999 Enterprise plan — turning a cost line into one that argues for itself.</a:t>
             </a:r>
             <a:endParaRPr lang="en-US" sz="1100" dirty="0"/>
           </a:p>
@@ -17466,7 +17466,7 @@
                 <a:ea typeface="Calibri" pitchFamily="34" charset="-122"/>
                 <a:cs typeface="Calibri" pitchFamily="34" charset="-120"/>
               </a:rPr>
-              <a:t>~14 days</a:t>
+              <a:t>5–7 days</a:t>
             </a:r>
             <a:endParaRPr lang="en-US" sz="1900" dirty="0"/>
           </a:p>
@@ -17505,7 +17505,7 @@
                 <a:ea typeface="Calibri" pitchFamily="34" charset="-122"/>
                 <a:cs typeface="Calibri" pitchFamily="34" charset="-120"/>
               </a:rPr>
-              <a:t>to first listing</a:t>
+              <a:t>average listing</a:t>
             </a:r>
             <a:endParaRPr lang="en-US" sz="1000" dirty="0"/>
           </a:p>
@@ -18098,7 +18098,7 @@
                 <a:ea typeface="Calibri" pitchFamily="34" charset="-122"/>
                 <a:cs typeface="Calibri" pitchFamily="34" charset="-120"/>
               </a:rPr>
-              <a:t>Automatum figures per the company's published positioning (automatum.io) — confirm before circulation.</a:t>
+              <a:t>Listing stats and plan pricing per Automatum's own materials; $120M+ GMV, 2021 and the four-marketplace count per published positioning — confirm those before circulation.</a:t>
             </a:r>
             <a:endParaRPr lang="en-US" sz="850" dirty="0"/>
           </a:p>
@@ -21059,12 +21059,12 @@
         </p:nvSpPr>
         <p:spPr>
           <a:xfrm>
-            <a:off x="566928" y="5230368"/>
-            <a:ext cx="11057839" cy="859536"/>
+            <a:off x="566928" y="5175504"/>
+            <a:ext cx="11057839" cy="841248"/>
           </a:xfrm>
           <a:prstGeom prst="roundRect">
             <a:avLst>
-              <a:gd name="adj" fmla="val 7447"/>
+              <a:gd name="adj" fmla="val 7609"/>
             </a:avLst>
           </a:prstGeom>
           <a:solidFill>
@@ -21086,8 +21086,8 @@
         </p:nvSpPr>
         <p:spPr>
           <a:xfrm>
-            <a:off x="877824" y="5230368"/>
-            <a:ext cx="10436047" cy="859536"/>
+            <a:off x="877824" y="5175504"/>
+            <a:ext cx="10436047" cy="841248"/>
           </a:xfrm>
           <a:prstGeom prst="rect">
             <a:avLst/>
@@ -21114,7 +21114,7 @@
                 <a:ea typeface="Calibri" pitchFamily="34" charset="-122"/>
                 <a:cs typeface="Calibri" pitchFamily="34" charset="-120"/>
               </a:rPr>
-              <a:t>$28.4K a year back — for many ISVs, more than the Automatum subscription. </a:t>
+              <a:t>$28.4K a year back — nearly three times the $9,999 Enterprise plan. </a:t>
             </a:r>
             <a:pPr indent="0" marL="0">
               <a:lnSpc>
@@ -21145,7 +21145,7 @@
         </p:nvSpPr>
         <p:spPr>
           <a:xfrm>
-            <a:off x="566928" y="6163056"/>
+            <a:off x="566928" y="6071616"/>
             <a:ext cx="11057839" cy="274320"/>
           </a:xfrm>
           <a:prstGeom prst="rect">
@@ -21173,7 +21173,7 @@
                 <a:ea typeface="Calibri" pitchFamily="34" charset="-122"/>
                 <a:cs typeface="Calibri" pitchFamily="34" charset="-120"/>
               </a:rPr>
-              <a:t>Illustrative, at the base-case assumptions from the previous slide. Net of Archera's premium. Drop Automatum's own list price into the takeaway to close the argument in front of a customer.</a:t>
+              <a:t>Illustrative, at the base-case assumptions from the previous slide, net of Archera's premium. At the 35% blended net rate, savings cover the $1,199 Startup plan from ~$1.1K a month of AWS spend, the $3,999 Scale-up from ~$3.5K, and the $9,999 Enterprise from ~$9K. Plan prices per Automatum's published list.</a:t>
             </a:r>
             <a:endParaRPr lang="en-US" sz="850" dirty="0"/>
           </a:p>
@@ -23456,7 +23456,7 @@
                 <a:ea typeface="Calibri" pitchFamily="34" charset="-122"/>
                 <a:cs typeface="Calibri" pitchFamily="34" charset="-120"/>
               </a:rPr>
-              <a:t>Instrument the motion like marketplace revenue: accounts connected, coverage baseline, savings realised, premium billed, rev-share accrued. The constraint is calendar time and analysis throughput, not lead generation — every account is already a customer. Bands: ProsperOps median Effective Savings Rate by annual AWS compute usage.</a:t>
+              <a:t>Instrument the motion like marketplace revenue: accounts connected, coverage baseline, savings realised, premium billed, rev-share accrued. The constraint is calendar time, not lead generation — every account is already a customer, and at list prices any ISV spending ~$9K+ a month on AWS covers the Enterprise plan from savings alone. Bands: ProsperOps median ESR by annual AWS compute usage.</a:t>
             </a:r>
             <a:endParaRPr lang="en-US" sz="850" dirty="0"/>
           </a:p>
